--- a/slides/05-mcp-plugins.pptx
+++ b/slides/05-mcp-plugins.pptx
@@ -646,91 +646,91 @@
 </file>
 
 <file path=ppt/notesSlides/notesSlide11.xml><?xml version="1.0" encoding="utf-8"?>
-<p:notes xmlns:a="http://schemas.openxmlformats.org/drawingml/2006/main" xmlns:r="http://schemas.openxmlformats.org/officeDocument/2006/relationships" xmlns:p="http://schemas.openxmlformats.org/presentationml/2006/main">
-  <p:cSld>
-    <p:spTree>
-      <p:nvGrpSpPr>
-        <p:cNvPr id="1" name=""/>
-        <p:cNvGrpSpPr/>
-        <p:nvPr/>
-      </p:nvGrpSpPr>
-      <p:grpSpPr>
-        <a:xfrm>
-          <a:off x="0" y="0"/>
-          <a:ext cx="0" cy="0"/>
-          <a:chOff x="0" y="0"/>
-          <a:chExt cx="0" cy="0"/>
-        </a:xfrm>
-      </p:grpSpPr>
-      <p:sp>
-        <p:nvSpPr>
-          <p:cNvPr id="2" name="Slide Image Placeholder 1"/>
-          <p:cNvSpPr>
-            <a:spLocks noGrp="1" noRot="1" noChangeAspect="1"/>
-          </p:cNvSpPr>
-          <p:nvPr>
-            <p:ph type="sldImg"/>
-          </p:nvPr>
-        </p:nvSpPr>
-        <p:spPr/>
-      </p:sp>
-      <p:sp>
-        <p:nvSpPr>
-          <p:cNvPr id="3" name="Notes Placeholder 2"/>
-          <p:cNvSpPr>
-            <a:spLocks noGrp="1"/>
-          </p:cNvSpPr>
-          <p:nvPr>
-            <p:ph type="body" idx="1"/>
-          </p:nvPr>
-        </p:nvSpPr>
-        <p:spPr/>
-        <p:txBody>
-          <a:bodyPr/>
-          <a:lstStyle/>
-          <a:p>
-            <a:r>
-              <a:rPr lang="en-US" dirty="0"/>
-              <a:t>A marketplace is a catalog of plugins. Read a plugin's contents, not only its description; some start processes, call services, or run hooks, which are commands triggered by agent events. In Customize, Plugins, search for modern-web-guidance, then expand the awesome-copilot marketplace under Available; the app searches a marketplace only after you expand it. If it is missing and policy allows, select the gear icon, Manage marketplaces, and add github/awesome-copilot. Confirm the source, then install it and check that it appears under Installed in the Plugins tab with its toggle on. The skill uses npx, so it needs Node.js and internet access. If enterprise policy blocks it, record the exercise as blocked and continue.</a:t>
-            </a:r>
-            <a:endParaRPr lang="en-US" dirty="0"/>
-          </a:p>
-        </p:txBody>
-      </p:sp>
-      <p:sp>
-        <p:nvSpPr>
-          <p:cNvPr id="4" name="Slide Number Placeholder 3"/>
-          <p:cNvSpPr>
-            <a:spLocks noGrp="1"/>
-          </p:cNvSpPr>
-          <p:nvPr>
-            <p:ph type="sldNum" sz="quarter" idx="10"/>
-          </p:nvPr>
-        </p:nvSpPr>
-        <p:spPr/>
-        <p:txBody>
-          <a:bodyPr/>
-          <a:lstStyle/>
-          <a:p>
-            <a:fld id="{F7021451-1387-4CA6-816F-3879F97B5CBC}" type="slidenum">
-              <a:rPr lang="en-US"/>
-              <a:t>11</a:t>
-            </a:fld>
-            <a:endParaRPr lang="en-US"/>
-          </a:p>
-        </p:txBody>
-      </p:sp>
-    </p:spTree>
-    <p:extLst>
-      <p:ext uri="{BB962C8B-B14F-4D97-AF65-F5344CB8AC3E}">
-        <p14:creationId xmlns:p14="http://schemas.microsoft.com/office/powerpoint/2010/main" val="1024086991"/>
-      </p:ext>
-    </p:extLst>
-  </p:cSld>
-  <p:clrMapOvr>
-    <a:masterClrMapping/>
-  </p:clrMapOvr>
-</p:notes>
+<ns0:notes xmlns:ns0="http://schemas.openxmlformats.org/presentationml/2006/main" xmlns:ns1="http://schemas.openxmlformats.org/drawingml/2006/main" xmlns:ns2="http://schemas.microsoft.com/office/powerpoint/2010/main">
+  <ns0:cSld>
+    <ns0:spTree>
+      <ns0:nvGrpSpPr>
+        <ns0:cNvPr id="1" name=""/>
+        <ns0:cNvGrpSpPr/>
+        <ns0:nvPr/>
+      </ns0:nvGrpSpPr>
+      <ns0:grpSpPr>
+        <ns1:xfrm>
+          <ns1:off x="0" y="0"/>
+          <ns1:ext cx="0" cy="0"/>
+          <ns1:chOff x="0" y="0"/>
+          <ns1:chExt cx="0" cy="0"/>
+        </ns1:xfrm>
+      </ns0:grpSpPr>
+      <ns0:sp>
+        <ns0:nvSpPr>
+          <ns0:cNvPr id="2" name="Slide Image Placeholder 1"/>
+          <ns0:cNvSpPr>
+            <ns1:spLocks noGrp="1" noRot="1" noChangeAspect="1"/>
+          </ns0:cNvSpPr>
+          <ns0:nvPr>
+            <ns0:ph type="sldImg"/>
+          </ns0:nvPr>
+        </ns0:nvSpPr>
+        <ns0:spPr/>
+      </ns0:sp>
+      <ns0:sp>
+        <ns0:nvSpPr>
+          <ns0:cNvPr id="3" name="Notes Placeholder 2"/>
+          <ns0:cNvSpPr>
+            <ns1:spLocks noGrp="1"/>
+          </ns0:cNvSpPr>
+          <ns0:nvPr>
+            <ns0:ph type="body" idx="1"/>
+          </ns0:nvPr>
+        </ns0:nvSpPr>
+        <ns0:spPr/>
+        <ns0:txBody>
+          <ns1:bodyPr/>
+          <ns1:lstStyle/>
+          <ns1:p>
+            <ns1:r>
+              <ns1:rPr lang="en-US" dirty="0"/>
+              <ns1:t>A marketplace is a catalog of plugins. Read a plugin's contents, not only its description; some start processes, call services, or run hooks, which are commands triggered by agent events. In Customize, open Browse, select the Plugins type filter, and search for modern-web-guidance. Expand the awesome-copilot marketplace under Available; the app searches a marketplace only after you expand it. If it is missing and policy allows, select Add &gt; Manage marketplaces and add github/awesome-copilot. Confirm the source, install it, then open Installed and confirm the plugin is listed with its toggle on. The skill uses npx, so it needs Node.js and internet access. If enterprise policy blocks it, record the exercise as blocked and continue.</ns1:t>
+            </ns1:r>
+            <ns1:endParaRPr lang="en-US" dirty="0"/>
+          </ns1:p>
+        </ns0:txBody>
+      </ns0:sp>
+      <ns0:sp>
+        <ns0:nvSpPr>
+          <ns0:cNvPr id="4" name="Slide Number Placeholder 3"/>
+          <ns0:cNvSpPr>
+            <ns1:spLocks noGrp="1"/>
+          </ns0:cNvSpPr>
+          <ns0:nvPr>
+            <ns0:ph type="sldNum" sz="quarter" idx="10"/>
+          </ns0:nvPr>
+        </ns0:nvSpPr>
+        <ns0:spPr/>
+        <ns0:txBody>
+          <ns1:bodyPr/>
+          <ns1:lstStyle/>
+          <ns1:p>
+            <ns1:fld id="{F7021451-1387-4CA6-816F-3879F97B5CBC}" type="slidenum">
+              <ns1:rPr lang="en-US"/>
+              <ns1:t>11</ns1:t>
+            </ns1:fld>
+            <ns1:endParaRPr lang="en-US"/>
+          </ns1:p>
+        </ns0:txBody>
+      </ns0:sp>
+    </ns0:spTree>
+    <ns0:extLst>
+      <ns0:ext uri="{BB962C8B-B14F-4D97-AF65-F5344CB8AC3E}">
+        <ns2:creationId val="1024086991"/>
+      </ns0:ext>
+    </ns0:extLst>
+  </ns0:cSld>
+  <ns0:clrMapOvr>
+    <ns1:masterClrMapping/>
+  </ns0:clrMapOvr>
+</ns0:notes>
 </file>
 
 <file path=ppt/notesSlides/notesSlide12.xml><?xml version="1.0" encoding="utf-8"?>
@@ -1438,179 +1438,179 @@
 </file>
 
 <file path=ppt/notesSlides/notesSlide7.xml><?xml version="1.0" encoding="utf-8"?>
-<p:notes xmlns:a="http://schemas.openxmlformats.org/drawingml/2006/main" xmlns:r="http://schemas.openxmlformats.org/officeDocument/2006/relationships" xmlns:p="http://schemas.openxmlformats.org/presentationml/2006/main">
-  <p:cSld>
-    <p:spTree>
-      <p:nvGrpSpPr>
-        <p:cNvPr id="1" name=""/>
-        <p:cNvGrpSpPr/>
-        <p:nvPr/>
-      </p:nvGrpSpPr>
-      <p:grpSpPr>
-        <a:xfrm>
-          <a:off x="0" y="0"/>
-          <a:ext cx="0" cy="0"/>
-          <a:chOff x="0" y="0"/>
-          <a:chExt cx="0" cy="0"/>
-        </a:xfrm>
-      </p:grpSpPr>
-      <p:sp>
-        <p:nvSpPr>
-          <p:cNvPr id="2" name="Slide Image Placeholder 1"/>
-          <p:cNvSpPr>
-            <a:spLocks noGrp="1" noRot="1" noChangeAspect="1"/>
-          </p:cNvSpPr>
-          <p:nvPr>
-            <p:ph type="sldImg"/>
-          </p:nvPr>
-        </p:nvSpPr>
-        <p:spPr/>
-      </p:sp>
-      <p:sp>
-        <p:nvSpPr>
-          <p:cNvPr id="3" name="Notes Placeholder 2"/>
-          <p:cNvSpPr>
-            <a:spLocks noGrp="1"/>
-          </p:cNvSpPr>
-          <p:nvPr>
-            <p:ph type="body" idx="1"/>
-          </p:nvPr>
-        </p:nvSpPr>
-        <p:spPr/>
-        <p:txBody>
-          <a:bodyPr/>
-          <a:lstStyle/>
-          <a:p>
-            <a:r>
-              <a:rPr lang="en-US" dirty="0"/>
-              <a:t>Model Context Protocol defines how an AI application connects to tools and data. An MCP server supplies those tools. The graphic shows example connections, not required installations. The app already reads and searches local files, and you do not need another GitHub server for the Chapter 03 work. Configure MCP under Customize, MCP, not the Extensions tab.</a:t>
-            </a:r>
-            <a:endParaRPr lang="en-US" dirty="0"/>
-          </a:p>
-        </p:txBody>
-      </p:sp>
-      <p:sp>
-        <p:nvSpPr>
-          <p:cNvPr id="4" name="Slide Number Placeholder 3"/>
-          <p:cNvSpPr>
-            <a:spLocks noGrp="1"/>
-          </p:cNvSpPr>
-          <p:nvPr>
-            <p:ph type="sldNum" sz="quarter" idx="10"/>
-          </p:nvPr>
-        </p:nvSpPr>
-        <p:spPr/>
-        <p:txBody>
-          <a:bodyPr/>
-          <a:lstStyle/>
-          <a:p>
-            <a:fld id="{F7021451-1387-4CA6-816F-3879F97B5CBC}" type="slidenum">
-              <a:rPr lang="en-US"/>
-              <a:t>7</a:t>
-            </a:fld>
-            <a:endParaRPr lang="en-US"/>
-          </a:p>
-        </p:txBody>
-      </p:sp>
-    </p:spTree>
-    <p:extLst>
-      <p:ext uri="{BB962C8B-B14F-4D97-AF65-F5344CB8AC3E}">
-        <p14:creationId xmlns:p14="http://schemas.microsoft.com/office/powerpoint/2010/main" val="1024086991"/>
-      </p:ext>
-    </p:extLst>
-  </p:cSld>
-  <p:clrMapOvr>
-    <a:masterClrMapping/>
-  </p:clrMapOvr>
-</p:notes>
+<ns0:notes xmlns:ns0="http://schemas.openxmlformats.org/presentationml/2006/main" xmlns:ns1="http://schemas.openxmlformats.org/drawingml/2006/main" xmlns:ns2="http://schemas.microsoft.com/office/powerpoint/2010/main">
+  <ns0:cSld>
+    <ns0:spTree>
+      <ns0:nvGrpSpPr>
+        <ns0:cNvPr id="1" name=""/>
+        <ns0:cNvGrpSpPr/>
+        <ns0:nvPr/>
+      </ns0:nvGrpSpPr>
+      <ns0:grpSpPr>
+        <ns1:xfrm>
+          <ns1:off x="0" y="0"/>
+          <ns1:ext cx="0" cy="0"/>
+          <ns1:chOff x="0" y="0"/>
+          <ns1:chExt cx="0" cy="0"/>
+        </ns1:xfrm>
+      </ns0:grpSpPr>
+      <ns0:sp>
+        <ns0:nvSpPr>
+          <ns0:cNvPr id="2" name="Slide Image Placeholder 1"/>
+          <ns0:cNvSpPr>
+            <ns1:spLocks noGrp="1" noRot="1" noChangeAspect="1"/>
+          </ns0:cNvSpPr>
+          <ns0:nvPr>
+            <ns0:ph type="sldImg"/>
+          </ns0:nvPr>
+        </ns0:nvSpPr>
+        <ns0:spPr/>
+      </ns0:sp>
+      <ns0:sp>
+        <ns0:nvSpPr>
+          <ns0:cNvPr id="3" name="Notes Placeholder 2"/>
+          <ns0:cNvSpPr>
+            <ns1:spLocks noGrp="1"/>
+          </ns0:cNvSpPr>
+          <ns0:nvPr>
+            <ns0:ph type="body" idx="1"/>
+          </ns0:nvPr>
+        </ns0:nvSpPr>
+        <ns0:spPr/>
+        <ns0:txBody>
+          <ns1:bodyPr/>
+          <ns1:lstStyle/>
+          <ns1:p>
+            <ns1:r>
+              <ns1:rPr lang="en-US" dirty="0"/>
+              <ns1:t>Model Context Protocol defines how an AI application connects to tools and data. An MCP server supplies those tools. The graphic shows example connections, not required installations. The app already reads and searches local files, and you do not need another GitHub server for the Chapter 03 work. Manage servers from Customize. Use Browse to find available servers and Installed to check the ones you have added.</ns1:t>
+            </ns1:r>
+            <ns1:endParaRPr lang="en-US" dirty="0"/>
+          </ns1:p>
+        </ns0:txBody>
+      </ns0:sp>
+      <ns0:sp>
+        <ns0:nvSpPr>
+          <ns0:cNvPr id="4" name="Slide Number Placeholder 3"/>
+          <ns0:cNvSpPr>
+            <ns1:spLocks noGrp="1"/>
+          </ns0:cNvSpPr>
+          <ns0:nvPr>
+            <ns0:ph type="sldNum" sz="quarter" idx="10"/>
+          </ns0:nvPr>
+        </ns0:nvSpPr>
+        <ns0:spPr/>
+        <ns0:txBody>
+          <ns1:bodyPr/>
+          <ns1:lstStyle/>
+          <ns1:p>
+            <ns1:fld id="{F7021451-1387-4CA6-816F-3879F97B5CBC}" type="slidenum">
+              <ns1:rPr lang="en-US"/>
+              <ns1:t>7</ns1:t>
+            </ns1:fld>
+            <ns1:endParaRPr lang="en-US"/>
+          </ns1:p>
+        </ns0:txBody>
+      </ns0:sp>
+    </ns0:spTree>
+    <ns0:extLst>
+      <ns0:ext uri="{BB962C8B-B14F-4D97-AF65-F5344CB8AC3E}">
+        <ns2:creationId val="1024086991"/>
+      </ns0:ext>
+    </ns0:extLst>
+  </ns0:cSld>
+  <ns0:clrMapOvr>
+    <ns1:masterClrMapping/>
+  </ns0:clrMapOvr>
+</ns0:notes>
 </file>
 
 <file path=ppt/notesSlides/notesSlide8.xml><?xml version="1.0" encoding="utf-8"?>
-<p:notes xmlns:a="http://schemas.openxmlformats.org/drawingml/2006/main" xmlns:r="http://schemas.openxmlformats.org/officeDocument/2006/relationships" xmlns:p="http://schemas.openxmlformats.org/presentationml/2006/main">
-  <p:cSld>
-    <p:spTree>
-      <p:nvGrpSpPr>
-        <p:cNvPr id="1" name=""/>
-        <p:cNvGrpSpPr/>
-        <p:nvPr/>
-      </p:nvGrpSpPr>
-      <p:grpSpPr>
-        <a:xfrm>
-          <a:off x="0" y="0"/>
-          <a:ext cx="0" cy="0"/>
-          <a:chOff x="0" y="0"/>
-          <a:chExt cx="0" cy="0"/>
-        </a:xfrm>
-      </p:grpSpPr>
-      <p:sp>
-        <p:nvSpPr>
-          <p:cNvPr id="2" name="Slide Image Placeholder 1"/>
-          <p:cNvSpPr>
-            <a:spLocks noGrp="1" noRot="1" noChangeAspect="1"/>
-          </p:cNvSpPr>
-          <p:nvPr>
-            <p:ph type="sldImg"/>
-          </p:nvPr>
-        </p:nvSpPr>
-        <p:spPr/>
-      </p:sp>
-      <p:sp>
-        <p:nvSpPr>
-          <p:cNvPr id="3" name="Notes Placeholder 2"/>
-          <p:cNvSpPr>
-            <a:spLocks noGrp="1"/>
-          </p:cNvSpPr>
-          <p:nvPr>
-            <p:ph type="body" idx="1"/>
-          </p:nvPr>
-        </p:nvSpPr>
-        <p:spPr/>
-        <p:txBody>
-          <a:bodyPr/>
-          <a:lstStyle/>
-          <a:p>
-            <a:r>
-              <a:rPr lang="en-US" dirty="0"/>
-              <a:t>Open Customize, then MCP. Search for context7 and select Add server on the Context7 row. Review the configuration: server name context7, server type HTTP, and the URL https://mcp.context7.com/mcp. HTTP means the app connects to a hosted server instead of starting a local process. After adding it, confirm that Context7 appears under Installed in the MCP tab with its connected icon and enabled toggle. An enabled toggle alone does not prove it is connected. Use one connection per service.</a:t>
-            </a:r>
-            <a:endParaRPr lang="en-US" dirty="0"/>
-          </a:p>
-        </p:txBody>
-      </p:sp>
-      <p:sp>
-        <p:nvSpPr>
-          <p:cNvPr id="4" name="Slide Number Placeholder 3"/>
-          <p:cNvSpPr>
-            <a:spLocks noGrp="1"/>
-          </p:cNvSpPr>
-          <p:nvPr>
-            <p:ph type="sldNum" sz="quarter" idx="10"/>
-          </p:nvPr>
-        </p:nvSpPr>
-        <p:spPr/>
-        <p:txBody>
-          <a:bodyPr/>
-          <a:lstStyle/>
-          <a:p>
-            <a:fld id="{F7021451-1387-4CA6-816F-3879F97B5CBC}" type="slidenum">
-              <a:rPr lang="en-US"/>
-              <a:t>8</a:t>
-            </a:fld>
-            <a:endParaRPr lang="en-US"/>
-          </a:p>
-        </p:txBody>
-      </p:sp>
-    </p:spTree>
-    <p:extLst>
-      <p:ext uri="{BB962C8B-B14F-4D97-AF65-F5344CB8AC3E}">
-        <p14:creationId xmlns:p14="http://schemas.microsoft.com/office/powerpoint/2010/main" val="1024086991"/>
-      </p:ext>
-    </p:extLst>
-  </p:cSld>
-  <p:clrMapOvr>
-    <a:masterClrMapping/>
-  </p:clrMapOvr>
-</p:notes>
+<ns0:notes xmlns:ns0="http://schemas.openxmlformats.org/presentationml/2006/main" xmlns:ns1="http://schemas.openxmlformats.org/drawingml/2006/main" xmlns:ns2="http://schemas.microsoft.com/office/powerpoint/2010/main">
+  <ns0:cSld>
+    <ns0:spTree>
+      <ns0:nvGrpSpPr>
+        <ns0:cNvPr id="1" name=""/>
+        <ns0:cNvGrpSpPr/>
+        <ns0:nvPr/>
+      </ns0:nvGrpSpPr>
+      <ns0:grpSpPr>
+        <ns1:xfrm>
+          <ns1:off x="0" y="0"/>
+          <ns1:ext cx="0" cy="0"/>
+          <ns1:chOff x="0" y="0"/>
+          <ns1:chExt cx="0" cy="0"/>
+        </ns1:xfrm>
+      </ns0:grpSpPr>
+      <ns0:sp>
+        <ns0:nvSpPr>
+          <ns0:cNvPr id="2" name="Slide Image Placeholder 1"/>
+          <ns0:cNvSpPr>
+            <ns1:spLocks noGrp="1" noRot="1" noChangeAspect="1"/>
+          </ns0:cNvSpPr>
+          <ns0:nvPr>
+            <ns0:ph type="sldImg"/>
+          </ns0:nvPr>
+        </ns0:nvSpPr>
+        <ns0:spPr/>
+      </ns0:sp>
+      <ns0:sp>
+        <ns0:nvSpPr>
+          <ns0:cNvPr id="3" name="Notes Placeholder 2"/>
+          <ns0:cNvSpPr>
+            <ns1:spLocks noGrp="1"/>
+          </ns0:cNvSpPr>
+          <ns0:nvPr>
+            <ns0:ph type="body" idx="1"/>
+          </ns0:nvPr>
+        </ns0:nvSpPr>
+        <ns0:spPr/>
+        <ns0:txBody>
+          <ns1:bodyPr/>
+          <ns1:lstStyle/>
+          <ns1:p>
+            <ns1:r>
+              <ns1:rPr lang="en-US" dirty="0"/>
+              <ns1:t>Open Customize and select Browse. Choose the MCP type filter, search for Context7, then select Add server. Review the configuration: server name context7, server type HTTP, and the URL https://mcp.context7.com/mcp. HTTP means the app connects to a hosted server instead of starting a local process. After adding it, open Installed, filter to MCP, and confirm Context7 is connected and enabled. An enabled toggle alone does not prove it is connected. Use one connection per service.</ns1:t>
+            </ns1:r>
+            <ns1:endParaRPr lang="en-US" dirty="0"/>
+          </ns1:p>
+        </ns0:txBody>
+      </ns0:sp>
+      <ns0:sp>
+        <ns0:nvSpPr>
+          <ns0:cNvPr id="4" name="Slide Number Placeholder 3"/>
+          <ns0:cNvSpPr>
+            <ns1:spLocks noGrp="1"/>
+          </ns0:cNvSpPr>
+          <ns0:nvPr>
+            <ns0:ph type="sldNum" sz="quarter" idx="10"/>
+          </ns0:nvPr>
+        </ns0:nvSpPr>
+        <ns0:spPr/>
+        <ns0:txBody>
+          <ns1:bodyPr/>
+          <ns1:lstStyle/>
+          <ns1:p>
+            <ns1:fld id="{F7021451-1387-4CA6-816F-3879F97B5CBC}" type="slidenum">
+              <ns1:rPr lang="en-US"/>
+              <ns1:t>8</ns1:t>
+            </ns1:fld>
+            <ns1:endParaRPr lang="en-US"/>
+          </ns1:p>
+        </ns0:txBody>
+      </ns0:sp>
+    </ns0:spTree>
+    <ns0:extLst>
+      <ns0:ext uri="{BB962C8B-B14F-4D97-AF65-F5344CB8AC3E}">
+        <ns2:creationId val="1024086991"/>
+      </ns0:ext>
+    </ns0:extLst>
+  </ns0:cSld>
+  <ns0:clrMapOvr>
+    <ns1:masterClrMapping/>
+  </ns0:clrMapOvr>
+</ns0:notes>
 </file>
 
 <file path=ppt/notesSlides/notesSlide9.xml><?xml version="1.0" encoding="utf-8"?>
@@ -2750,1353 +2750,1353 @@
 </file>
 
 <file path=ppt/slides/slide11.xml><?xml version="1.0" encoding="utf-8"?>
-<p:sld xmlns:a="http://schemas.openxmlformats.org/drawingml/2006/main" xmlns:r="http://schemas.openxmlformats.org/officeDocument/2006/relationships" xmlns:p="http://schemas.openxmlformats.org/presentationml/2006/main">
-  <p:cSld name="Slide 11">
-    <p:bg>
-      <p:bgPr>
-        <a:solidFill>
-          <a:srgbClr val="FFFFFF"/>
-        </a:solidFill>
-      </p:bgPr>
-    </p:bg>
-    <p:spTree>
-      <p:nvGrpSpPr>
-        <p:cNvPr id="1" name=""/>
-        <p:cNvGrpSpPr/>
-        <p:nvPr/>
-      </p:nvGrpSpPr>
-      <p:grpSpPr>
-        <a:xfrm>
-          <a:off x="0" y="0"/>
-          <a:ext cx="0" cy="0"/>
-          <a:chOff x="0" y="0"/>
-          <a:chExt cx="0" cy="0"/>
-        </a:xfrm>
-      </p:grpSpPr>
-      <p:pic>
-        <p:nvPicPr>
-          <p:cNvPr id="2" name="Image 0" descr="">
-            <a:extLst>
-              <a:ext uri="{C183D7F6-B498-43B3-948B-1728B52AA6E4}">
-                <adec:decorative xmlns:adec="http://schemas.microsoft.com/office/drawing/2017/decorative" val="1"/>
-              </a:ext>
-            </a:extLst>
-          </p:cNvPr>
-          <p:cNvPicPr>
-            <a:picLocks noChangeAspect="1"/>
-          </p:cNvPicPr>
-          <p:nvPr/>
-        </p:nvPicPr>
-        <p:blipFill>
-          <a:blip r:embed="rId1"/>
-          <a:stretch>
-            <a:fillRect/>
-          </a:stretch>
-        </p:blipFill>
-        <p:spPr>
-          <a:xfrm>
-            <a:off x="6349901" y="0"/>
-            <a:ext cx="2793950" cy="1308050"/>
-          </a:xfrm>
-          <a:prstGeom prst="rect">
-            <a:avLst/>
-          </a:prstGeom>
-        </p:spPr>
-      </p:pic>
-      <p:sp>
-        <p:nvSpPr>
-          <p:cNvPr id="3" name="Text 0"/>
-          <p:cNvSpPr/>
-          <p:nvPr/>
-        </p:nvSpPr>
-        <p:spPr>
-          <a:xfrm>
-            <a:off x="7340501" y="177701"/>
-            <a:ext cx="1168301" cy="279350"/>
-          </a:xfrm>
-          <a:prstGeom prst="roundRect">
-            <a:avLst>
-              <a:gd name="adj" fmla="val 22731"/>
-            </a:avLst>
-          </a:prstGeom>
-          <a:solidFill>
-            <a:srgbClr val="1A7F37"/>
-          </a:solidFill>
-          <a:ln/>
-        </p:spPr>
-        <p:txBody>
-          <a:bodyPr wrap="square" rtlCol="0" anchor="ctr"/>
-          <a:lstStyle/>
-          <a:p>
-            <a:pPr indent="0" marL="0">
-              <a:buNone/>
-            </a:pPr>
-            <a:endParaRPr lang="en-US" dirty="0"/>
-          </a:p>
-        </p:txBody>
-      </p:sp>
-      <p:sp>
-        <p:nvSpPr>
-          <p:cNvPr id="4" name="Text 1"/>
-          <p:cNvSpPr/>
-          <p:nvPr/>
-        </p:nvSpPr>
-        <p:spPr>
-          <a:xfrm>
-            <a:off x="7461041" y="231577"/>
-            <a:ext cx="927071" cy="171450"/>
-          </a:xfrm>
-          <a:prstGeom prst="rect">
-            <a:avLst/>
-          </a:prstGeom>
-          <a:noFill/>
-          <a:ln/>
-        </p:spPr>
-        <p:txBody>
-          <a:bodyPr wrap="square" lIns="0" tIns="0" rIns="0" bIns="0" rtlCol="0" anchor="t"/>
-          <a:lstStyle/>
-          <a:p>
-            <a:pPr algn="ctr" indent="0" marL="0">
-              <a:buNone/>
-            </a:pPr>
-            <a:r>
-              <a:rPr lang="en-US" sz="1150" b="1" dirty="0">
-                <a:solidFill>
-                  <a:srgbClr val="FFFFFF"/>
-                </a:solidFill>
-                <a:latin typeface="Arial" pitchFamily="34" charset="0"/>
-                <a:ea typeface="Arial" pitchFamily="34" charset="-122"/>
-                <a:cs typeface="Arial" pitchFamily="34" charset="-120"/>
-              </a:rPr>
-              <a:t>CHAPTER 05</a:t>
-            </a:r>
-            <a:endParaRPr lang="en-US" sz="1150" dirty="0"/>
-          </a:p>
-        </p:txBody>
-      </p:sp>
-      <p:pic>
-        <p:nvPicPr>
-          <p:cNvPr id="5" name="Image 1" descr="Open this chapter on GitHub">
-            <a:hlinkClick r:id="rId3" tooltip="https://github.com/github/copilot-app-for-beginners/tree/main/05-mcp-plugins"/>
-          </p:cNvPr>
-          <p:cNvPicPr>
-            <a:picLocks noChangeAspect="1"/>
-          </p:cNvPicPr>
-          <p:nvPr/>
-        </p:nvPicPr>
-        <p:blipFill>
-          <a:blip r:embed="rId2"/>
-          <a:stretch>
-            <a:fillRect/>
-          </a:stretch>
-        </p:blipFill>
-        <p:spPr>
-          <a:xfrm>
-            <a:off x="8610600" y="165050"/>
-            <a:ext cx="304800" cy="304800"/>
-          </a:xfrm>
-          <a:prstGeom prst="rect">
-            <a:avLst/>
-          </a:prstGeom>
-        </p:spPr>
-      </p:pic>
-      <p:sp>
-        <p:nvSpPr>
-          <p:cNvPr id="6" name="Text 2"/>
-          <p:cNvSpPr/>
-          <p:nvPr/>
-        </p:nvSpPr>
-        <p:spPr>
-          <a:xfrm>
-            <a:off x="507950" y="381000"/>
-            <a:ext cx="8161020" cy="190500"/>
-          </a:xfrm>
-          <a:prstGeom prst="rect">
-            <a:avLst/>
-          </a:prstGeom>
-          <a:noFill/>
-          <a:ln/>
-        </p:spPr>
-        <p:txBody>
-          <a:bodyPr wrap="square" lIns="0" tIns="0" rIns="0" bIns="0" rtlCol="0" anchor="t"/>
-          <a:lstStyle/>
-          <a:p>
-            <a:pPr algn="l" indent="0" marL="0">
-              <a:buNone/>
-            </a:pPr>
-            <a:r>
-              <a:rPr lang="en-US" sz="1250" b="1" dirty="0">
-                <a:solidFill>
-                  <a:srgbClr val="8250DF"/>
-                </a:solidFill>
-                <a:latin typeface="Arial" pitchFamily="34" charset="0"/>
-                <a:ea typeface="Arial" pitchFamily="34" charset="-122"/>
-                <a:cs typeface="Arial" pitchFamily="34" charset="-120"/>
-              </a:rPr>
-              <a:t>EXERCISE</a:t>
-            </a:r>
-            <a:endParaRPr lang="en-US" sz="1250" dirty="0"/>
-          </a:p>
-        </p:txBody>
-      </p:sp>
-      <p:sp>
-        <p:nvSpPr>
-          <p:cNvPr id="7" name="Text 3"/>
-          <p:cNvSpPr/>
-          <p:nvPr/>
-        </p:nvSpPr>
-        <p:spPr>
-          <a:xfrm>
-            <a:off x="507950" y="622250"/>
-            <a:ext cx="8161020" cy="419100"/>
-          </a:xfrm>
-          <a:prstGeom prst="rect">
-            <a:avLst/>
-          </a:prstGeom>
-          <a:noFill/>
-          <a:ln/>
-        </p:spPr>
-        <p:txBody>
-          <a:bodyPr wrap="square" lIns="0" tIns="0" rIns="0" bIns="0" rtlCol="0" anchor="t"/>
-          <a:lstStyle/>
-          <a:p>
-            <a:pPr algn="l" indent="0" marL="0">
-              <a:lnSpc>
-                <a:spcPts val="3300"/>
-              </a:lnSpc>
-              <a:spcBef>
-                <a:spcPts val="400"/>
-              </a:spcBef>
-              <a:buNone/>
-            </a:pPr>
-            <a:r>
-              <a:rPr lang="en-US" sz="2800" b="1" dirty="0">
-                <a:solidFill>
-                  <a:srgbClr val="1F2328"/>
-                </a:solidFill>
-                <a:latin typeface="Arial" pitchFamily="34" charset="0"/>
-                <a:ea typeface="Arial" pitchFamily="34" charset="-122"/>
-                <a:cs typeface="Arial" pitchFamily="34" charset="-120"/>
-              </a:rPr>
-              <a:t>Install Modern Web Guidance</a:t>
-            </a:r>
-            <a:endParaRPr lang="en-US" sz="2800" dirty="0"/>
-          </a:p>
-        </p:txBody>
-      </p:sp>
-      <p:sp>
-        <p:nvSpPr>
-          <p:cNvPr id="8" name="Text 4"/>
-          <p:cNvSpPr/>
-          <p:nvPr/>
-        </p:nvSpPr>
-        <p:spPr>
-          <a:xfrm>
-            <a:off x="507950" y="1104751"/>
-            <a:ext cx="8161020" cy="254050"/>
-          </a:xfrm>
-          <a:prstGeom prst="rect">
-            <a:avLst/>
-          </a:prstGeom>
-          <a:noFill/>
-          <a:ln/>
-        </p:spPr>
-        <p:txBody>
-          <a:bodyPr wrap="square" lIns="0" tIns="0" rIns="0" bIns="0" rtlCol="0" anchor="t"/>
-          <a:lstStyle/>
-          <a:p>
-            <a:pPr algn="l" indent="0" marL="0">
-              <a:lnSpc>
-                <a:spcPts val="2000"/>
-              </a:lnSpc>
-              <a:spcBef>
-                <a:spcPts val="500"/>
-              </a:spcBef>
-              <a:buNone/>
-            </a:pPr>
-            <a:r>
-              <a:rPr lang="en-US" sz="1650" dirty="0">
-                <a:solidFill>
-                  <a:srgbClr val="59636E"/>
-                </a:solidFill>
-                <a:latin typeface="Arial" pitchFamily="34" charset="0"/>
-                <a:ea typeface="Arial" pitchFamily="34" charset="-122"/>
-                <a:cs typeface="Arial" pitchFamily="34" charset="-120"/>
-              </a:rPr>
-              <a:t>Read what a plugin contains before you install it.</a:t>
-            </a:r>
-            <a:endParaRPr lang="en-US" sz="1650" dirty="0"/>
-          </a:p>
-        </p:txBody>
-      </p:sp>
-      <p:sp>
-        <p:nvSpPr>
-          <p:cNvPr id="9" name="Text 5"/>
-          <p:cNvSpPr/>
-          <p:nvPr/>
-        </p:nvSpPr>
-        <p:spPr>
-          <a:xfrm>
-            <a:off x="507950" y="1574750"/>
-            <a:ext cx="8127950" cy="1222177"/>
-          </a:xfrm>
-          <a:prstGeom prst="roundRect">
-            <a:avLst>
-              <a:gd name="adj" fmla="val 10391"/>
-            </a:avLst>
-          </a:prstGeom>
-          <a:solidFill>
-            <a:srgbClr val="FFFFFF"/>
-          </a:solidFill>
-          <a:ln w="9525">
-            <a:solidFill>
-              <a:srgbClr val="D1D9E0"/>
-            </a:solidFill>
-          </a:ln>
-          <a:effectLst>
-            <a:outerShdw sx="100000" sy="100000" kx="0" ky="0" algn="bl" rotWithShape="0" blurRad="38100" dist="9525" dir="5400000">
-              <a:srgbClr val="1f2328">
-                <a:alpha val="12000"/>
-              </a:srgbClr>
-            </a:outerShdw>
-          </a:effectLst>
-        </p:spPr>
-        <p:txBody>
-          <a:bodyPr wrap="square" rtlCol="0" anchor="ctr"/>
-          <a:lstStyle/>
-          <a:p>
-            <a:pPr indent="0" marL="0">
-              <a:buNone/>
-            </a:pPr>
-            <a:endParaRPr lang="en-US" dirty="0"/>
-          </a:p>
-        </p:txBody>
-      </p:sp>
-      <p:sp>
-        <p:nvSpPr>
-          <p:cNvPr id="10" name="Text 6"/>
-          <p:cNvSpPr/>
-          <p:nvPr/>
-        </p:nvSpPr>
-        <p:spPr>
-          <a:xfrm>
-            <a:off x="517475" y="1584275"/>
-            <a:ext cx="8108900" cy="412552"/>
-          </a:xfrm>
-          <a:prstGeom prst="roundRect">
-            <a:avLst>
-              <a:gd name="adj" fmla="val 30784"/>
-            </a:avLst>
-          </a:prstGeom>
-          <a:solidFill>
-            <a:srgbClr val="F6F8FA"/>
-          </a:solidFill>
-          <a:ln/>
-        </p:spPr>
-        <p:txBody>
-          <a:bodyPr wrap="square" rtlCol="0" anchor="ctr"/>
-          <a:lstStyle/>
-          <a:p>
-            <a:pPr indent="0" marL="0">
-              <a:buNone/>
-            </a:pPr>
-            <a:endParaRPr lang="en-US" dirty="0"/>
-          </a:p>
-        </p:txBody>
-      </p:sp>
-      <p:sp>
-        <p:nvSpPr>
-          <p:cNvPr id="11" name="Shape 7"/>
-          <p:cNvSpPr/>
-          <p:nvPr/>
-        </p:nvSpPr>
-        <p:spPr>
-          <a:xfrm>
-            <a:off x="517475" y="1992064"/>
-            <a:ext cx="8108900" cy="0"/>
-          </a:xfrm>
-          <a:prstGeom prst="line">
-            <a:avLst/>
-          </a:prstGeom>
-          <a:noFill/>
-          <a:ln w="9525">
-            <a:solidFill>
-              <a:srgbClr val="D1D9E0"/>
-            </a:solidFill>
-            <a:prstDash val="solid"/>
-          </a:ln>
-        </p:spPr>
-      </p:sp>
-      <p:pic>
-        <p:nvPicPr>
-          <p:cNvPr id="12" name="Image 2" descr="">
-            <a:extLst>
-              <a:ext uri="{C183D7F6-B498-43B3-948B-1728B52AA6E4}">
-                <adec:decorative xmlns:adec="http://schemas.microsoft.com/office/drawing/2017/decorative" val="1"/>
-              </a:ext>
-            </a:extLst>
-          </p:cNvPr>
-          <p:cNvPicPr>
-            <a:picLocks noChangeAspect="1"/>
-          </p:cNvPicPr>
-          <p:nvPr/>
-        </p:nvPicPr>
-        <p:blipFill>
-          <a:blip r:embed="rId4"/>
-          <a:stretch>
-            <a:fillRect/>
-          </a:stretch>
-        </p:blipFill>
-        <p:spPr>
-          <a:xfrm>
-            <a:off x="695176" y="1709589"/>
-            <a:ext cx="152400" cy="152400"/>
-          </a:xfrm>
-          <a:prstGeom prst="rect">
-            <a:avLst/>
-          </a:prstGeom>
-        </p:spPr>
-      </p:pic>
-      <p:sp>
-        <p:nvSpPr>
-          <p:cNvPr id="13" name="Text 8"/>
-          <p:cNvSpPr/>
-          <p:nvPr/>
-        </p:nvSpPr>
-        <p:spPr>
-          <a:xfrm>
-            <a:off x="949077" y="1685776"/>
-            <a:ext cx="1418767" cy="200025"/>
-          </a:xfrm>
-          <a:prstGeom prst="rect">
-            <a:avLst/>
-          </a:prstGeom>
-          <a:noFill/>
-          <a:ln/>
-        </p:spPr>
-        <p:txBody>
-          <a:bodyPr wrap="square" lIns="0" tIns="0" rIns="0" bIns="0" rtlCol="0" anchor="t"/>
-          <a:lstStyle/>
-          <a:p>
-            <a:pPr algn="l" indent="0" marL="0">
-              <a:buNone/>
-            </a:pPr>
-            <a:r>
-              <a:rPr lang="en-US" sz="1350" b="1" dirty="0">
-                <a:solidFill>
-                  <a:srgbClr val="1F2328"/>
-                </a:solidFill>
-                <a:latin typeface="Arial" pitchFamily="34" charset="0"/>
-                <a:ea typeface="Arial" pitchFamily="34" charset="-122"/>
-                <a:cs typeface="Arial" pitchFamily="34" charset="-120"/>
-              </a:rPr>
-              <a:t>awesome-copilot</a:t>
-            </a:r>
-            <a:endParaRPr lang="en-US" sz="1350" dirty="0"/>
-          </a:p>
-        </p:txBody>
-      </p:sp>
-      <p:sp>
-        <p:nvSpPr>
-          <p:cNvPr id="14" name="Text 9"/>
-          <p:cNvSpPr/>
-          <p:nvPr/>
-        </p:nvSpPr>
-        <p:spPr>
-          <a:xfrm>
-            <a:off x="2441525" y="1690539"/>
-            <a:ext cx="881682" cy="190500"/>
-          </a:xfrm>
-          <a:prstGeom prst="rect">
-            <a:avLst/>
-          </a:prstGeom>
-          <a:noFill/>
-          <a:ln/>
-        </p:spPr>
-        <p:txBody>
-          <a:bodyPr wrap="square" lIns="0" tIns="0" rIns="0" bIns="0" rtlCol="0" anchor="t"/>
-          <a:lstStyle/>
-          <a:p>
-            <a:pPr algn="l" indent="0" marL="0">
-              <a:buNone/>
-            </a:pPr>
-            <a:r>
-              <a:rPr lang="en-US" sz="1250" dirty="0">
-                <a:solidFill>
-                  <a:srgbClr val="59636E"/>
-                </a:solidFill>
-                <a:latin typeface="Arial" pitchFamily="34" charset="0"/>
-                <a:ea typeface="Arial" pitchFamily="34" charset="-122"/>
-                <a:cs typeface="Arial" pitchFamily="34" charset="-120"/>
-              </a:rPr>
-              <a:t>Marketplace</a:t>
-            </a:r>
-            <a:endParaRPr lang="en-US" sz="1250" dirty="0"/>
-          </a:p>
-        </p:txBody>
-      </p:sp>
-      <p:sp>
-        <p:nvSpPr>
-          <p:cNvPr id="15" name="Text 10"/>
-          <p:cNvSpPr/>
-          <p:nvPr/>
-        </p:nvSpPr>
-        <p:spPr>
-          <a:xfrm>
-            <a:off x="695176" y="2176165"/>
-            <a:ext cx="431750" cy="431750"/>
-          </a:xfrm>
-          <a:prstGeom prst="roundRect">
-            <a:avLst>
-              <a:gd name="adj" fmla="val 20591"/>
-            </a:avLst>
-          </a:prstGeom>
-          <a:solidFill>
-            <a:srgbClr val="FBEFFF"/>
-          </a:solidFill>
-          <a:ln/>
-        </p:spPr>
-        <p:txBody>
-          <a:bodyPr wrap="square" rtlCol="0" anchor="ctr"/>
-          <a:lstStyle/>
-          <a:p>
-            <a:pPr indent="0" marL="0">
-              <a:buNone/>
-            </a:pPr>
-            <a:endParaRPr lang="en-US" dirty="0"/>
-          </a:p>
-        </p:txBody>
-      </p:sp>
-      <p:pic>
-        <p:nvPicPr>
-          <p:cNvPr id="16" name="Image 3" descr="">
-            <a:extLst>
-              <a:ext uri="{C183D7F6-B498-43B3-948B-1728B52AA6E4}">
-                <adec:decorative xmlns:adec="http://schemas.microsoft.com/office/drawing/2017/decorative" val="1"/>
-              </a:ext>
-            </a:extLst>
-          </p:cNvPr>
-          <p:cNvPicPr>
-            <a:picLocks noChangeAspect="1"/>
-          </p:cNvPicPr>
-          <p:nvPr/>
-        </p:nvPicPr>
-        <p:blipFill>
-          <a:blip r:embed="rId5"/>
-          <a:stretch>
-            <a:fillRect/>
-          </a:stretch>
-        </p:blipFill>
-        <p:spPr>
-          <a:xfrm>
-            <a:off x="790426" y="2271415"/>
-            <a:ext cx="241250" cy="241250"/>
-          </a:xfrm>
-          <a:prstGeom prst="rect">
-            <a:avLst/>
-          </a:prstGeom>
-        </p:spPr>
-      </p:pic>
-      <p:sp>
-        <p:nvSpPr>
-          <p:cNvPr id="17" name="Text 11"/>
-          <p:cNvSpPr/>
-          <p:nvPr/>
-        </p:nvSpPr>
-        <p:spPr>
-          <a:xfrm>
-            <a:off x="1304627" y="2149227"/>
-            <a:ext cx="6043496" cy="247650"/>
-          </a:xfrm>
-          <a:prstGeom prst="rect">
-            <a:avLst/>
-          </a:prstGeom>
-          <a:noFill/>
-          <a:ln/>
-        </p:spPr>
-        <p:txBody>
-          <a:bodyPr wrap="square" lIns="0" tIns="0" rIns="0" bIns="0" rtlCol="0" anchor="t"/>
-          <a:lstStyle/>
-          <a:p>
-            <a:pPr algn="l" indent="0" marL="0">
-              <a:buNone/>
-            </a:pPr>
-            <a:r>
-              <a:rPr lang="en-US" sz="1650" b="1" dirty="0">
-                <a:solidFill>
-                  <a:srgbClr val="1F2328"/>
-                </a:solidFill>
-                <a:latin typeface="Arial" pitchFamily="34" charset="0"/>
-                <a:ea typeface="Arial" pitchFamily="34" charset="-122"/>
-                <a:cs typeface="Arial" pitchFamily="34" charset="-120"/>
-              </a:rPr>
-              <a:t>modern-web-guidance</a:t>
-            </a:r>
-            <a:endParaRPr lang="en-US" sz="1650" dirty="0"/>
-          </a:p>
-        </p:txBody>
-      </p:sp>
-      <p:sp>
-        <p:nvSpPr>
-          <p:cNvPr id="18" name="Text 12"/>
-          <p:cNvSpPr/>
-          <p:nvPr/>
-        </p:nvSpPr>
-        <p:spPr>
-          <a:xfrm>
-            <a:off x="1304627" y="2434977"/>
-            <a:ext cx="6043496" cy="200025"/>
-          </a:xfrm>
-          <a:prstGeom prst="rect">
-            <a:avLst/>
-          </a:prstGeom>
-          <a:noFill/>
-          <a:ln/>
-        </p:spPr>
-        <p:txBody>
-          <a:bodyPr wrap="square" lIns="0" tIns="0" rIns="0" bIns="0" rtlCol="0" anchor="t"/>
-          <a:lstStyle/>
-          <a:p>
-            <a:pPr algn="l" indent="0" marL="0">
-              <a:buNone/>
-            </a:pPr>
-            <a:r>
-              <a:rPr lang="en-US" sz="1350" dirty="0">
-                <a:solidFill>
-                  <a:srgbClr val="59636E"/>
-                </a:solidFill>
-                <a:latin typeface="Arial" pitchFamily="34" charset="0"/>
-                <a:ea typeface="Arial" pitchFamily="34" charset="-122"/>
-                <a:cs typeface="Arial" pitchFamily="34" charset="-120"/>
-              </a:rPr>
-              <a:t>A skill and CLI tool that help agents build web apps with modern, secure APIs.</a:t>
-            </a:r>
-            <a:endParaRPr lang="en-US" sz="1350" dirty="0"/>
-          </a:p>
-        </p:txBody>
-      </p:sp>
-      <p:sp>
-        <p:nvSpPr>
-          <p:cNvPr id="19" name="Text 13"/>
-          <p:cNvSpPr/>
-          <p:nvPr/>
-        </p:nvSpPr>
-        <p:spPr>
-          <a:xfrm>
-            <a:off x="7407325" y="2214414"/>
-            <a:ext cx="1041350" cy="355402"/>
-          </a:xfrm>
-          <a:prstGeom prst="roundRect">
-            <a:avLst>
-              <a:gd name="adj" fmla="val 21441"/>
-            </a:avLst>
-          </a:prstGeom>
-          <a:solidFill>
-            <a:srgbClr val="FFFFFF"/>
-          </a:solidFill>
-          <a:ln w="9525">
-            <a:solidFill>
-              <a:srgbClr val="D1D9E0"/>
-            </a:solidFill>
-          </a:ln>
-        </p:spPr>
-        <p:txBody>
-          <a:bodyPr wrap="square" rtlCol="0" anchor="ctr"/>
-          <a:lstStyle/>
-          <a:p>
-            <a:pPr indent="0" marL="0">
-              <a:buNone/>
-            </a:pPr>
-            <a:endParaRPr lang="en-US" dirty="0"/>
-          </a:p>
-        </p:txBody>
-      </p:sp>
-      <p:sp>
-        <p:nvSpPr>
-          <p:cNvPr id="20" name="Text 14"/>
-          <p:cNvSpPr/>
-          <p:nvPr/>
-        </p:nvSpPr>
-        <p:spPr>
-          <a:xfrm>
-            <a:off x="7594550" y="2287339"/>
-            <a:ext cx="680237" cy="209550"/>
-          </a:xfrm>
-          <a:prstGeom prst="rect">
-            <a:avLst/>
-          </a:prstGeom>
-          <a:noFill/>
-          <a:ln/>
-        </p:spPr>
-        <p:txBody>
-          <a:bodyPr wrap="square" lIns="0" tIns="0" rIns="0" bIns="0" rtlCol="0" anchor="t"/>
-          <a:lstStyle/>
-          <a:p>
-            <a:pPr algn="l" indent="0" marL="0">
-              <a:buNone/>
-            </a:pPr>
-            <a:r>
-              <a:rPr lang="en-US" sz="1400" b="1" dirty="0">
-                <a:solidFill>
-                  <a:srgbClr val="1F2328"/>
-                </a:solidFill>
-                <a:latin typeface="Arial" pitchFamily="34" charset="0"/>
-                <a:ea typeface="Arial" pitchFamily="34" charset="-122"/>
-                <a:cs typeface="Arial" pitchFamily="34" charset="-120"/>
-              </a:rPr>
-              <a:t>+ Install</a:t>
-            </a:r>
-            <a:endParaRPr lang="en-US" sz="1400" dirty="0"/>
-          </a:p>
-        </p:txBody>
-      </p:sp>
-      <p:sp>
-        <p:nvSpPr>
-          <p:cNvPr id="21" name="Text 15"/>
-          <p:cNvSpPr/>
-          <p:nvPr/>
-        </p:nvSpPr>
-        <p:spPr>
-          <a:xfrm>
-            <a:off x="507950" y="2974628"/>
-            <a:ext cx="2607618" cy="1127671"/>
-          </a:xfrm>
-          <a:prstGeom prst="roundRect">
-            <a:avLst>
-              <a:gd name="adj" fmla="val 11262"/>
-            </a:avLst>
-          </a:prstGeom>
-          <a:solidFill>
-            <a:srgbClr val="FFFFFF"/>
-          </a:solidFill>
-          <a:ln w="9525">
-            <a:solidFill>
-              <a:srgbClr val="E0C5FF"/>
-            </a:solidFill>
-          </a:ln>
-        </p:spPr>
-        <p:txBody>
-          <a:bodyPr wrap="square" rtlCol="0" anchor="ctr"/>
-          <a:lstStyle/>
-          <a:p>
-            <a:pPr indent="0" marL="0">
-              <a:buNone/>
-            </a:pPr>
-            <a:endParaRPr lang="en-US" dirty="0"/>
-          </a:p>
-        </p:txBody>
-      </p:sp>
-      <p:sp>
-        <p:nvSpPr>
-          <p:cNvPr id="22" name="Text 16"/>
-          <p:cNvSpPr/>
-          <p:nvPr/>
-        </p:nvSpPr>
-        <p:spPr>
-          <a:xfrm>
-            <a:off x="669875" y="3136553"/>
-            <a:ext cx="279350" cy="279350"/>
-          </a:xfrm>
-          <a:prstGeom prst="roundRect">
-            <a:avLst>
-              <a:gd name="adj" fmla="val 327331"/>
-            </a:avLst>
-          </a:prstGeom>
-          <a:solidFill>
-            <a:srgbClr val="8250DF"/>
-          </a:solidFill>
-          <a:ln/>
-        </p:spPr>
-        <p:txBody>
-          <a:bodyPr wrap="square" rtlCol="0" anchor="ctr"/>
-          <a:lstStyle/>
-          <a:p>
-            <a:pPr indent="0" marL="0">
-              <a:buNone/>
-            </a:pPr>
-            <a:endParaRPr lang="en-US" dirty="0"/>
-          </a:p>
-        </p:txBody>
-      </p:sp>
-      <p:sp>
-        <p:nvSpPr>
-          <p:cNvPr id="23" name="Text 17"/>
-          <p:cNvSpPr/>
-          <p:nvPr/>
-        </p:nvSpPr>
-        <p:spPr>
-          <a:xfrm>
-            <a:off x="764540" y="3180904"/>
-            <a:ext cx="90020" cy="190500"/>
-          </a:xfrm>
-          <a:prstGeom prst="rect">
-            <a:avLst/>
-          </a:prstGeom>
-          <a:noFill/>
-          <a:ln/>
-        </p:spPr>
-        <p:txBody>
-          <a:bodyPr wrap="square" lIns="0" tIns="0" rIns="0" bIns="0" rtlCol="0" anchor="t"/>
-          <a:lstStyle/>
-          <a:p>
-            <a:pPr algn="ctr" indent="0" marL="0">
-              <a:buNone/>
-            </a:pPr>
-            <a:r>
-              <a:rPr lang="en-US" sz="1250" b="1" dirty="0">
-                <a:solidFill>
-                  <a:srgbClr val="FFFFFF"/>
-                </a:solidFill>
-                <a:latin typeface="Arial" pitchFamily="34" charset="0"/>
-                <a:ea typeface="Arial" pitchFamily="34" charset="-122"/>
-                <a:cs typeface="Arial" pitchFamily="34" charset="-120"/>
-              </a:rPr>
-              <a:t>1</a:t>
-            </a:r>
-            <a:endParaRPr lang="en-US" sz="1250" dirty="0"/>
-          </a:p>
-        </p:txBody>
-      </p:sp>
-      <p:sp>
-        <p:nvSpPr>
-          <p:cNvPr id="24" name="Text 18"/>
-          <p:cNvSpPr/>
-          <p:nvPr/>
-        </p:nvSpPr>
-        <p:spPr>
-          <a:xfrm>
-            <a:off x="1063526" y="3161854"/>
-            <a:ext cx="641071" cy="228600"/>
-          </a:xfrm>
-          <a:prstGeom prst="rect">
-            <a:avLst/>
-          </a:prstGeom>
-          <a:noFill/>
-          <a:ln/>
-        </p:spPr>
-        <p:txBody>
-          <a:bodyPr wrap="square" lIns="0" tIns="0" rIns="0" bIns="0" rtlCol="0" anchor="t"/>
-          <a:lstStyle/>
-          <a:p>
-            <a:pPr algn="l" indent="0" marL="0">
-              <a:lnSpc>
-                <a:spcPts val="1800"/>
-              </a:lnSpc>
-              <a:buNone/>
-            </a:pPr>
-            <a:r>
-              <a:rPr lang="en-US" sz="1650" b="1" dirty="0">
-                <a:solidFill>
-                  <a:srgbClr val="1F2328"/>
-                </a:solidFill>
-                <a:latin typeface="Arial" pitchFamily="34" charset="0"/>
-                <a:ea typeface="Arial" pitchFamily="34" charset="-122"/>
-                <a:cs typeface="Arial" pitchFamily="34" charset="-120"/>
-              </a:rPr>
-              <a:t>Find it</a:t>
-            </a:r>
-            <a:endParaRPr lang="en-US" sz="1650" dirty="0"/>
-          </a:p>
-        </p:txBody>
-      </p:sp>
-      <p:sp>
-        <p:nvSpPr>
-          <p:cNvPr id="25" name="Text 19"/>
-          <p:cNvSpPr/>
-          <p:nvPr/>
-        </p:nvSpPr>
-        <p:spPr>
-          <a:xfrm>
-            <a:off x="669875" y="3492103"/>
-            <a:ext cx="2329443" cy="429220"/>
-          </a:xfrm>
-          <a:prstGeom prst="rect">
-            <a:avLst/>
-          </a:prstGeom>
-          <a:noFill/>
-          <a:ln/>
-        </p:spPr>
-        <p:txBody>
-          <a:bodyPr wrap="square" lIns="0" tIns="0" rIns="0" bIns="0" rtlCol="0" anchor="t"/>
-          <a:lstStyle/>
-          <a:p>
-            <a:pPr algn="l" indent="0" marL="0">
-              <a:lnSpc>
-                <a:spcPts val="1690"/>
-              </a:lnSpc>
-              <a:buNone/>
-            </a:pPr>
-            <a:r>
-              <a:rPr lang="en-US" sz="1400" dirty="0">
-                <a:solidFill>
-                  <a:srgbClr val="59636E"/>
-                </a:solidFill>
-                <a:latin typeface="Arial" pitchFamily="34" charset="0"/>
-                <a:ea typeface="Arial" pitchFamily="34" charset="-122"/>
-                <a:cs typeface="Arial" pitchFamily="34" charset="-120"/>
-              </a:rPr>
-              <a:t>Search, then expand </a:t>
-            </a:r>
-            <a:pPr algn="l" indent="0" marL="0">
-              <a:lnSpc>
-                <a:spcPts val="1690"/>
-              </a:lnSpc>
-              <a:buNone/>
-            </a:pPr>
-            <a:r>
-              <a:rPr lang="en-US" sz="1400" b="1" dirty="0">
-                <a:solidFill>
-                  <a:srgbClr val="59636E"/>
-                </a:solidFill>
-                <a:latin typeface="Arial" pitchFamily="34" charset="0"/>
-                <a:ea typeface="Arial" pitchFamily="34" charset="-122"/>
-                <a:cs typeface="Arial" pitchFamily="34" charset="-120"/>
-              </a:rPr>
-              <a:t>awesome-copilot</a:t>
-            </a:r>
-            <a:pPr algn="l" indent="0" marL="0">
-              <a:lnSpc>
-                <a:spcPts val="1690"/>
-              </a:lnSpc>
-              <a:buNone/>
-            </a:pPr>
-            <a:r>
-              <a:rPr lang="en-US" sz="1400" dirty="0">
-                <a:solidFill>
-                  <a:srgbClr val="59636E"/>
-                </a:solidFill>
-                <a:latin typeface="Arial" pitchFamily="34" charset="0"/>
-                <a:ea typeface="Arial" pitchFamily="34" charset="-122"/>
-                <a:cs typeface="Arial" pitchFamily="34" charset="-120"/>
-              </a:rPr>
-              <a:t>.</a:t>
-            </a:r>
-            <a:endParaRPr lang="en-US" sz="1400" dirty="0"/>
-          </a:p>
-        </p:txBody>
-      </p:sp>
-      <p:sp>
-        <p:nvSpPr>
-          <p:cNvPr id="26" name="Text 20"/>
-          <p:cNvSpPr/>
-          <p:nvPr/>
-        </p:nvSpPr>
-        <p:spPr>
-          <a:xfrm>
-            <a:off x="3267968" y="2974628"/>
-            <a:ext cx="2607766" cy="1127671"/>
-          </a:xfrm>
-          <a:prstGeom prst="roundRect">
-            <a:avLst>
-              <a:gd name="adj" fmla="val 11262"/>
-            </a:avLst>
-          </a:prstGeom>
-          <a:solidFill>
-            <a:srgbClr val="FFFFFF"/>
-          </a:solidFill>
-          <a:ln w="9525">
-            <a:solidFill>
-              <a:srgbClr val="E0C5FF"/>
-            </a:solidFill>
-          </a:ln>
-        </p:spPr>
-        <p:txBody>
-          <a:bodyPr wrap="square" rtlCol="0" anchor="ctr"/>
-          <a:lstStyle/>
-          <a:p>
-            <a:pPr indent="0" marL="0">
-              <a:buNone/>
-            </a:pPr>
-            <a:endParaRPr lang="en-US" dirty="0"/>
-          </a:p>
-        </p:txBody>
-      </p:sp>
-      <p:sp>
-        <p:nvSpPr>
-          <p:cNvPr id="27" name="Text 21"/>
-          <p:cNvSpPr/>
-          <p:nvPr/>
-        </p:nvSpPr>
-        <p:spPr>
-          <a:xfrm>
-            <a:off x="3429893" y="3136553"/>
-            <a:ext cx="279350" cy="279350"/>
-          </a:xfrm>
-          <a:prstGeom prst="roundRect">
-            <a:avLst>
-              <a:gd name="adj" fmla="val 327331"/>
-            </a:avLst>
-          </a:prstGeom>
-          <a:solidFill>
-            <a:srgbClr val="8250DF"/>
-          </a:solidFill>
-          <a:ln/>
-        </p:spPr>
-        <p:txBody>
-          <a:bodyPr wrap="square" rtlCol="0" anchor="ctr"/>
-          <a:lstStyle/>
-          <a:p>
-            <a:pPr indent="0" marL="0">
-              <a:buNone/>
-            </a:pPr>
-            <a:endParaRPr lang="en-US" dirty="0"/>
-          </a:p>
-        </p:txBody>
-      </p:sp>
-      <p:sp>
-        <p:nvSpPr>
-          <p:cNvPr id="28" name="Text 22"/>
-          <p:cNvSpPr/>
-          <p:nvPr/>
-        </p:nvSpPr>
-        <p:spPr>
-          <a:xfrm>
-            <a:off x="3524558" y="3180904"/>
-            <a:ext cx="90020" cy="190500"/>
-          </a:xfrm>
-          <a:prstGeom prst="rect">
-            <a:avLst/>
-          </a:prstGeom>
-          <a:noFill/>
-          <a:ln/>
-        </p:spPr>
-        <p:txBody>
-          <a:bodyPr wrap="square" lIns="0" tIns="0" rIns="0" bIns="0" rtlCol="0" anchor="t"/>
-          <a:lstStyle/>
-          <a:p>
-            <a:pPr algn="ctr" indent="0" marL="0">
-              <a:buNone/>
-            </a:pPr>
-            <a:r>
-              <a:rPr lang="en-US" sz="1250" b="1" dirty="0">
-                <a:solidFill>
-                  <a:srgbClr val="FFFFFF"/>
-                </a:solidFill>
-                <a:latin typeface="Arial" pitchFamily="34" charset="0"/>
-                <a:ea typeface="Arial" pitchFamily="34" charset="-122"/>
-                <a:cs typeface="Arial" pitchFamily="34" charset="-120"/>
-              </a:rPr>
-              <a:t>2</a:t>
-            </a:r>
-            <a:endParaRPr lang="en-US" sz="1250" dirty="0"/>
-          </a:p>
-        </p:txBody>
-      </p:sp>
-      <p:sp>
-        <p:nvSpPr>
-          <p:cNvPr id="29" name="Text 23"/>
-          <p:cNvSpPr/>
-          <p:nvPr/>
-        </p:nvSpPr>
-        <p:spPr>
-          <a:xfrm>
-            <a:off x="3823543" y="3161854"/>
-            <a:ext cx="1781883" cy="228600"/>
-          </a:xfrm>
-          <a:prstGeom prst="rect">
-            <a:avLst/>
-          </a:prstGeom>
-          <a:noFill/>
-          <a:ln/>
-        </p:spPr>
-        <p:txBody>
-          <a:bodyPr wrap="square" lIns="0" tIns="0" rIns="0" bIns="0" rtlCol="0" anchor="t"/>
-          <a:lstStyle/>
-          <a:p>
-            <a:pPr algn="l" indent="0" marL="0">
-              <a:lnSpc>
-                <a:spcPts val="1800"/>
-              </a:lnSpc>
-              <a:buNone/>
-            </a:pPr>
-            <a:r>
-              <a:rPr lang="en-US" sz="1650" b="1" dirty="0">
-                <a:solidFill>
-                  <a:srgbClr val="1F2328"/>
-                </a:solidFill>
-                <a:latin typeface="Arial" pitchFamily="34" charset="0"/>
-                <a:ea typeface="Arial" pitchFamily="34" charset="-122"/>
-                <a:cs typeface="Arial" pitchFamily="34" charset="-120"/>
-              </a:rPr>
-              <a:t>Check the source</a:t>
-            </a:r>
-            <a:endParaRPr lang="en-US" sz="1650" dirty="0"/>
-          </a:p>
-        </p:txBody>
-      </p:sp>
-      <p:sp>
-        <p:nvSpPr>
-          <p:cNvPr id="30" name="Text 24"/>
-          <p:cNvSpPr/>
-          <p:nvPr/>
-        </p:nvSpPr>
-        <p:spPr>
-          <a:xfrm>
-            <a:off x="3429893" y="3492103"/>
-            <a:ext cx="2329595" cy="448270"/>
-          </a:xfrm>
-          <a:prstGeom prst="rect">
-            <a:avLst/>
-          </a:prstGeom>
-          <a:noFill/>
-          <a:ln/>
-        </p:spPr>
-        <p:txBody>
-          <a:bodyPr wrap="square" lIns="0" tIns="0" rIns="0" bIns="0" rtlCol="0" anchor="t"/>
-          <a:lstStyle/>
-          <a:p>
-            <a:pPr algn="l" indent="0" marL="0">
-              <a:lnSpc>
-                <a:spcPts val="1690"/>
-              </a:lnSpc>
-              <a:buNone/>
-            </a:pPr>
-            <a:r>
-              <a:rPr lang="en-US" sz="1400" b="1" dirty="0">
-                <a:solidFill>
-                  <a:srgbClr val="0550AE"/>
-                </a:solidFill>
-                <a:latin typeface="Courier New" pitchFamily="34" charset="0"/>
-                <a:ea typeface="Courier New" pitchFamily="34" charset="-122"/>
-                <a:cs typeface="Courier New" pitchFamily="34" charset="-120"/>
-              </a:rPr>
-              <a:t>GoogleChrome/modern-web-guidance</a:t>
-            </a:r>
-            <a:endParaRPr lang="en-US" sz="1400" dirty="0"/>
-          </a:p>
-        </p:txBody>
-      </p:sp>
-      <p:sp>
-        <p:nvSpPr>
-          <p:cNvPr id="31" name="Text 25"/>
-          <p:cNvSpPr/>
-          <p:nvPr/>
-        </p:nvSpPr>
-        <p:spPr>
-          <a:xfrm>
-            <a:off x="6028134" y="2974628"/>
-            <a:ext cx="2607766" cy="1127671"/>
-          </a:xfrm>
-          <a:prstGeom prst="roundRect">
-            <a:avLst>
-              <a:gd name="adj" fmla="val 11262"/>
-            </a:avLst>
-          </a:prstGeom>
-          <a:solidFill>
-            <a:srgbClr val="FFFFFF"/>
-          </a:solidFill>
-          <a:ln w="9525">
-            <a:solidFill>
-              <a:srgbClr val="E0C5FF"/>
-            </a:solidFill>
-          </a:ln>
-        </p:spPr>
-        <p:txBody>
-          <a:bodyPr wrap="square" rtlCol="0" anchor="ctr"/>
-          <a:lstStyle/>
-          <a:p>
-            <a:pPr indent="0" marL="0">
-              <a:buNone/>
-            </a:pPr>
-            <a:endParaRPr lang="en-US" dirty="0"/>
-          </a:p>
-        </p:txBody>
-      </p:sp>
-      <p:sp>
-        <p:nvSpPr>
-          <p:cNvPr id="32" name="Text 26"/>
-          <p:cNvSpPr/>
-          <p:nvPr/>
-        </p:nvSpPr>
-        <p:spPr>
-          <a:xfrm>
-            <a:off x="6190059" y="3136553"/>
-            <a:ext cx="279350" cy="279350"/>
-          </a:xfrm>
-          <a:prstGeom prst="roundRect">
-            <a:avLst>
-              <a:gd name="adj" fmla="val 327331"/>
-            </a:avLst>
-          </a:prstGeom>
-          <a:solidFill>
-            <a:srgbClr val="8250DF"/>
-          </a:solidFill>
-          <a:ln/>
-        </p:spPr>
-        <p:txBody>
-          <a:bodyPr wrap="square" rtlCol="0" anchor="ctr"/>
-          <a:lstStyle/>
-          <a:p>
-            <a:pPr indent="0" marL="0">
-              <a:buNone/>
-            </a:pPr>
-            <a:endParaRPr lang="en-US" dirty="0"/>
-          </a:p>
-        </p:txBody>
-      </p:sp>
-      <p:sp>
-        <p:nvSpPr>
-          <p:cNvPr id="33" name="Text 27"/>
-          <p:cNvSpPr/>
-          <p:nvPr/>
-        </p:nvSpPr>
-        <p:spPr>
-          <a:xfrm>
-            <a:off x="6284724" y="3180904"/>
-            <a:ext cx="90020" cy="190500"/>
-          </a:xfrm>
-          <a:prstGeom prst="rect">
-            <a:avLst/>
-          </a:prstGeom>
-          <a:noFill/>
-          <a:ln/>
-        </p:spPr>
-        <p:txBody>
-          <a:bodyPr wrap="square" lIns="0" tIns="0" rIns="0" bIns="0" rtlCol="0" anchor="t"/>
-          <a:lstStyle/>
-          <a:p>
-            <a:pPr algn="ctr" indent="0" marL="0">
-              <a:buNone/>
-            </a:pPr>
-            <a:r>
-              <a:rPr lang="en-US" sz="1250" b="1" dirty="0">
-                <a:solidFill>
-                  <a:srgbClr val="FFFFFF"/>
-                </a:solidFill>
-                <a:latin typeface="Arial" pitchFamily="34" charset="0"/>
-                <a:ea typeface="Arial" pitchFamily="34" charset="-122"/>
-                <a:cs typeface="Arial" pitchFamily="34" charset="-120"/>
-              </a:rPr>
-              <a:t>3</a:t>
-            </a:r>
-            <a:endParaRPr lang="en-US" sz="1250" dirty="0"/>
-          </a:p>
-        </p:txBody>
-      </p:sp>
-      <p:sp>
-        <p:nvSpPr>
-          <p:cNvPr id="34" name="Text 28"/>
-          <p:cNvSpPr/>
-          <p:nvPr/>
-        </p:nvSpPr>
-        <p:spPr>
-          <a:xfrm>
-            <a:off x="6583710" y="3161854"/>
-            <a:ext cx="1900291" cy="228600"/>
-          </a:xfrm>
-          <a:prstGeom prst="rect">
-            <a:avLst/>
-          </a:prstGeom>
-          <a:noFill/>
-          <a:ln/>
-        </p:spPr>
-        <p:txBody>
-          <a:bodyPr wrap="square" lIns="0" tIns="0" rIns="0" bIns="0" rtlCol="0" anchor="t"/>
-          <a:lstStyle/>
-          <a:p>
-            <a:pPr algn="l" indent="0" marL="0">
-              <a:lnSpc>
-                <a:spcPts val="1800"/>
-              </a:lnSpc>
-              <a:buNone/>
-            </a:pPr>
-            <a:r>
-              <a:rPr lang="en-US" sz="1650" b="1" dirty="0">
-                <a:solidFill>
-                  <a:srgbClr val="1F2328"/>
-                </a:solidFill>
-                <a:latin typeface="Arial" pitchFamily="34" charset="0"/>
-                <a:ea typeface="Arial" pitchFamily="34" charset="-122"/>
-                <a:cs typeface="Arial" pitchFamily="34" charset="-120"/>
-              </a:rPr>
-              <a:t>Install and confirm</a:t>
-            </a:r>
-            <a:endParaRPr lang="en-US" sz="1650" dirty="0"/>
-          </a:p>
-        </p:txBody>
-      </p:sp>
-      <p:sp>
-        <p:nvSpPr>
-          <p:cNvPr id="35" name="Text 29"/>
-          <p:cNvSpPr/>
-          <p:nvPr/>
-        </p:nvSpPr>
-        <p:spPr>
-          <a:xfrm>
-            <a:off x="6190059" y="3492103"/>
-            <a:ext cx="2329595" cy="429220"/>
-          </a:xfrm>
-          <a:prstGeom prst="rect">
-            <a:avLst/>
-          </a:prstGeom>
-          <a:noFill/>
-          <a:ln/>
-        </p:spPr>
-        <p:txBody>
-          <a:bodyPr wrap="square" lIns="0" tIns="0" rIns="0" bIns="0" rtlCol="0" anchor="t"/>
-          <a:lstStyle/>
-          <a:p>
-            <a:pPr algn="l" indent="0" marL="0">
-              <a:lnSpc>
-                <a:spcPts val="1690"/>
-              </a:lnSpc>
-              <a:buNone/>
-            </a:pPr>
-            <a:r>
-              <a:rPr lang="en-US" sz="1400" dirty="0">
-                <a:solidFill>
-                  <a:srgbClr val="59636E"/>
-                </a:solidFill>
-                <a:latin typeface="Arial" pitchFamily="34" charset="0"/>
-                <a:ea typeface="Arial" pitchFamily="34" charset="-122"/>
-                <a:cs typeface="Arial" pitchFamily="34" charset="-120"/>
-              </a:rPr>
-              <a:t>Listed under </a:t>
-            </a:r>
-            <a:pPr algn="l" indent="0" marL="0">
-              <a:lnSpc>
-                <a:spcPts val="1690"/>
-              </a:lnSpc>
-              <a:buNone/>
-            </a:pPr>
-            <a:r>
-              <a:rPr lang="en-US" sz="1400" b="1" dirty="0">
-                <a:solidFill>
-                  <a:srgbClr val="59636E"/>
-                </a:solidFill>
-                <a:latin typeface="Arial" pitchFamily="34" charset="0"/>
-                <a:ea typeface="Arial" pitchFamily="34" charset="-122"/>
-                <a:cs typeface="Arial" pitchFamily="34" charset="-120"/>
-              </a:rPr>
-              <a:t>Installed</a:t>
-            </a:r>
-            <a:pPr algn="l" indent="0" marL="0">
-              <a:lnSpc>
-                <a:spcPts val="1690"/>
-              </a:lnSpc>
-              <a:buNone/>
-            </a:pPr>
-            <a:r>
-              <a:rPr lang="en-US" sz="1400" dirty="0">
-                <a:solidFill>
-                  <a:srgbClr val="59636E"/>
-                </a:solidFill>
-                <a:latin typeface="Arial" pitchFamily="34" charset="0"/>
-                <a:ea typeface="Arial" pitchFamily="34" charset="-122"/>
-                <a:cs typeface="Arial" pitchFamily="34" charset="-120"/>
-              </a:rPr>
-              <a:t>, toggle on.</a:t>
-            </a:r>
-            <a:endParaRPr lang="en-US" sz="1400" dirty="0"/>
-          </a:p>
-        </p:txBody>
-      </p:sp>
-    </p:spTree>
-  </p:cSld>
-  <p:clrMapOvr>
-    <a:masterClrMapping/>
-  </p:clrMapOvr>
-</p:sld>
+<ns0:sld xmlns:ns0="http://schemas.openxmlformats.org/presentationml/2006/main" xmlns:ns1="http://schemas.openxmlformats.org/drawingml/2006/main" xmlns:ns2="http://schemas.microsoft.com/office/drawing/2017/decorative" xmlns:ns3="http://schemas.openxmlformats.org/officeDocument/2006/relationships">
+  <ns0:cSld name="Slide 11">
+    <ns0:bg>
+      <ns0:bgPr>
+        <ns1:solidFill>
+          <ns1:srgbClr val="FFFFFF"/>
+        </ns1:solidFill>
+      </ns0:bgPr>
+    </ns0:bg>
+    <ns0:spTree>
+      <ns0:nvGrpSpPr>
+        <ns0:cNvPr id="1" name=""/>
+        <ns0:cNvGrpSpPr/>
+        <ns0:nvPr/>
+      </ns0:nvGrpSpPr>
+      <ns0:grpSpPr>
+        <ns1:xfrm>
+          <ns1:off x="0" y="0"/>
+          <ns1:ext cx="0" cy="0"/>
+          <ns1:chOff x="0" y="0"/>
+          <ns1:chExt cx="0" cy="0"/>
+        </ns1:xfrm>
+      </ns0:grpSpPr>
+      <ns0:pic>
+        <ns0:nvPicPr>
+          <ns0:cNvPr id="2" name="Image 0" descr="">
+            <ns1:extLst>
+              <ns1:ext uri="{C183D7F6-B498-43B3-948B-1728B52AA6E4}">
+                <ns2:decorative val="1"/>
+              </ns1:ext>
+            </ns1:extLst>
+          </ns0:cNvPr>
+          <ns0:cNvPicPr>
+            <ns1:picLocks noChangeAspect="1"/>
+          </ns0:cNvPicPr>
+          <ns0:nvPr/>
+        </ns0:nvPicPr>
+        <ns0:blipFill>
+          <ns1:blip ns3:embed="rId1"/>
+          <ns1:stretch>
+            <ns1:fillRect/>
+          </ns1:stretch>
+        </ns0:blipFill>
+        <ns0:spPr>
+          <ns1:xfrm>
+            <ns1:off x="6349901" y="0"/>
+            <ns1:ext cx="2793950" cy="1308050"/>
+          </ns1:xfrm>
+          <ns1:prstGeom prst="rect">
+            <ns1:avLst/>
+          </ns1:prstGeom>
+        </ns0:spPr>
+      </ns0:pic>
+      <ns0:sp>
+        <ns0:nvSpPr>
+          <ns0:cNvPr id="3" name="Text 0"/>
+          <ns0:cNvSpPr/>
+          <ns0:nvPr/>
+        </ns0:nvSpPr>
+        <ns0:spPr>
+          <ns1:xfrm>
+            <ns1:off x="7340501" y="177701"/>
+            <ns1:ext cx="1168301" cy="279350"/>
+          </ns1:xfrm>
+          <ns1:prstGeom prst="roundRect">
+            <ns1:avLst>
+              <ns1:gd name="adj" fmla="val 22731"/>
+            </ns1:avLst>
+          </ns1:prstGeom>
+          <ns1:solidFill>
+            <ns1:srgbClr val="1A7F37"/>
+          </ns1:solidFill>
+          <ns1:ln/>
+        </ns0:spPr>
+        <ns0:txBody>
+          <ns1:bodyPr wrap="square" rtlCol="0" anchor="ctr"/>
+          <ns1:lstStyle/>
+          <ns1:p>
+            <ns1:pPr indent="0" marL="0">
+              <ns1:buNone/>
+            </ns1:pPr>
+            <ns1:endParaRPr lang="en-US" dirty="0"/>
+          </ns1:p>
+        </ns0:txBody>
+      </ns0:sp>
+      <ns0:sp>
+        <ns0:nvSpPr>
+          <ns0:cNvPr id="4" name="Text 1"/>
+          <ns0:cNvSpPr/>
+          <ns0:nvPr/>
+        </ns0:nvSpPr>
+        <ns0:spPr>
+          <ns1:xfrm>
+            <ns1:off x="7461041" y="231577"/>
+            <ns1:ext cx="927071" cy="171450"/>
+          </ns1:xfrm>
+          <ns1:prstGeom prst="rect">
+            <ns1:avLst/>
+          </ns1:prstGeom>
+          <ns1:noFill/>
+          <ns1:ln/>
+        </ns0:spPr>
+        <ns0:txBody>
+          <ns1:bodyPr wrap="square" lIns="0" tIns="0" rIns="0" bIns="0" rtlCol="0" anchor="t"/>
+          <ns1:lstStyle/>
+          <ns1:p>
+            <ns1:pPr algn="ctr" indent="0" marL="0">
+              <ns1:buNone/>
+            </ns1:pPr>
+            <ns1:r>
+              <ns1:rPr lang="en-US" sz="1150" b="1" dirty="0">
+                <ns1:solidFill>
+                  <ns1:srgbClr val="FFFFFF"/>
+                </ns1:solidFill>
+                <ns1:latin typeface="Arial" pitchFamily="34" charset="0"/>
+                <ns1:ea typeface="Arial" pitchFamily="34" charset="-122"/>
+                <ns1:cs typeface="Arial" pitchFamily="34" charset="-120"/>
+              </ns1:rPr>
+              <ns1:t>CHAPTER 05</ns1:t>
+            </ns1:r>
+            <ns1:endParaRPr lang="en-US" sz="1150" dirty="0"/>
+          </ns1:p>
+        </ns0:txBody>
+      </ns0:sp>
+      <ns0:pic>
+        <ns0:nvPicPr>
+          <ns0:cNvPr id="5" name="Image 1" descr="Open this chapter on GitHub">
+            <ns1:hlinkClick ns3:id="rId3" tooltip="https://github.com/github/copilot-app-for-beginners/tree/main/05-mcp-plugins"/>
+          </ns0:cNvPr>
+          <ns0:cNvPicPr>
+            <ns1:picLocks noChangeAspect="1"/>
+          </ns0:cNvPicPr>
+          <ns0:nvPr/>
+        </ns0:nvPicPr>
+        <ns0:blipFill>
+          <ns1:blip ns3:embed="rId2"/>
+          <ns1:stretch>
+            <ns1:fillRect/>
+          </ns1:stretch>
+        </ns0:blipFill>
+        <ns0:spPr>
+          <ns1:xfrm>
+            <ns1:off x="8610600" y="165050"/>
+            <ns1:ext cx="304800" cy="304800"/>
+          </ns1:xfrm>
+          <ns1:prstGeom prst="rect">
+            <ns1:avLst/>
+          </ns1:prstGeom>
+        </ns0:spPr>
+      </ns0:pic>
+      <ns0:sp>
+        <ns0:nvSpPr>
+          <ns0:cNvPr id="6" name="Text 2"/>
+          <ns0:cNvSpPr/>
+          <ns0:nvPr/>
+        </ns0:nvSpPr>
+        <ns0:spPr>
+          <ns1:xfrm>
+            <ns1:off x="507950" y="381000"/>
+            <ns1:ext cx="8161020" cy="190500"/>
+          </ns1:xfrm>
+          <ns1:prstGeom prst="rect">
+            <ns1:avLst/>
+          </ns1:prstGeom>
+          <ns1:noFill/>
+          <ns1:ln/>
+        </ns0:spPr>
+        <ns0:txBody>
+          <ns1:bodyPr wrap="square" lIns="0" tIns="0" rIns="0" bIns="0" rtlCol="0" anchor="t"/>
+          <ns1:lstStyle/>
+          <ns1:p>
+            <ns1:pPr algn="l" indent="0" marL="0">
+              <ns1:buNone/>
+            </ns1:pPr>
+            <ns1:r>
+              <ns1:rPr lang="en-US" sz="1250" b="1" dirty="0">
+                <ns1:solidFill>
+                  <ns1:srgbClr val="8250DF"/>
+                </ns1:solidFill>
+                <ns1:latin typeface="Arial" pitchFamily="34" charset="0"/>
+                <ns1:ea typeface="Arial" pitchFamily="34" charset="-122"/>
+                <ns1:cs typeface="Arial" pitchFamily="34" charset="-120"/>
+              </ns1:rPr>
+              <ns1:t>EXERCISE</ns1:t>
+            </ns1:r>
+            <ns1:endParaRPr lang="en-US" sz="1250" dirty="0"/>
+          </ns1:p>
+        </ns0:txBody>
+      </ns0:sp>
+      <ns0:sp>
+        <ns0:nvSpPr>
+          <ns0:cNvPr id="7" name="Text 3"/>
+          <ns0:cNvSpPr/>
+          <ns0:nvPr/>
+        </ns0:nvSpPr>
+        <ns0:spPr>
+          <ns1:xfrm>
+            <ns1:off x="507950" y="622250"/>
+            <ns1:ext cx="8161020" cy="419100"/>
+          </ns1:xfrm>
+          <ns1:prstGeom prst="rect">
+            <ns1:avLst/>
+          </ns1:prstGeom>
+          <ns1:noFill/>
+          <ns1:ln/>
+        </ns0:spPr>
+        <ns0:txBody>
+          <ns1:bodyPr wrap="square" lIns="0" tIns="0" rIns="0" bIns="0" rtlCol="0" anchor="t"/>
+          <ns1:lstStyle/>
+          <ns1:p>
+            <ns1:pPr algn="l" indent="0" marL="0">
+              <ns1:lnSpc>
+                <ns1:spcPts val="3300"/>
+              </ns1:lnSpc>
+              <ns1:spcBef>
+                <ns1:spcPts val="400"/>
+              </ns1:spcBef>
+              <ns1:buNone/>
+            </ns1:pPr>
+            <ns1:r>
+              <ns1:rPr lang="en-US" sz="2800" b="1" dirty="0">
+                <ns1:solidFill>
+                  <ns1:srgbClr val="1F2328"/>
+                </ns1:solidFill>
+                <ns1:latin typeface="Arial" pitchFamily="34" charset="0"/>
+                <ns1:ea typeface="Arial" pitchFamily="34" charset="-122"/>
+                <ns1:cs typeface="Arial" pitchFamily="34" charset="-120"/>
+              </ns1:rPr>
+              <ns1:t>Install Modern Web Guidance</ns1:t>
+            </ns1:r>
+            <ns1:endParaRPr lang="en-US" sz="2800" dirty="0"/>
+          </ns1:p>
+        </ns0:txBody>
+      </ns0:sp>
+      <ns0:sp>
+        <ns0:nvSpPr>
+          <ns0:cNvPr id="8" name="Text 4"/>
+          <ns0:cNvSpPr/>
+          <ns0:nvPr/>
+        </ns0:nvSpPr>
+        <ns0:spPr>
+          <ns1:xfrm>
+            <ns1:off x="507950" y="1104751"/>
+            <ns1:ext cx="8161020" cy="254050"/>
+          </ns1:xfrm>
+          <ns1:prstGeom prst="rect">
+            <ns1:avLst/>
+          </ns1:prstGeom>
+          <ns1:noFill/>
+          <ns1:ln/>
+        </ns0:spPr>
+        <ns0:txBody>
+          <ns1:bodyPr wrap="square" lIns="0" tIns="0" rIns="0" bIns="0" rtlCol="0" anchor="t"/>
+          <ns1:lstStyle/>
+          <ns1:p>
+            <ns1:pPr algn="l" indent="0" marL="0">
+              <ns1:lnSpc>
+                <ns1:spcPts val="2000"/>
+              </ns1:lnSpc>
+              <ns1:spcBef>
+                <ns1:spcPts val="500"/>
+              </ns1:spcBef>
+              <ns1:buNone/>
+            </ns1:pPr>
+            <ns1:r>
+              <ns1:rPr lang="en-US" sz="1650" dirty="0">
+                <ns1:solidFill>
+                  <ns1:srgbClr val="59636E"/>
+                </ns1:solidFill>
+                <ns1:latin typeface="Arial" pitchFamily="34" charset="0"/>
+                <ns1:ea typeface="Arial" pitchFamily="34" charset="-122"/>
+                <ns1:cs typeface="Arial" pitchFamily="34" charset="-120"/>
+              </ns1:rPr>
+              <ns1:t>Read what a plugin contains before you install it.</ns1:t>
+            </ns1:r>
+            <ns1:endParaRPr lang="en-US" sz="1650" dirty="0"/>
+          </ns1:p>
+        </ns0:txBody>
+      </ns0:sp>
+      <ns0:sp>
+        <ns0:nvSpPr>
+          <ns0:cNvPr id="9" name="Text 5"/>
+          <ns0:cNvSpPr/>
+          <ns0:nvPr/>
+        </ns0:nvSpPr>
+        <ns0:spPr>
+          <ns1:xfrm>
+            <ns1:off x="507950" y="1574750"/>
+            <ns1:ext cx="8127950" cy="1222177"/>
+          </ns1:xfrm>
+          <ns1:prstGeom prst="roundRect">
+            <ns1:avLst>
+              <ns1:gd name="adj" fmla="val 10391"/>
+            </ns1:avLst>
+          </ns1:prstGeom>
+          <ns1:solidFill>
+            <ns1:srgbClr val="FFFFFF"/>
+          </ns1:solidFill>
+          <ns1:ln w="9525">
+            <ns1:solidFill>
+              <ns1:srgbClr val="D1D9E0"/>
+            </ns1:solidFill>
+          </ns1:ln>
+          <ns1:effectLst>
+            <ns1:outerShdw sx="100000" sy="100000" kx="0" ky="0" algn="bl" rotWithShape="0" blurRad="38100" dist="9525" dir="5400000">
+              <ns1:srgbClr val="1f2328">
+                <ns1:alpha val="12000"/>
+              </ns1:srgbClr>
+            </ns1:outerShdw>
+          </ns1:effectLst>
+        </ns0:spPr>
+        <ns0:txBody>
+          <ns1:bodyPr wrap="square" rtlCol="0" anchor="ctr"/>
+          <ns1:lstStyle/>
+          <ns1:p>
+            <ns1:pPr indent="0" marL="0">
+              <ns1:buNone/>
+            </ns1:pPr>
+            <ns1:endParaRPr lang="en-US" dirty="0"/>
+          </ns1:p>
+        </ns0:txBody>
+      </ns0:sp>
+      <ns0:sp>
+        <ns0:nvSpPr>
+          <ns0:cNvPr id="10" name="Text 6"/>
+          <ns0:cNvSpPr/>
+          <ns0:nvPr/>
+        </ns0:nvSpPr>
+        <ns0:spPr>
+          <ns1:xfrm>
+            <ns1:off x="517475" y="1584275"/>
+            <ns1:ext cx="8108900" cy="412552"/>
+          </ns1:xfrm>
+          <ns1:prstGeom prst="roundRect">
+            <ns1:avLst>
+              <ns1:gd name="adj" fmla="val 30784"/>
+            </ns1:avLst>
+          </ns1:prstGeom>
+          <ns1:solidFill>
+            <ns1:srgbClr val="F6F8FA"/>
+          </ns1:solidFill>
+          <ns1:ln/>
+        </ns0:spPr>
+        <ns0:txBody>
+          <ns1:bodyPr wrap="square" rtlCol="0" anchor="ctr"/>
+          <ns1:lstStyle/>
+          <ns1:p>
+            <ns1:pPr indent="0" marL="0">
+              <ns1:buNone/>
+            </ns1:pPr>
+            <ns1:endParaRPr lang="en-US" dirty="0"/>
+          </ns1:p>
+        </ns0:txBody>
+      </ns0:sp>
+      <ns0:sp>
+        <ns0:nvSpPr>
+          <ns0:cNvPr id="11" name="Shape 7"/>
+          <ns0:cNvSpPr/>
+          <ns0:nvPr/>
+        </ns0:nvSpPr>
+        <ns0:spPr>
+          <ns1:xfrm>
+            <ns1:off x="517475" y="1992064"/>
+            <ns1:ext cx="8108900" cy="0"/>
+          </ns1:xfrm>
+          <ns1:prstGeom prst="line">
+            <ns1:avLst/>
+          </ns1:prstGeom>
+          <ns1:noFill/>
+          <ns1:ln w="9525">
+            <ns1:solidFill>
+              <ns1:srgbClr val="D1D9E0"/>
+            </ns1:solidFill>
+            <ns1:prstDash val="solid"/>
+          </ns1:ln>
+        </ns0:spPr>
+      </ns0:sp>
+      <ns0:pic>
+        <ns0:nvPicPr>
+          <ns0:cNvPr id="12" name="Image 2" descr="">
+            <ns1:extLst>
+              <ns1:ext uri="{C183D7F6-B498-43B3-948B-1728B52AA6E4}">
+                <ns2:decorative val="1"/>
+              </ns1:ext>
+            </ns1:extLst>
+          </ns0:cNvPr>
+          <ns0:cNvPicPr>
+            <ns1:picLocks noChangeAspect="1"/>
+          </ns0:cNvPicPr>
+          <ns0:nvPr/>
+        </ns0:nvPicPr>
+        <ns0:blipFill>
+          <ns1:blip ns3:embed="rId4"/>
+          <ns1:stretch>
+            <ns1:fillRect/>
+          </ns1:stretch>
+        </ns0:blipFill>
+        <ns0:spPr>
+          <ns1:xfrm>
+            <ns1:off x="695176" y="1709589"/>
+            <ns1:ext cx="152400" cy="152400"/>
+          </ns1:xfrm>
+          <ns1:prstGeom prst="rect">
+            <ns1:avLst/>
+          </ns1:prstGeom>
+        </ns0:spPr>
+      </ns0:pic>
+      <ns0:sp>
+        <ns0:nvSpPr>
+          <ns0:cNvPr id="13" name="Text 8"/>
+          <ns0:cNvSpPr/>
+          <ns0:nvPr/>
+        </ns0:nvSpPr>
+        <ns0:spPr>
+          <ns1:xfrm>
+            <ns1:off x="949077" y="1685776"/>
+            <ns1:ext cx="1418767" cy="200025"/>
+          </ns1:xfrm>
+          <ns1:prstGeom prst="rect">
+            <ns1:avLst/>
+          </ns1:prstGeom>
+          <ns1:noFill/>
+          <ns1:ln/>
+        </ns0:spPr>
+        <ns0:txBody>
+          <ns1:bodyPr wrap="square" lIns="0" tIns="0" rIns="0" bIns="0" rtlCol="0" anchor="t"/>
+          <ns1:lstStyle/>
+          <ns1:p>
+            <ns1:pPr algn="l" indent="0" marL="0">
+              <ns1:buNone/>
+            </ns1:pPr>
+            <ns1:r>
+              <ns1:rPr lang="en-US" sz="1350" b="1" dirty="0">
+                <ns1:solidFill>
+                  <ns1:srgbClr val="1F2328"/>
+                </ns1:solidFill>
+                <ns1:latin typeface="Arial" pitchFamily="34" charset="0"/>
+                <ns1:ea typeface="Arial" pitchFamily="34" charset="-122"/>
+                <ns1:cs typeface="Arial" pitchFamily="34" charset="-120"/>
+              </ns1:rPr>
+              <ns1:t>awesome-copilot</ns1:t>
+            </ns1:r>
+            <ns1:endParaRPr lang="en-US" sz="1350" dirty="0"/>
+          </ns1:p>
+        </ns0:txBody>
+      </ns0:sp>
+      <ns0:sp>
+        <ns0:nvSpPr>
+          <ns0:cNvPr id="14" name="Text 9"/>
+          <ns0:cNvSpPr/>
+          <ns0:nvPr/>
+        </ns0:nvSpPr>
+        <ns0:spPr>
+          <ns1:xfrm>
+            <ns1:off x="2441525" y="1690539"/>
+            <ns1:ext cx="881682" cy="190500"/>
+          </ns1:xfrm>
+          <ns1:prstGeom prst="rect">
+            <ns1:avLst/>
+          </ns1:prstGeom>
+          <ns1:noFill/>
+          <ns1:ln/>
+        </ns0:spPr>
+        <ns0:txBody>
+          <ns1:bodyPr wrap="square" lIns="0" tIns="0" rIns="0" bIns="0" rtlCol="0" anchor="t"/>
+          <ns1:lstStyle/>
+          <ns1:p>
+            <ns1:pPr algn="l" indent="0" marL="0">
+              <ns1:buNone/>
+            </ns1:pPr>
+            <ns1:r>
+              <ns1:rPr lang="en-US" sz="1250" dirty="0">
+                <ns1:solidFill>
+                  <ns1:srgbClr val="59636E"/>
+                </ns1:solidFill>
+                <ns1:latin typeface="Arial" pitchFamily="34" charset="0"/>
+                <ns1:ea typeface="Arial" pitchFamily="34" charset="-122"/>
+                <ns1:cs typeface="Arial" pitchFamily="34" charset="-120"/>
+              </ns1:rPr>
+              <ns1:t>Marketplace</ns1:t>
+            </ns1:r>
+            <ns1:endParaRPr lang="en-US" sz="1250" dirty="0"/>
+          </ns1:p>
+        </ns0:txBody>
+      </ns0:sp>
+      <ns0:sp>
+        <ns0:nvSpPr>
+          <ns0:cNvPr id="15" name="Text 10"/>
+          <ns0:cNvSpPr/>
+          <ns0:nvPr/>
+        </ns0:nvSpPr>
+        <ns0:spPr>
+          <ns1:xfrm>
+            <ns1:off x="695176" y="2176165"/>
+            <ns1:ext cx="431750" cy="431750"/>
+          </ns1:xfrm>
+          <ns1:prstGeom prst="roundRect">
+            <ns1:avLst>
+              <ns1:gd name="adj" fmla="val 20591"/>
+            </ns1:avLst>
+          </ns1:prstGeom>
+          <ns1:solidFill>
+            <ns1:srgbClr val="FBEFFF"/>
+          </ns1:solidFill>
+          <ns1:ln/>
+        </ns0:spPr>
+        <ns0:txBody>
+          <ns1:bodyPr wrap="square" rtlCol="0" anchor="ctr"/>
+          <ns1:lstStyle/>
+          <ns1:p>
+            <ns1:pPr indent="0" marL="0">
+              <ns1:buNone/>
+            </ns1:pPr>
+            <ns1:endParaRPr lang="en-US" dirty="0"/>
+          </ns1:p>
+        </ns0:txBody>
+      </ns0:sp>
+      <ns0:pic>
+        <ns0:nvPicPr>
+          <ns0:cNvPr id="16" name="Image 3" descr="">
+            <ns1:extLst>
+              <ns1:ext uri="{C183D7F6-B498-43B3-948B-1728B52AA6E4}">
+                <ns2:decorative val="1"/>
+              </ns1:ext>
+            </ns1:extLst>
+          </ns0:cNvPr>
+          <ns0:cNvPicPr>
+            <ns1:picLocks noChangeAspect="1"/>
+          </ns0:cNvPicPr>
+          <ns0:nvPr/>
+        </ns0:nvPicPr>
+        <ns0:blipFill>
+          <ns1:blip ns3:embed="rId5"/>
+          <ns1:stretch>
+            <ns1:fillRect/>
+          </ns1:stretch>
+        </ns0:blipFill>
+        <ns0:spPr>
+          <ns1:xfrm>
+            <ns1:off x="790426" y="2271415"/>
+            <ns1:ext cx="241250" cy="241250"/>
+          </ns1:xfrm>
+          <ns1:prstGeom prst="rect">
+            <ns1:avLst/>
+          </ns1:prstGeom>
+        </ns0:spPr>
+      </ns0:pic>
+      <ns0:sp>
+        <ns0:nvSpPr>
+          <ns0:cNvPr id="17" name="Text 11"/>
+          <ns0:cNvSpPr/>
+          <ns0:nvPr/>
+        </ns0:nvSpPr>
+        <ns0:spPr>
+          <ns1:xfrm>
+            <ns1:off x="1304627" y="2149227"/>
+            <ns1:ext cx="6043496" cy="247650"/>
+          </ns1:xfrm>
+          <ns1:prstGeom prst="rect">
+            <ns1:avLst/>
+          </ns1:prstGeom>
+          <ns1:noFill/>
+          <ns1:ln/>
+        </ns0:spPr>
+        <ns0:txBody>
+          <ns1:bodyPr wrap="square" lIns="0" tIns="0" rIns="0" bIns="0" rtlCol="0" anchor="t"/>
+          <ns1:lstStyle/>
+          <ns1:p>
+            <ns1:pPr algn="l" indent="0" marL="0">
+              <ns1:buNone/>
+            </ns1:pPr>
+            <ns1:r>
+              <ns1:rPr lang="en-US" sz="1650" b="1" dirty="0">
+                <ns1:solidFill>
+                  <ns1:srgbClr val="1F2328"/>
+                </ns1:solidFill>
+                <ns1:latin typeface="Arial" pitchFamily="34" charset="0"/>
+                <ns1:ea typeface="Arial" pitchFamily="34" charset="-122"/>
+                <ns1:cs typeface="Arial" pitchFamily="34" charset="-120"/>
+              </ns1:rPr>
+              <ns1:t>modern-web-guidance</ns1:t>
+            </ns1:r>
+            <ns1:endParaRPr lang="en-US" sz="1650" dirty="0"/>
+          </ns1:p>
+        </ns0:txBody>
+      </ns0:sp>
+      <ns0:sp>
+        <ns0:nvSpPr>
+          <ns0:cNvPr id="18" name="Text 12"/>
+          <ns0:cNvSpPr/>
+          <ns0:nvPr/>
+        </ns0:nvSpPr>
+        <ns0:spPr>
+          <ns1:xfrm>
+            <ns1:off x="1304627" y="2434977"/>
+            <ns1:ext cx="6043496" cy="200025"/>
+          </ns1:xfrm>
+          <ns1:prstGeom prst="rect">
+            <ns1:avLst/>
+          </ns1:prstGeom>
+          <ns1:noFill/>
+          <ns1:ln/>
+        </ns0:spPr>
+        <ns0:txBody>
+          <ns1:bodyPr wrap="square" lIns="0" tIns="0" rIns="0" bIns="0" rtlCol="0" anchor="t"/>
+          <ns1:lstStyle/>
+          <ns1:p>
+            <ns1:pPr algn="l" indent="0" marL="0">
+              <ns1:buNone/>
+            </ns1:pPr>
+            <ns1:r>
+              <ns1:rPr lang="en-US" sz="1350" dirty="0">
+                <ns1:solidFill>
+                  <ns1:srgbClr val="59636E"/>
+                </ns1:solidFill>
+                <ns1:latin typeface="Arial" pitchFamily="34" charset="0"/>
+                <ns1:ea typeface="Arial" pitchFamily="34" charset="-122"/>
+                <ns1:cs typeface="Arial" pitchFamily="34" charset="-120"/>
+              </ns1:rPr>
+              <ns1:t>A skill and CLI tool that help agents build web apps with modern, secure APIs.</ns1:t>
+            </ns1:r>
+            <ns1:endParaRPr lang="en-US" sz="1350" dirty="0"/>
+          </ns1:p>
+        </ns0:txBody>
+      </ns0:sp>
+      <ns0:sp>
+        <ns0:nvSpPr>
+          <ns0:cNvPr id="19" name="Text 13"/>
+          <ns0:cNvSpPr/>
+          <ns0:nvPr/>
+        </ns0:nvSpPr>
+        <ns0:spPr>
+          <ns1:xfrm>
+            <ns1:off x="7407325" y="2214414"/>
+            <ns1:ext cx="1041350" cy="355402"/>
+          </ns1:xfrm>
+          <ns1:prstGeom prst="roundRect">
+            <ns1:avLst>
+              <ns1:gd name="adj" fmla="val 21441"/>
+            </ns1:avLst>
+          </ns1:prstGeom>
+          <ns1:solidFill>
+            <ns1:srgbClr val="FFFFFF"/>
+          </ns1:solidFill>
+          <ns1:ln w="9525">
+            <ns1:solidFill>
+              <ns1:srgbClr val="D1D9E0"/>
+            </ns1:solidFill>
+          </ns1:ln>
+        </ns0:spPr>
+        <ns0:txBody>
+          <ns1:bodyPr wrap="square" rtlCol="0" anchor="ctr"/>
+          <ns1:lstStyle/>
+          <ns1:p>
+            <ns1:pPr indent="0" marL="0">
+              <ns1:buNone/>
+            </ns1:pPr>
+            <ns1:endParaRPr lang="en-US" dirty="0"/>
+          </ns1:p>
+        </ns0:txBody>
+      </ns0:sp>
+      <ns0:sp>
+        <ns0:nvSpPr>
+          <ns0:cNvPr id="20" name="Text 14"/>
+          <ns0:cNvSpPr/>
+          <ns0:nvPr/>
+        </ns0:nvSpPr>
+        <ns0:spPr>
+          <ns1:xfrm>
+            <ns1:off x="7594550" y="2287339"/>
+            <ns1:ext cx="680237" cy="209550"/>
+          </ns1:xfrm>
+          <ns1:prstGeom prst="rect">
+            <ns1:avLst/>
+          </ns1:prstGeom>
+          <ns1:noFill/>
+          <ns1:ln/>
+        </ns0:spPr>
+        <ns0:txBody>
+          <ns1:bodyPr wrap="square" lIns="0" tIns="0" rIns="0" bIns="0" rtlCol="0" anchor="t"/>
+          <ns1:lstStyle/>
+          <ns1:p>
+            <ns1:pPr algn="l" indent="0" marL="0">
+              <ns1:buNone/>
+            </ns1:pPr>
+            <ns1:r>
+              <ns1:rPr lang="en-US" sz="1400" b="1" dirty="0">
+                <ns1:solidFill>
+                  <ns1:srgbClr val="1F2328"/>
+                </ns1:solidFill>
+                <ns1:latin typeface="Arial" pitchFamily="34" charset="0"/>
+                <ns1:ea typeface="Arial" pitchFamily="34" charset="-122"/>
+                <ns1:cs typeface="Arial" pitchFamily="34" charset="-120"/>
+              </ns1:rPr>
+              <ns1:t>+ Install</ns1:t>
+            </ns1:r>
+            <ns1:endParaRPr lang="en-US" sz="1400" dirty="0"/>
+          </ns1:p>
+        </ns0:txBody>
+      </ns0:sp>
+      <ns0:sp>
+        <ns0:nvSpPr>
+          <ns0:cNvPr id="21" name="Text 15"/>
+          <ns0:cNvSpPr/>
+          <ns0:nvPr/>
+        </ns0:nvSpPr>
+        <ns0:spPr>
+          <ns1:xfrm>
+            <ns1:off x="507950" y="2974628"/>
+            <ns1:ext cx="2607618" cy="1127671"/>
+          </ns1:xfrm>
+          <ns1:prstGeom prst="roundRect">
+            <ns1:avLst>
+              <ns1:gd name="adj" fmla="val 11262"/>
+            </ns1:avLst>
+          </ns1:prstGeom>
+          <ns1:solidFill>
+            <ns1:srgbClr val="FFFFFF"/>
+          </ns1:solidFill>
+          <ns1:ln w="9525">
+            <ns1:solidFill>
+              <ns1:srgbClr val="E0C5FF"/>
+            </ns1:solidFill>
+          </ns1:ln>
+        </ns0:spPr>
+        <ns0:txBody>
+          <ns1:bodyPr wrap="square" rtlCol="0" anchor="ctr"/>
+          <ns1:lstStyle/>
+          <ns1:p>
+            <ns1:pPr indent="0" marL="0">
+              <ns1:buNone/>
+            </ns1:pPr>
+            <ns1:endParaRPr lang="en-US" dirty="0"/>
+          </ns1:p>
+        </ns0:txBody>
+      </ns0:sp>
+      <ns0:sp>
+        <ns0:nvSpPr>
+          <ns0:cNvPr id="22" name="Text 16"/>
+          <ns0:cNvSpPr/>
+          <ns0:nvPr/>
+        </ns0:nvSpPr>
+        <ns0:spPr>
+          <ns1:xfrm>
+            <ns1:off x="669875" y="3136553"/>
+            <ns1:ext cx="279350" cy="279350"/>
+          </ns1:xfrm>
+          <ns1:prstGeom prst="roundRect">
+            <ns1:avLst>
+              <ns1:gd name="adj" fmla="val 327331"/>
+            </ns1:avLst>
+          </ns1:prstGeom>
+          <ns1:solidFill>
+            <ns1:srgbClr val="8250DF"/>
+          </ns1:solidFill>
+          <ns1:ln/>
+        </ns0:spPr>
+        <ns0:txBody>
+          <ns1:bodyPr wrap="square" rtlCol="0" anchor="ctr"/>
+          <ns1:lstStyle/>
+          <ns1:p>
+            <ns1:pPr indent="0" marL="0">
+              <ns1:buNone/>
+            </ns1:pPr>
+            <ns1:endParaRPr lang="en-US" dirty="0"/>
+          </ns1:p>
+        </ns0:txBody>
+      </ns0:sp>
+      <ns0:sp>
+        <ns0:nvSpPr>
+          <ns0:cNvPr id="23" name="Text 17"/>
+          <ns0:cNvSpPr/>
+          <ns0:nvPr/>
+        </ns0:nvSpPr>
+        <ns0:spPr>
+          <ns1:xfrm>
+            <ns1:off x="764540" y="3180904"/>
+            <ns1:ext cx="90020" cy="190500"/>
+          </ns1:xfrm>
+          <ns1:prstGeom prst="rect">
+            <ns1:avLst/>
+          </ns1:prstGeom>
+          <ns1:noFill/>
+          <ns1:ln/>
+        </ns0:spPr>
+        <ns0:txBody>
+          <ns1:bodyPr wrap="square" lIns="0" tIns="0" rIns="0" bIns="0" rtlCol="0" anchor="t"/>
+          <ns1:lstStyle/>
+          <ns1:p>
+            <ns1:pPr algn="ctr" indent="0" marL="0">
+              <ns1:buNone/>
+            </ns1:pPr>
+            <ns1:r>
+              <ns1:rPr lang="en-US" sz="1250" b="1" dirty="0">
+                <ns1:solidFill>
+                  <ns1:srgbClr val="FFFFFF"/>
+                </ns1:solidFill>
+                <ns1:latin typeface="Arial" pitchFamily="34" charset="0"/>
+                <ns1:ea typeface="Arial" pitchFamily="34" charset="-122"/>
+                <ns1:cs typeface="Arial" pitchFamily="34" charset="-120"/>
+              </ns1:rPr>
+              <ns1:t>1</ns1:t>
+            </ns1:r>
+            <ns1:endParaRPr lang="en-US" sz="1250" dirty="0"/>
+          </ns1:p>
+        </ns0:txBody>
+      </ns0:sp>
+      <ns0:sp>
+        <ns0:nvSpPr>
+          <ns0:cNvPr id="24" name="Text 18"/>
+          <ns0:cNvSpPr/>
+          <ns0:nvPr/>
+        </ns0:nvSpPr>
+        <ns0:spPr>
+          <ns1:xfrm>
+            <ns1:off x="1063526" y="3161854"/>
+            <ns1:ext cx="641071" cy="228600"/>
+          </ns1:xfrm>
+          <ns1:prstGeom prst="rect">
+            <ns1:avLst/>
+          </ns1:prstGeom>
+          <ns1:noFill/>
+          <ns1:ln/>
+        </ns0:spPr>
+        <ns0:txBody>
+          <ns1:bodyPr wrap="square" lIns="0" tIns="0" rIns="0" bIns="0" rtlCol="0" anchor="t"/>
+          <ns1:lstStyle/>
+          <ns1:p>
+            <ns1:pPr algn="l" indent="0" marL="0">
+              <ns1:lnSpc>
+                <ns1:spcPts val="1800"/>
+              </ns1:lnSpc>
+              <ns1:buNone/>
+            </ns1:pPr>
+            <ns1:r>
+              <ns1:rPr lang="en-US" sz="1650" b="1" dirty="0">
+                <ns1:solidFill>
+                  <ns1:srgbClr val="1F2328"/>
+                </ns1:solidFill>
+                <ns1:latin typeface="Arial" pitchFamily="34" charset="0"/>
+                <ns1:ea typeface="Arial" pitchFamily="34" charset="-122"/>
+                <ns1:cs typeface="Arial" pitchFamily="34" charset="-120"/>
+              </ns1:rPr>
+              <ns1:t>Find it</ns1:t>
+            </ns1:r>
+            <ns1:endParaRPr lang="en-US" sz="1650" dirty="0"/>
+          </ns1:p>
+        </ns0:txBody>
+      </ns0:sp>
+      <ns0:sp>
+        <ns0:nvSpPr>
+          <ns0:cNvPr id="25" name="Text 19"/>
+          <ns0:cNvSpPr/>
+          <ns0:nvPr/>
+        </ns0:nvSpPr>
+        <ns0:spPr>
+          <ns1:xfrm>
+            <ns1:off x="669875" y="3492103"/>
+            <ns1:ext cx="2329443" cy="429220"/>
+          </ns1:xfrm>
+          <ns1:prstGeom prst="rect">
+            <ns1:avLst/>
+          </ns1:prstGeom>
+          <ns1:noFill/>
+          <ns1:ln/>
+        </ns0:spPr>
+        <ns0:txBody>
+          <ns1:bodyPr wrap="square" lIns="0" tIns="0" rIns="0" bIns="0" rtlCol="0" anchor="t"/>
+          <ns1:lstStyle/>
+          <ns1:p>
+            <ns1:pPr algn="l" indent="0" marL="0">
+              <ns1:lnSpc>
+                <ns1:spcPts val="1690"/>
+              </ns1:lnSpc>
+              <ns1:buNone/>
+            </ns1:pPr>
+            <ns1:r>
+              <ns1:rPr lang="en-US" sz="1400" dirty="0">
+                <ns1:solidFill>
+                  <ns1:srgbClr val="59636E"/>
+                </ns1:solidFill>
+                <ns1:latin typeface="Arial" pitchFamily="34" charset="0"/>
+                <ns1:ea typeface="Arial" pitchFamily="34" charset="-122"/>
+                <ns1:cs typeface="Arial" pitchFamily="34" charset="-120"/>
+              </ns1:rPr>
+              <ns1:t>Browse &gt; Plugins; search the catalog.</ns1:t>
+            </ns1:r>
+            <ns1:pPr algn="l" indent="0" marL="0">
+              <ns1:lnSpc>
+                <ns1:spcPts val="1690"/>
+              </ns1:lnSpc>
+              <ns1:buNone/>
+            </ns1:pPr>
+            <ns1:r>
+              <ns1:rPr lang="en-US" sz="1400" b="1" dirty="0">
+                <ns1:solidFill>
+                  <ns1:srgbClr val="59636E"/>
+                </ns1:solidFill>
+                <ns1:latin typeface="Arial" pitchFamily="34" charset="0"/>
+                <ns1:ea typeface="Arial" pitchFamily="34" charset="-122"/>
+                <ns1:cs typeface="Arial" pitchFamily="34" charset="-120"/>
+              </ns1:rPr>
+              <ns1:t/>
+            </ns1:r>
+            <ns1:pPr algn="l" indent="0" marL="0">
+              <ns1:lnSpc>
+                <ns1:spcPts val="1690"/>
+              </ns1:lnSpc>
+              <ns1:buNone/>
+            </ns1:pPr>
+            <ns1:r>
+              <ns1:rPr lang="en-US" sz="1400" dirty="0">
+                <ns1:solidFill>
+                  <ns1:srgbClr val="59636E"/>
+                </ns1:solidFill>
+                <ns1:latin typeface="Arial" pitchFamily="34" charset="0"/>
+                <ns1:ea typeface="Arial" pitchFamily="34" charset="-122"/>
+                <ns1:cs typeface="Arial" pitchFamily="34" charset="-120"/>
+              </ns1:rPr>
+              <ns1:t/>
+            </ns1:r>
+            <ns1:endParaRPr lang="en-US" sz="1400" dirty="0"/>
+          </ns1:p>
+        </ns0:txBody>
+      </ns0:sp>
+      <ns0:sp>
+        <ns0:nvSpPr>
+          <ns0:cNvPr id="26" name="Text 20"/>
+          <ns0:cNvSpPr/>
+          <ns0:nvPr/>
+        </ns0:nvSpPr>
+        <ns0:spPr>
+          <ns1:xfrm>
+            <ns1:off x="3267968" y="2974628"/>
+            <ns1:ext cx="2607766" cy="1127671"/>
+          </ns1:xfrm>
+          <ns1:prstGeom prst="roundRect">
+            <ns1:avLst>
+              <ns1:gd name="adj" fmla="val 11262"/>
+            </ns1:avLst>
+          </ns1:prstGeom>
+          <ns1:solidFill>
+            <ns1:srgbClr val="FFFFFF"/>
+          </ns1:solidFill>
+          <ns1:ln w="9525">
+            <ns1:solidFill>
+              <ns1:srgbClr val="E0C5FF"/>
+            </ns1:solidFill>
+          </ns1:ln>
+        </ns0:spPr>
+        <ns0:txBody>
+          <ns1:bodyPr wrap="square" rtlCol="0" anchor="ctr"/>
+          <ns1:lstStyle/>
+          <ns1:p>
+            <ns1:pPr indent="0" marL="0">
+              <ns1:buNone/>
+            </ns1:pPr>
+            <ns1:endParaRPr lang="en-US" dirty="0"/>
+          </ns1:p>
+        </ns0:txBody>
+      </ns0:sp>
+      <ns0:sp>
+        <ns0:nvSpPr>
+          <ns0:cNvPr id="27" name="Text 21"/>
+          <ns0:cNvSpPr/>
+          <ns0:nvPr/>
+        </ns0:nvSpPr>
+        <ns0:spPr>
+          <ns1:xfrm>
+            <ns1:off x="3429893" y="3136553"/>
+            <ns1:ext cx="279350" cy="279350"/>
+          </ns1:xfrm>
+          <ns1:prstGeom prst="roundRect">
+            <ns1:avLst>
+              <ns1:gd name="adj" fmla="val 327331"/>
+            </ns1:avLst>
+          </ns1:prstGeom>
+          <ns1:solidFill>
+            <ns1:srgbClr val="8250DF"/>
+          </ns1:solidFill>
+          <ns1:ln/>
+        </ns0:spPr>
+        <ns0:txBody>
+          <ns1:bodyPr wrap="square" rtlCol="0" anchor="ctr"/>
+          <ns1:lstStyle/>
+          <ns1:p>
+            <ns1:pPr indent="0" marL="0">
+              <ns1:buNone/>
+            </ns1:pPr>
+            <ns1:endParaRPr lang="en-US" dirty="0"/>
+          </ns1:p>
+        </ns0:txBody>
+      </ns0:sp>
+      <ns0:sp>
+        <ns0:nvSpPr>
+          <ns0:cNvPr id="28" name="Text 22"/>
+          <ns0:cNvSpPr/>
+          <ns0:nvPr/>
+        </ns0:nvSpPr>
+        <ns0:spPr>
+          <ns1:xfrm>
+            <ns1:off x="3524558" y="3180904"/>
+            <ns1:ext cx="90020" cy="190500"/>
+          </ns1:xfrm>
+          <ns1:prstGeom prst="rect">
+            <ns1:avLst/>
+          </ns1:prstGeom>
+          <ns1:noFill/>
+          <ns1:ln/>
+        </ns0:spPr>
+        <ns0:txBody>
+          <ns1:bodyPr wrap="square" lIns="0" tIns="0" rIns="0" bIns="0" rtlCol="0" anchor="t"/>
+          <ns1:lstStyle/>
+          <ns1:p>
+            <ns1:pPr algn="ctr" indent="0" marL="0">
+              <ns1:buNone/>
+            </ns1:pPr>
+            <ns1:r>
+              <ns1:rPr lang="en-US" sz="1250" b="1" dirty="0">
+                <ns1:solidFill>
+                  <ns1:srgbClr val="FFFFFF"/>
+                </ns1:solidFill>
+                <ns1:latin typeface="Arial" pitchFamily="34" charset="0"/>
+                <ns1:ea typeface="Arial" pitchFamily="34" charset="-122"/>
+                <ns1:cs typeface="Arial" pitchFamily="34" charset="-120"/>
+              </ns1:rPr>
+              <ns1:t>2</ns1:t>
+            </ns1:r>
+            <ns1:endParaRPr lang="en-US" sz="1250" dirty="0"/>
+          </ns1:p>
+        </ns0:txBody>
+      </ns0:sp>
+      <ns0:sp>
+        <ns0:nvSpPr>
+          <ns0:cNvPr id="29" name="Text 23"/>
+          <ns0:cNvSpPr/>
+          <ns0:nvPr/>
+        </ns0:nvSpPr>
+        <ns0:spPr>
+          <ns1:xfrm>
+            <ns1:off x="3823543" y="3161854"/>
+            <ns1:ext cx="1781883" cy="228600"/>
+          </ns1:xfrm>
+          <ns1:prstGeom prst="rect">
+            <ns1:avLst/>
+          </ns1:prstGeom>
+          <ns1:noFill/>
+          <ns1:ln/>
+        </ns0:spPr>
+        <ns0:txBody>
+          <ns1:bodyPr wrap="square" lIns="0" tIns="0" rIns="0" bIns="0" rtlCol="0" anchor="t"/>
+          <ns1:lstStyle/>
+          <ns1:p>
+            <ns1:pPr algn="l" indent="0" marL="0">
+              <ns1:lnSpc>
+                <ns1:spcPts val="1800"/>
+              </ns1:lnSpc>
+              <ns1:buNone/>
+            </ns1:pPr>
+            <ns1:r>
+              <ns1:rPr lang="en-US" sz="1650" b="1" dirty="0">
+                <ns1:solidFill>
+                  <ns1:srgbClr val="1F2328"/>
+                </ns1:solidFill>
+                <ns1:latin typeface="Arial" pitchFamily="34" charset="0"/>
+                <ns1:ea typeface="Arial" pitchFamily="34" charset="-122"/>
+                <ns1:cs typeface="Arial" pitchFamily="34" charset="-120"/>
+              </ns1:rPr>
+              <ns1:t>Check the source</ns1:t>
+            </ns1:r>
+            <ns1:endParaRPr lang="en-US" sz="1650" dirty="0"/>
+          </ns1:p>
+        </ns0:txBody>
+      </ns0:sp>
+      <ns0:sp>
+        <ns0:nvSpPr>
+          <ns0:cNvPr id="30" name="Text 24"/>
+          <ns0:cNvSpPr/>
+          <ns0:nvPr/>
+        </ns0:nvSpPr>
+        <ns0:spPr>
+          <ns1:xfrm>
+            <ns1:off x="3429893" y="3492103"/>
+            <ns1:ext cx="2329595" cy="448270"/>
+          </ns1:xfrm>
+          <ns1:prstGeom prst="rect">
+            <ns1:avLst/>
+          </ns1:prstGeom>
+          <ns1:noFill/>
+          <ns1:ln/>
+        </ns0:spPr>
+        <ns0:txBody>
+          <ns1:bodyPr wrap="square" lIns="0" tIns="0" rIns="0" bIns="0" rtlCol="0" anchor="t"/>
+          <ns1:lstStyle/>
+          <ns1:p>
+            <ns1:pPr algn="l" indent="0" marL="0">
+              <ns1:lnSpc>
+                <ns1:spcPts val="1690"/>
+              </ns1:lnSpc>
+              <ns1:buNone/>
+            </ns1:pPr>
+            <ns1:r>
+              <ns1:rPr lang="en-US" sz="1400" b="1" dirty="0">
+                <ns1:solidFill>
+                  <ns1:srgbClr val="0550AE"/>
+                </ns1:solidFill>
+                <ns1:latin typeface="Courier New" pitchFamily="34" charset="0"/>
+                <ns1:ea typeface="Courier New" pitchFamily="34" charset="-122"/>
+                <ns1:cs typeface="Courier New" pitchFamily="34" charset="-120"/>
+              </ns1:rPr>
+              <ns1:t>GoogleChrome/modern-web-guidance</ns1:t>
+            </ns1:r>
+            <ns1:endParaRPr lang="en-US" sz="1400" dirty="0"/>
+          </ns1:p>
+        </ns0:txBody>
+      </ns0:sp>
+      <ns0:sp>
+        <ns0:nvSpPr>
+          <ns0:cNvPr id="31" name="Text 25"/>
+          <ns0:cNvSpPr/>
+          <ns0:nvPr/>
+        </ns0:nvSpPr>
+        <ns0:spPr>
+          <ns1:xfrm>
+            <ns1:off x="6028134" y="2974628"/>
+            <ns1:ext cx="2607766" cy="1127671"/>
+          </ns1:xfrm>
+          <ns1:prstGeom prst="roundRect">
+            <ns1:avLst>
+              <ns1:gd name="adj" fmla="val 11262"/>
+            </ns1:avLst>
+          </ns1:prstGeom>
+          <ns1:solidFill>
+            <ns1:srgbClr val="FFFFFF"/>
+          </ns1:solidFill>
+          <ns1:ln w="9525">
+            <ns1:solidFill>
+              <ns1:srgbClr val="E0C5FF"/>
+            </ns1:solidFill>
+          </ns1:ln>
+        </ns0:spPr>
+        <ns0:txBody>
+          <ns1:bodyPr wrap="square" rtlCol="0" anchor="ctr"/>
+          <ns1:lstStyle/>
+          <ns1:p>
+            <ns1:pPr indent="0" marL="0">
+              <ns1:buNone/>
+            </ns1:pPr>
+            <ns1:endParaRPr lang="en-US" dirty="0"/>
+          </ns1:p>
+        </ns0:txBody>
+      </ns0:sp>
+      <ns0:sp>
+        <ns0:nvSpPr>
+          <ns0:cNvPr id="32" name="Text 26"/>
+          <ns0:cNvSpPr/>
+          <ns0:nvPr/>
+        </ns0:nvSpPr>
+        <ns0:spPr>
+          <ns1:xfrm>
+            <ns1:off x="6190059" y="3136553"/>
+            <ns1:ext cx="279350" cy="279350"/>
+          </ns1:xfrm>
+          <ns1:prstGeom prst="roundRect">
+            <ns1:avLst>
+              <ns1:gd name="adj" fmla="val 327331"/>
+            </ns1:avLst>
+          </ns1:prstGeom>
+          <ns1:solidFill>
+            <ns1:srgbClr val="8250DF"/>
+          </ns1:solidFill>
+          <ns1:ln/>
+        </ns0:spPr>
+        <ns0:txBody>
+          <ns1:bodyPr wrap="square" rtlCol="0" anchor="ctr"/>
+          <ns1:lstStyle/>
+          <ns1:p>
+            <ns1:pPr indent="0" marL="0">
+              <ns1:buNone/>
+            </ns1:pPr>
+            <ns1:endParaRPr lang="en-US" dirty="0"/>
+          </ns1:p>
+        </ns0:txBody>
+      </ns0:sp>
+      <ns0:sp>
+        <ns0:nvSpPr>
+          <ns0:cNvPr id="33" name="Text 27"/>
+          <ns0:cNvSpPr/>
+          <ns0:nvPr/>
+        </ns0:nvSpPr>
+        <ns0:spPr>
+          <ns1:xfrm>
+            <ns1:off x="6284724" y="3180904"/>
+            <ns1:ext cx="90020" cy="190500"/>
+          </ns1:xfrm>
+          <ns1:prstGeom prst="rect">
+            <ns1:avLst/>
+          </ns1:prstGeom>
+          <ns1:noFill/>
+          <ns1:ln/>
+        </ns0:spPr>
+        <ns0:txBody>
+          <ns1:bodyPr wrap="square" lIns="0" tIns="0" rIns="0" bIns="0" rtlCol="0" anchor="t"/>
+          <ns1:lstStyle/>
+          <ns1:p>
+            <ns1:pPr algn="ctr" indent="0" marL="0">
+              <ns1:buNone/>
+            </ns1:pPr>
+            <ns1:r>
+              <ns1:rPr lang="en-US" sz="1250" b="1" dirty="0">
+                <ns1:solidFill>
+                  <ns1:srgbClr val="FFFFFF"/>
+                </ns1:solidFill>
+                <ns1:latin typeface="Arial" pitchFamily="34" charset="0"/>
+                <ns1:ea typeface="Arial" pitchFamily="34" charset="-122"/>
+                <ns1:cs typeface="Arial" pitchFamily="34" charset="-120"/>
+              </ns1:rPr>
+              <ns1:t>3</ns1:t>
+            </ns1:r>
+            <ns1:endParaRPr lang="en-US" sz="1250" dirty="0"/>
+          </ns1:p>
+        </ns0:txBody>
+      </ns0:sp>
+      <ns0:sp>
+        <ns0:nvSpPr>
+          <ns0:cNvPr id="34" name="Text 28"/>
+          <ns0:cNvSpPr/>
+          <ns0:nvPr/>
+        </ns0:nvSpPr>
+        <ns0:spPr>
+          <ns1:xfrm>
+            <ns1:off x="6583710" y="3161854"/>
+            <ns1:ext cx="1900291" cy="228600"/>
+          </ns1:xfrm>
+          <ns1:prstGeom prst="rect">
+            <ns1:avLst/>
+          </ns1:prstGeom>
+          <ns1:noFill/>
+          <ns1:ln/>
+        </ns0:spPr>
+        <ns0:txBody>
+          <ns1:bodyPr wrap="square" lIns="0" tIns="0" rIns="0" bIns="0" rtlCol="0" anchor="t"/>
+          <ns1:lstStyle/>
+          <ns1:p>
+            <ns1:pPr algn="l" indent="0" marL="0">
+              <ns1:lnSpc>
+                <ns1:spcPts val="1800"/>
+              </ns1:lnSpc>
+              <ns1:buNone/>
+            </ns1:pPr>
+            <ns1:r>
+              <ns1:rPr lang="en-US" sz="1650" b="1" dirty="0">
+                <ns1:solidFill>
+                  <ns1:srgbClr val="1F2328"/>
+                </ns1:solidFill>
+                <ns1:latin typeface="Arial" pitchFamily="34" charset="0"/>
+                <ns1:ea typeface="Arial" pitchFamily="34" charset="-122"/>
+                <ns1:cs typeface="Arial" pitchFamily="34" charset="-120"/>
+              </ns1:rPr>
+              <ns1:t>Install and confirm</ns1:t>
+            </ns1:r>
+            <ns1:endParaRPr lang="en-US" sz="1650" dirty="0"/>
+          </ns1:p>
+        </ns0:txBody>
+      </ns0:sp>
+      <ns0:sp>
+        <ns0:nvSpPr>
+          <ns0:cNvPr id="35" name="Text 29"/>
+          <ns0:cNvSpPr/>
+          <ns0:nvPr/>
+        </ns0:nvSpPr>
+        <ns0:spPr>
+          <ns1:xfrm>
+            <ns1:off x="6190059" y="3492103"/>
+            <ns1:ext cx="2329595" cy="429220"/>
+          </ns1:xfrm>
+          <ns1:prstGeom prst="rect">
+            <ns1:avLst/>
+          </ns1:prstGeom>
+          <ns1:noFill/>
+          <ns1:ln/>
+        </ns0:spPr>
+        <ns0:txBody>
+          <ns1:bodyPr wrap="square" lIns="0" tIns="0" rIns="0" bIns="0" rtlCol="0" anchor="t"/>
+          <ns1:lstStyle/>
+          <ns1:p>
+            <ns1:pPr algn="l" indent="0" marL="0">
+              <ns1:lnSpc>
+                <ns1:spcPts val="1690"/>
+              </ns1:lnSpc>
+              <ns1:buNone/>
+            </ns1:pPr>
+            <ns1:r>
+              <ns1:rPr lang="en-US" sz="1400" dirty="0">
+                <ns1:solidFill>
+                  <ns1:srgbClr val="59636E"/>
+                </ns1:solidFill>
+                <ns1:latin typeface="Arial" pitchFamily="34" charset="0"/>
+                <ns1:ea typeface="Arial" pitchFamily="34" charset="-122"/>
+                <ns1:cs typeface="Arial" pitchFamily="34" charset="-120"/>
+              </ns1:rPr>
+              <ns1:t>Confirm it under Installed, with its toggle on.</ns1:t>
+            </ns1:r>
+            <ns1:pPr algn="l" indent="0" marL="0">
+              <ns1:lnSpc>
+                <ns1:spcPts val="1690"/>
+              </ns1:lnSpc>
+              <ns1:buNone/>
+            </ns1:pPr>
+            <ns1:r>
+              <ns1:rPr lang="en-US" sz="1400" b="1" dirty="0">
+                <ns1:solidFill>
+                  <ns1:srgbClr val="59636E"/>
+                </ns1:solidFill>
+                <ns1:latin typeface="Arial" pitchFamily="34" charset="0"/>
+                <ns1:ea typeface="Arial" pitchFamily="34" charset="-122"/>
+                <ns1:cs typeface="Arial" pitchFamily="34" charset="-120"/>
+              </ns1:rPr>
+              <ns1:t/>
+            </ns1:r>
+            <ns1:pPr algn="l" indent="0" marL="0">
+              <ns1:lnSpc>
+                <ns1:spcPts val="1690"/>
+              </ns1:lnSpc>
+              <ns1:buNone/>
+            </ns1:pPr>
+            <ns1:r>
+              <ns1:rPr lang="en-US" sz="1400" dirty="0">
+                <ns1:solidFill>
+                  <ns1:srgbClr val="59636E"/>
+                </ns1:solidFill>
+                <ns1:latin typeface="Arial" pitchFamily="34" charset="0"/>
+                <ns1:ea typeface="Arial" pitchFamily="34" charset="-122"/>
+                <ns1:cs typeface="Arial" pitchFamily="34" charset="-120"/>
+              </ns1:rPr>
+              <ns1:t/>
+            </ns1:r>
+            <ns1:endParaRPr lang="en-US" sz="1400" dirty="0"/>
+          </ns1:p>
+        </ns0:txBody>
+      </ns0:sp>
+    </ns0:spTree>
+  </ns0:cSld>
+  <ns0:clrMapOvr>
+    <ns1:masterClrMapping/>
+  </ns0:clrMapOvr>
+</ns0:sld>
 </file>
 
 <file path=ppt/slides/slide12.xml><?xml version="1.0" encoding="utf-8"?>
@@ -8331,7 +8331,7 @@
       </p:sp>
       <p:pic>
         <p:nvPicPr>
-          <p:cNvPr id="10" name="Image 2" descr="Skills and agents customize the Copilot app's work; MCP servers and plugins extend its capabilities">    </p:cNvPr>
+          <p:cNvPr id="10" name="Image 2" descr="Skills and agents customize the Copilot app's work; MCP servers and plugins extend its capabilities"/>
           <p:cNvPicPr>
             <a:picLocks noChangeAspect="1"/>
           </p:cNvPicPr>
@@ -10169,7 +10169,7 @@
       </p:sp>
       <p:pic>
         <p:nvPicPr>
-          <p:cNvPr id="10" name="Image 2" descr="A toolbox where only Repo, Docs, and Skill are highlighted: give the agent only what it needs for less noise">    </p:cNvPr>
+          <p:cNvPr id="10" name="Image 2" descr="A toolbox where only Repo, Docs, and Skill are highlighted: give the agent only what it needs for less noise"/>
           <p:cNvPicPr>
             <a:picLocks noChangeAspect="1"/>
           </p:cNvPicPr>
@@ -11372,7 +11372,7 @@
       </p:sp>
       <p:pic>
         <p:nvPicPr>
-          <p:cNvPr id="10" name="Image 2" descr="Browser extensions connect a browser to services, just as MCP servers connect the Copilot app to GitHub, files, and Context7 documentation">    </p:cNvPr>
+          <p:cNvPr id="10" name="Image 2" descr="Browser extensions connect a browser to services, just as MCP servers connect the Copilot app to GitHub, files, and Context7 documentation"/>
           <p:cNvPicPr>
             <a:picLocks noChangeAspect="1"/>
           </p:cNvPicPr>
@@ -11832,1016 +11832,1016 @@
 </file>
 
 <file path=ppt/slides/slide8.xml><?xml version="1.0" encoding="utf-8"?>
-<p:sld xmlns:a="http://schemas.openxmlformats.org/drawingml/2006/main" xmlns:r="http://schemas.openxmlformats.org/officeDocument/2006/relationships" xmlns:p="http://schemas.openxmlformats.org/presentationml/2006/main">
-  <p:cSld name="Slide 8">
-    <p:bg>
-      <p:bgPr>
-        <a:solidFill>
-          <a:srgbClr val="FFFFFF"/>
-        </a:solidFill>
-      </p:bgPr>
-    </p:bg>
-    <p:spTree>
-      <p:nvGrpSpPr>
-        <p:cNvPr id="1" name=""/>
-        <p:cNvGrpSpPr/>
-        <p:nvPr/>
-      </p:nvGrpSpPr>
-      <p:grpSpPr>
-        <a:xfrm>
-          <a:off x="0" y="0"/>
-          <a:ext cx="0" cy="0"/>
-          <a:chOff x="0" y="0"/>
-          <a:chExt cx="0" cy="0"/>
-        </a:xfrm>
-      </p:grpSpPr>
-      <p:pic>
-        <p:nvPicPr>
-          <p:cNvPr id="2" name="Image 0" descr="">
-            <a:extLst>
-              <a:ext uri="{C183D7F6-B498-43B3-948B-1728B52AA6E4}">
-                <adec:decorative xmlns:adec="http://schemas.microsoft.com/office/drawing/2017/decorative" val="1"/>
-              </a:ext>
-            </a:extLst>
-          </p:cNvPr>
-          <p:cNvPicPr>
-            <a:picLocks noChangeAspect="1"/>
-          </p:cNvPicPr>
-          <p:nvPr/>
-        </p:nvPicPr>
-        <p:blipFill>
-          <a:blip r:embed="rId1"/>
-          <a:stretch>
-            <a:fillRect/>
-          </a:stretch>
-        </p:blipFill>
-        <p:spPr>
-          <a:xfrm>
-            <a:off x="6349901" y="0"/>
-            <a:ext cx="2793950" cy="1308050"/>
-          </a:xfrm>
-          <a:prstGeom prst="rect">
-            <a:avLst/>
-          </a:prstGeom>
-        </p:spPr>
-      </p:pic>
-      <p:sp>
-        <p:nvSpPr>
-          <p:cNvPr id="3" name="Text 0"/>
-          <p:cNvSpPr/>
-          <p:nvPr/>
-        </p:nvSpPr>
-        <p:spPr>
-          <a:xfrm>
-            <a:off x="7340501" y="177701"/>
-            <a:ext cx="1168301" cy="279350"/>
-          </a:xfrm>
-          <a:prstGeom prst="roundRect">
-            <a:avLst>
-              <a:gd name="adj" fmla="val 22731"/>
-            </a:avLst>
-          </a:prstGeom>
-          <a:solidFill>
-            <a:srgbClr val="1A7F37"/>
-          </a:solidFill>
-          <a:ln/>
-        </p:spPr>
-        <p:txBody>
-          <a:bodyPr wrap="square" rtlCol="0" anchor="ctr"/>
-          <a:lstStyle/>
-          <a:p>
-            <a:pPr indent="0" marL="0">
-              <a:buNone/>
-            </a:pPr>
-            <a:endParaRPr lang="en-US" dirty="0"/>
-          </a:p>
-        </p:txBody>
-      </p:sp>
-      <p:sp>
-        <p:nvSpPr>
-          <p:cNvPr id="4" name="Text 1"/>
-          <p:cNvSpPr/>
-          <p:nvPr/>
-        </p:nvSpPr>
-        <p:spPr>
-          <a:xfrm>
-            <a:off x="7461041" y="231577"/>
-            <a:ext cx="927071" cy="171450"/>
-          </a:xfrm>
-          <a:prstGeom prst="rect">
-            <a:avLst/>
-          </a:prstGeom>
-          <a:noFill/>
-          <a:ln/>
-        </p:spPr>
-        <p:txBody>
-          <a:bodyPr wrap="square" lIns="0" tIns="0" rIns="0" bIns="0" rtlCol="0" anchor="t"/>
-          <a:lstStyle/>
-          <a:p>
-            <a:pPr algn="ctr" indent="0" marL="0">
-              <a:buNone/>
-            </a:pPr>
-            <a:r>
-              <a:rPr lang="en-US" sz="1150" b="1" dirty="0">
-                <a:solidFill>
-                  <a:srgbClr val="FFFFFF"/>
-                </a:solidFill>
-                <a:latin typeface="Arial" pitchFamily="34" charset="0"/>
-                <a:ea typeface="Arial" pitchFamily="34" charset="-122"/>
-                <a:cs typeface="Arial" pitchFamily="34" charset="-120"/>
-              </a:rPr>
-              <a:t>CHAPTER 05</a:t>
-            </a:r>
-            <a:endParaRPr lang="en-US" sz="1150" dirty="0"/>
-          </a:p>
-        </p:txBody>
-      </p:sp>
-      <p:pic>
-        <p:nvPicPr>
-          <p:cNvPr id="5" name="Image 1" descr="Open this chapter on GitHub">
-            <a:hlinkClick r:id="rId3" tooltip="https://github.com/github/copilot-app-for-beginners/tree/main/05-mcp-plugins"/>
-          </p:cNvPr>
-          <p:cNvPicPr>
-            <a:picLocks noChangeAspect="1"/>
-          </p:cNvPicPr>
-          <p:nvPr/>
-        </p:nvPicPr>
-        <p:blipFill>
-          <a:blip r:embed="rId2"/>
-          <a:stretch>
-            <a:fillRect/>
-          </a:stretch>
-        </p:blipFill>
-        <p:spPr>
-          <a:xfrm>
-            <a:off x="8610600" y="165050"/>
-            <a:ext cx="304800" cy="304800"/>
-          </a:xfrm>
-          <a:prstGeom prst="rect">
-            <a:avLst/>
-          </a:prstGeom>
-        </p:spPr>
-      </p:pic>
-      <p:sp>
-        <p:nvSpPr>
-          <p:cNvPr id="6" name="Text 2"/>
-          <p:cNvSpPr/>
-          <p:nvPr/>
-        </p:nvSpPr>
-        <p:spPr>
-          <a:xfrm>
-            <a:off x="507950" y="381000"/>
-            <a:ext cx="8161020" cy="190500"/>
-          </a:xfrm>
-          <a:prstGeom prst="rect">
-            <a:avLst/>
-          </a:prstGeom>
-          <a:noFill/>
-          <a:ln/>
-        </p:spPr>
-        <p:txBody>
-          <a:bodyPr wrap="square" lIns="0" tIns="0" rIns="0" bIns="0" rtlCol="0" anchor="t"/>
-          <a:lstStyle/>
-          <a:p>
-            <a:pPr algn="l" indent="0" marL="0">
-              <a:buNone/>
-            </a:pPr>
-            <a:r>
-              <a:rPr lang="en-US" sz="1250" b="1" dirty="0">
-                <a:solidFill>
-                  <a:srgbClr val="0969DA"/>
-                </a:solidFill>
-                <a:latin typeface="Arial" pitchFamily="34" charset="0"/>
-                <a:ea typeface="Arial" pitchFamily="34" charset="-122"/>
-                <a:cs typeface="Arial" pitchFamily="34" charset="-120"/>
-              </a:rPr>
-              <a:t>EXERCISE</a:t>
-            </a:r>
-            <a:endParaRPr lang="en-US" sz="1250" dirty="0"/>
-          </a:p>
-        </p:txBody>
-      </p:sp>
-      <p:sp>
-        <p:nvSpPr>
-          <p:cNvPr id="7" name="Text 3"/>
-          <p:cNvSpPr/>
-          <p:nvPr/>
-        </p:nvSpPr>
-        <p:spPr>
-          <a:xfrm>
-            <a:off x="507950" y="622250"/>
-            <a:ext cx="8161020" cy="419100"/>
-          </a:xfrm>
-          <a:prstGeom prst="rect">
-            <a:avLst/>
-          </a:prstGeom>
-          <a:noFill/>
-          <a:ln/>
-        </p:spPr>
-        <p:txBody>
-          <a:bodyPr wrap="square" lIns="0" tIns="0" rIns="0" bIns="0" rtlCol="0" anchor="t"/>
-          <a:lstStyle/>
-          <a:p>
-            <a:pPr algn="l" indent="0" marL="0">
-              <a:lnSpc>
-                <a:spcPts val="3300"/>
-              </a:lnSpc>
-              <a:spcBef>
-                <a:spcPts val="400"/>
-              </a:spcBef>
-              <a:buNone/>
-            </a:pPr>
-            <a:r>
-              <a:rPr lang="en-US" sz="2800" b="1" dirty="0">
-                <a:solidFill>
-                  <a:srgbClr val="1F2328"/>
-                </a:solidFill>
-                <a:latin typeface="Arial" pitchFamily="34" charset="0"/>
-                <a:ea typeface="Arial" pitchFamily="34" charset="-122"/>
-                <a:cs typeface="Arial" pitchFamily="34" charset="-120"/>
-              </a:rPr>
-              <a:t>Connect Context7</a:t>
-            </a:r>
-            <a:endParaRPr lang="en-US" sz="2800" dirty="0"/>
-          </a:p>
-        </p:txBody>
-      </p:sp>
-      <p:sp>
-        <p:nvSpPr>
-          <p:cNvPr id="8" name="Text 4"/>
-          <p:cNvSpPr/>
-          <p:nvPr/>
-        </p:nvSpPr>
-        <p:spPr>
-          <a:xfrm>
-            <a:off x="507950" y="1104751"/>
-            <a:ext cx="8161020" cy="254050"/>
-          </a:xfrm>
-          <a:prstGeom prst="rect">
-            <a:avLst/>
-          </a:prstGeom>
-          <a:noFill/>
-          <a:ln/>
-        </p:spPr>
-        <p:txBody>
-          <a:bodyPr wrap="square" lIns="0" tIns="0" rIns="0" bIns="0" rtlCol="0" anchor="t"/>
-          <a:lstStyle/>
-          <a:p>
-            <a:pPr algn="l" indent="0" marL="0">
-              <a:lnSpc>
-                <a:spcPts val="2000"/>
-              </a:lnSpc>
-              <a:spcBef>
-                <a:spcPts val="500"/>
-              </a:spcBef>
-              <a:buNone/>
-            </a:pPr>
-            <a:r>
-              <a:rPr lang="en-US" sz="1650" dirty="0">
-                <a:solidFill>
-                  <a:srgbClr val="59636E"/>
-                </a:solidFill>
-                <a:latin typeface="Arial" pitchFamily="34" charset="0"/>
-                <a:ea typeface="Arial" pitchFamily="34" charset="-122"/>
-                <a:cs typeface="Arial" pitchFamily="34" charset="-120"/>
-              </a:rPr>
-              <a:t>Skip this if it is already connected.</a:t>
-            </a:r>
-            <a:endParaRPr lang="en-US" sz="1650" dirty="0"/>
-          </a:p>
-        </p:txBody>
-      </p:sp>
-      <p:sp>
-        <p:nvSpPr>
-          <p:cNvPr id="9" name="Text 5"/>
-          <p:cNvSpPr/>
-          <p:nvPr/>
-        </p:nvSpPr>
-        <p:spPr>
-          <a:xfrm>
-            <a:off x="612725" y="1564928"/>
-            <a:ext cx="7918400" cy="1771650"/>
-          </a:xfrm>
-          <a:prstGeom prst="roundRect">
-            <a:avLst>
-              <a:gd name="adj" fmla="val 4301"/>
-            </a:avLst>
-          </a:prstGeom>
-          <a:solidFill>
-            <a:srgbClr val="FFFFFF"/>
-          </a:solidFill>
-          <a:ln w="9525">
-            <a:solidFill>
-              <a:srgbClr val="D1D9E0"/>
-            </a:solidFill>
-          </a:ln>
-          <a:effectLst>
-            <a:outerShdw sx="100000" sy="100000" kx="0" ky="0" algn="bl" rotWithShape="0" blurRad="38100" dist="9525" dir="5400000">
-              <a:srgbClr val="1f2328">
-                <a:alpha val="12000"/>
-              </a:srgbClr>
-            </a:outerShdw>
-          </a:effectLst>
-        </p:spPr>
-        <p:txBody>
-          <a:bodyPr wrap="square" rtlCol="0" anchor="ctr"/>
-          <a:lstStyle/>
-          <a:p>
-            <a:pPr indent="0" marL="0">
-              <a:buNone/>
-            </a:pPr>
-            <a:endParaRPr lang="en-US" dirty="0"/>
-          </a:p>
-        </p:txBody>
-      </p:sp>
-      <p:pic>
-        <p:nvPicPr>
-          <p:cNvPr id="10" name="Image 2" descr="Context7 MCP server dialog with server name context7, HTTP selected, and URL https://mcp.context7.com/mcp">    </p:cNvPr>
-          <p:cNvPicPr>
-            <a:picLocks noChangeAspect="1"/>
-          </p:cNvPicPr>
-          <p:nvPr/>
-        </p:nvPicPr>
-        <p:blipFill>
-          <a:blip r:embed="rId4"/>
-          <a:stretch>
-            <a:fillRect/>
-          </a:stretch>
-        </p:blipFill>
-        <p:spPr>
-          <a:xfrm>
-            <a:off x="660350" y="1612553"/>
-            <a:ext cx="7823150" cy="1676400"/>
-          </a:xfrm>
-          <a:prstGeom prst="rect">
-            <a:avLst/>
-          </a:prstGeom>
-        </p:spPr>
-      </p:pic>
-      <p:sp>
-        <p:nvSpPr>
-          <p:cNvPr id="11" name="Text 6"/>
-          <p:cNvSpPr/>
-          <p:nvPr/>
-        </p:nvSpPr>
-        <p:spPr>
-          <a:xfrm>
-            <a:off x="507950" y="3542854"/>
-            <a:ext cx="2607618" cy="1118146"/>
-          </a:xfrm>
-          <a:prstGeom prst="roundRect">
-            <a:avLst>
-              <a:gd name="adj" fmla="val 11358"/>
-            </a:avLst>
-          </a:prstGeom>
-          <a:solidFill>
-            <a:srgbClr val="FFFFFF"/>
-          </a:solidFill>
-          <a:ln w="9525">
-            <a:solidFill>
-              <a:srgbClr val="9CD7FF"/>
-            </a:solidFill>
-          </a:ln>
-        </p:spPr>
-        <p:txBody>
-          <a:bodyPr wrap="square" rtlCol="0" anchor="ctr"/>
-          <a:lstStyle/>
-          <a:p>
-            <a:pPr indent="0" marL="0">
-              <a:buNone/>
-            </a:pPr>
-            <a:endParaRPr lang="en-US" dirty="0"/>
-          </a:p>
-        </p:txBody>
-      </p:sp>
-      <p:sp>
-        <p:nvSpPr>
-          <p:cNvPr id="12" name="Text 7"/>
-          <p:cNvSpPr/>
-          <p:nvPr/>
-        </p:nvSpPr>
-        <p:spPr>
-          <a:xfrm>
-            <a:off x="669875" y="3704779"/>
-            <a:ext cx="279350" cy="279350"/>
-          </a:xfrm>
-          <a:prstGeom prst="roundRect">
-            <a:avLst>
-              <a:gd name="adj" fmla="val 327331"/>
-            </a:avLst>
-          </a:prstGeom>
-          <a:solidFill>
-            <a:srgbClr val="0969DA"/>
-          </a:solidFill>
-          <a:ln/>
-        </p:spPr>
-        <p:txBody>
-          <a:bodyPr wrap="square" rtlCol="0" anchor="ctr"/>
-          <a:lstStyle/>
-          <a:p>
-            <a:pPr indent="0" marL="0">
-              <a:buNone/>
-            </a:pPr>
-            <a:endParaRPr lang="en-US" dirty="0"/>
-          </a:p>
-        </p:txBody>
-      </p:sp>
-      <p:sp>
-        <p:nvSpPr>
-          <p:cNvPr id="13" name="Text 8"/>
-          <p:cNvSpPr/>
-          <p:nvPr/>
-        </p:nvSpPr>
-        <p:spPr>
-          <a:xfrm>
-            <a:off x="764540" y="3749129"/>
-            <a:ext cx="90020" cy="190500"/>
-          </a:xfrm>
-          <a:prstGeom prst="rect">
-            <a:avLst/>
-          </a:prstGeom>
-          <a:noFill/>
-          <a:ln/>
-        </p:spPr>
-        <p:txBody>
-          <a:bodyPr wrap="square" lIns="0" tIns="0" rIns="0" bIns="0" rtlCol="0" anchor="t"/>
-          <a:lstStyle/>
-          <a:p>
-            <a:pPr algn="ctr" indent="0" marL="0">
-              <a:buNone/>
-            </a:pPr>
-            <a:r>
-              <a:rPr lang="en-US" sz="1250" b="1" dirty="0">
-                <a:solidFill>
-                  <a:srgbClr val="FFFFFF"/>
-                </a:solidFill>
-                <a:latin typeface="Arial" pitchFamily="34" charset="0"/>
-                <a:ea typeface="Arial" pitchFamily="34" charset="-122"/>
-                <a:cs typeface="Arial" pitchFamily="34" charset="-120"/>
-              </a:rPr>
-              <a:t>1</a:t>
-            </a:r>
-            <a:endParaRPr lang="en-US" sz="1250" dirty="0"/>
-          </a:p>
-        </p:txBody>
-      </p:sp>
-      <p:sp>
-        <p:nvSpPr>
-          <p:cNvPr id="14" name="Text 9"/>
-          <p:cNvSpPr/>
-          <p:nvPr/>
-        </p:nvSpPr>
-        <p:spPr>
-          <a:xfrm>
-            <a:off x="1063526" y="3730079"/>
-            <a:ext cx="1799341" cy="228600"/>
-          </a:xfrm>
-          <a:prstGeom prst="rect">
-            <a:avLst/>
-          </a:prstGeom>
-          <a:noFill/>
-          <a:ln/>
-        </p:spPr>
-        <p:txBody>
-          <a:bodyPr wrap="square" lIns="0" tIns="0" rIns="0" bIns="0" rtlCol="0" anchor="t"/>
-          <a:lstStyle/>
-          <a:p>
-            <a:pPr algn="l" indent="0" marL="0">
-              <a:lnSpc>
-                <a:spcPts val="1800"/>
-              </a:lnSpc>
-              <a:buNone/>
-            </a:pPr>
-            <a:r>
-              <a:rPr lang="en-US" sz="1650" b="1" dirty="0">
-                <a:solidFill>
-                  <a:srgbClr val="1F2328"/>
-                </a:solidFill>
-                <a:latin typeface="Arial" pitchFamily="34" charset="0"/>
-                <a:ea typeface="Arial" pitchFamily="34" charset="-122"/>
-                <a:cs typeface="Arial" pitchFamily="34" charset="-120"/>
-              </a:rPr>
-              <a:t>Customize &gt; MCP</a:t>
-            </a:r>
-            <a:endParaRPr lang="en-US" sz="1650" dirty="0"/>
-          </a:p>
-        </p:txBody>
-      </p:sp>
-      <p:sp>
-        <p:nvSpPr>
-          <p:cNvPr id="15" name="Text 10"/>
-          <p:cNvSpPr/>
-          <p:nvPr/>
-        </p:nvSpPr>
-        <p:spPr>
-          <a:xfrm>
-            <a:off x="669875" y="4060329"/>
-            <a:ext cx="2329443" cy="438745"/>
-          </a:xfrm>
-          <a:prstGeom prst="rect">
-            <a:avLst/>
-          </a:prstGeom>
-          <a:noFill/>
-          <a:ln/>
-        </p:spPr>
-        <p:txBody>
-          <a:bodyPr wrap="square" lIns="0" tIns="0" rIns="0" bIns="0" rtlCol="0" anchor="t"/>
-          <a:lstStyle/>
-          <a:p>
-            <a:pPr algn="l" indent="0" marL="0">
-              <a:lnSpc>
-                <a:spcPts val="1690"/>
-              </a:lnSpc>
-              <a:buNone/>
-            </a:pPr>
-            <a:r>
-              <a:rPr lang="en-US" sz="1400" dirty="0">
-                <a:solidFill>
-                  <a:srgbClr val="59636E"/>
-                </a:solidFill>
-                <a:latin typeface="Arial" pitchFamily="34" charset="0"/>
-                <a:ea typeface="Arial" pitchFamily="34" charset="-122"/>
-                <a:cs typeface="Arial" pitchFamily="34" charset="-120"/>
-              </a:rPr>
-              <a:t>Search </a:t>
-            </a:r>
-            <a:pPr algn="l" indent="0" marL="0">
-              <a:lnSpc>
-                <a:spcPts val="1690"/>
-              </a:lnSpc>
-              <a:buNone/>
-            </a:pPr>
-            <a:r>
-              <a:rPr lang="en-US" sz="1400" b="1" dirty="0">
-                <a:solidFill>
-                  <a:srgbClr val="0550AE"/>
-                </a:solidFill>
-                <a:latin typeface="Courier New" pitchFamily="34" charset="0"/>
-                <a:ea typeface="Courier New" pitchFamily="34" charset="-122"/>
-                <a:cs typeface="Courier New" pitchFamily="34" charset="-120"/>
-              </a:rPr>
-              <a:t>context7</a:t>
-            </a:r>
-            <a:pPr algn="l" indent="0" marL="0">
-              <a:lnSpc>
-                <a:spcPts val="1690"/>
-              </a:lnSpc>
-              <a:buNone/>
-            </a:pPr>
-            <a:r>
-              <a:rPr lang="en-US" sz="1400" dirty="0">
-                <a:solidFill>
-                  <a:srgbClr val="59636E"/>
-                </a:solidFill>
-                <a:latin typeface="Arial" pitchFamily="34" charset="0"/>
-                <a:ea typeface="Arial" pitchFamily="34" charset="-122"/>
-                <a:cs typeface="Arial" pitchFamily="34" charset="-120"/>
-              </a:rPr>
-              <a:t>, then </a:t>
-            </a:r>
-            <a:pPr algn="l" indent="0" marL="0">
-              <a:lnSpc>
-                <a:spcPts val="1690"/>
-              </a:lnSpc>
-              <a:buNone/>
-            </a:pPr>
-            <a:r>
-              <a:rPr lang="en-US" sz="1400" b="1" dirty="0">
-                <a:solidFill>
-                  <a:srgbClr val="59636E"/>
-                </a:solidFill>
-                <a:latin typeface="Arial" pitchFamily="34" charset="0"/>
-                <a:ea typeface="Arial" pitchFamily="34" charset="-122"/>
-                <a:cs typeface="Arial" pitchFamily="34" charset="-120"/>
-              </a:rPr>
-              <a:t>Add server</a:t>
-            </a:r>
-            <a:pPr algn="l" indent="0" marL="0">
-              <a:lnSpc>
-                <a:spcPts val="1690"/>
-              </a:lnSpc>
-              <a:buNone/>
-            </a:pPr>
-            <a:r>
-              <a:rPr lang="en-US" sz="1400" dirty="0">
-                <a:solidFill>
-                  <a:srgbClr val="59636E"/>
-                </a:solidFill>
-                <a:latin typeface="Arial" pitchFamily="34" charset="0"/>
-                <a:ea typeface="Arial" pitchFamily="34" charset="-122"/>
-                <a:cs typeface="Arial" pitchFamily="34" charset="-120"/>
-              </a:rPr>
-              <a:t>.</a:t>
-            </a:r>
-            <a:endParaRPr lang="en-US" sz="1400" dirty="0"/>
-          </a:p>
-        </p:txBody>
-      </p:sp>
-      <p:sp>
-        <p:nvSpPr>
-          <p:cNvPr id="16" name="Text 11"/>
-          <p:cNvSpPr/>
-          <p:nvPr/>
-        </p:nvSpPr>
-        <p:spPr>
-          <a:xfrm>
-            <a:off x="3267968" y="3542854"/>
-            <a:ext cx="2607766" cy="1118146"/>
-          </a:xfrm>
-          <a:prstGeom prst="roundRect">
-            <a:avLst>
-              <a:gd name="adj" fmla="val 11358"/>
-            </a:avLst>
-          </a:prstGeom>
-          <a:solidFill>
-            <a:srgbClr val="FFFFFF"/>
-          </a:solidFill>
-          <a:ln w="9525">
-            <a:solidFill>
-              <a:srgbClr val="9CD7FF"/>
-            </a:solidFill>
-          </a:ln>
-        </p:spPr>
-        <p:txBody>
-          <a:bodyPr wrap="square" rtlCol="0" anchor="ctr"/>
-          <a:lstStyle/>
-          <a:p>
-            <a:pPr indent="0" marL="0">
-              <a:buNone/>
-            </a:pPr>
-            <a:endParaRPr lang="en-US" dirty="0"/>
-          </a:p>
-        </p:txBody>
-      </p:sp>
-      <p:sp>
-        <p:nvSpPr>
-          <p:cNvPr id="17" name="Text 12"/>
-          <p:cNvSpPr/>
-          <p:nvPr/>
-        </p:nvSpPr>
-        <p:spPr>
-          <a:xfrm>
-            <a:off x="3429893" y="3704779"/>
-            <a:ext cx="279350" cy="279350"/>
-          </a:xfrm>
-          <a:prstGeom prst="roundRect">
-            <a:avLst>
-              <a:gd name="adj" fmla="val 327331"/>
-            </a:avLst>
-          </a:prstGeom>
-          <a:solidFill>
-            <a:srgbClr val="0969DA"/>
-          </a:solidFill>
-          <a:ln/>
-        </p:spPr>
-        <p:txBody>
-          <a:bodyPr wrap="square" rtlCol="0" anchor="ctr"/>
-          <a:lstStyle/>
-          <a:p>
-            <a:pPr indent="0" marL="0">
-              <a:buNone/>
-            </a:pPr>
-            <a:endParaRPr lang="en-US" dirty="0"/>
-          </a:p>
-        </p:txBody>
-      </p:sp>
-      <p:sp>
-        <p:nvSpPr>
-          <p:cNvPr id="18" name="Text 13"/>
-          <p:cNvSpPr/>
-          <p:nvPr/>
-        </p:nvSpPr>
-        <p:spPr>
-          <a:xfrm>
-            <a:off x="3524558" y="3749129"/>
-            <a:ext cx="90020" cy="190500"/>
-          </a:xfrm>
-          <a:prstGeom prst="rect">
-            <a:avLst/>
-          </a:prstGeom>
-          <a:noFill/>
-          <a:ln/>
-        </p:spPr>
-        <p:txBody>
-          <a:bodyPr wrap="square" lIns="0" tIns="0" rIns="0" bIns="0" rtlCol="0" anchor="t"/>
-          <a:lstStyle/>
-          <a:p>
-            <a:pPr algn="ctr" indent="0" marL="0">
-              <a:buNone/>
-            </a:pPr>
-            <a:r>
-              <a:rPr lang="en-US" sz="1250" b="1" dirty="0">
-                <a:solidFill>
-                  <a:srgbClr val="FFFFFF"/>
-                </a:solidFill>
-                <a:latin typeface="Arial" pitchFamily="34" charset="0"/>
-                <a:ea typeface="Arial" pitchFamily="34" charset="-122"/>
-                <a:cs typeface="Arial" pitchFamily="34" charset="-120"/>
-              </a:rPr>
-              <a:t>2</a:t>
-            </a:r>
-            <a:endParaRPr lang="en-US" sz="1250" dirty="0"/>
-          </a:p>
-        </p:txBody>
-      </p:sp>
-      <p:sp>
-        <p:nvSpPr>
-          <p:cNvPr id="19" name="Text 14"/>
-          <p:cNvSpPr/>
-          <p:nvPr/>
-        </p:nvSpPr>
-        <p:spPr>
-          <a:xfrm>
-            <a:off x="3823543" y="3730079"/>
-            <a:ext cx="1841543" cy="228600"/>
-          </a:xfrm>
-          <a:prstGeom prst="rect">
-            <a:avLst/>
-          </a:prstGeom>
-          <a:noFill/>
-          <a:ln/>
-        </p:spPr>
-        <p:txBody>
-          <a:bodyPr wrap="square" lIns="0" tIns="0" rIns="0" bIns="0" rtlCol="0" anchor="t"/>
-          <a:lstStyle/>
-          <a:p>
-            <a:pPr algn="l" indent="0" marL="0">
-              <a:lnSpc>
-                <a:spcPts val="1800"/>
-              </a:lnSpc>
-              <a:buNone/>
-            </a:pPr>
-            <a:r>
-              <a:rPr lang="en-US" sz="1650" b="1" dirty="0">
-                <a:solidFill>
-                  <a:srgbClr val="1F2328"/>
-                </a:solidFill>
-                <a:latin typeface="Arial" pitchFamily="34" charset="0"/>
-                <a:ea typeface="Arial" pitchFamily="34" charset="-122"/>
-                <a:cs typeface="Arial" pitchFamily="34" charset="-120"/>
-              </a:rPr>
-              <a:t>Review the values</a:t>
-            </a:r>
-            <a:endParaRPr lang="en-US" sz="1650" dirty="0"/>
-          </a:p>
-        </p:txBody>
-      </p:sp>
-      <p:sp>
-        <p:nvSpPr>
-          <p:cNvPr id="20" name="Text 15"/>
-          <p:cNvSpPr/>
-          <p:nvPr/>
-        </p:nvSpPr>
-        <p:spPr>
-          <a:xfrm>
-            <a:off x="3429893" y="4060329"/>
-            <a:ext cx="2329595" cy="438745"/>
-          </a:xfrm>
-          <a:prstGeom prst="rect">
-            <a:avLst/>
-          </a:prstGeom>
-          <a:noFill/>
-          <a:ln/>
-        </p:spPr>
-        <p:txBody>
-          <a:bodyPr wrap="square" lIns="0" tIns="0" rIns="0" bIns="0" rtlCol="0" anchor="t"/>
-          <a:lstStyle/>
-          <a:p>
-            <a:pPr algn="l" indent="0" marL="0">
-              <a:lnSpc>
-                <a:spcPts val="1690"/>
-              </a:lnSpc>
-              <a:buNone/>
-            </a:pPr>
-            <a:r>
-              <a:rPr lang="en-US" sz="1400" b="1" dirty="0">
-                <a:solidFill>
-                  <a:srgbClr val="0550AE"/>
-                </a:solidFill>
-                <a:latin typeface="Courier New" pitchFamily="34" charset="0"/>
-                <a:ea typeface="Courier New" pitchFamily="34" charset="-122"/>
-                <a:cs typeface="Courier New" pitchFamily="34" charset="-120"/>
-              </a:rPr>
-              <a:t>HTTP</a:t>
-            </a:r>
-            <a:pPr algn="l" indent="0" marL="0">
-              <a:lnSpc>
-                <a:spcPts val="1690"/>
-              </a:lnSpc>
-              <a:buNone/>
-            </a:pPr>
-            <a:r>
-              <a:rPr lang="en-US" sz="1400" dirty="0">
-                <a:solidFill>
-                  <a:srgbClr val="59636E"/>
-                </a:solidFill>
-                <a:latin typeface="Arial" pitchFamily="34" charset="0"/>
-                <a:ea typeface="Arial" pitchFamily="34" charset="-122"/>
-                <a:cs typeface="Arial" pitchFamily="34" charset="-120"/>
-              </a:rPr>
-              <a:t> means a hosted server.</a:t>
-            </a:r>
-            <a:endParaRPr lang="en-US" sz="1400" dirty="0"/>
-          </a:p>
-        </p:txBody>
-      </p:sp>
-      <p:sp>
-        <p:nvSpPr>
-          <p:cNvPr id="21" name="Text 16"/>
-          <p:cNvSpPr/>
-          <p:nvPr/>
-        </p:nvSpPr>
-        <p:spPr>
-          <a:xfrm>
-            <a:off x="6028134" y="3542854"/>
-            <a:ext cx="2607766" cy="1118146"/>
-          </a:xfrm>
-          <a:prstGeom prst="roundRect">
-            <a:avLst>
-              <a:gd name="adj" fmla="val 11358"/>
-            </a:avLst>
-          </a:prstGeom>
-          <a:solidFill>
-            <a:srgbClr val="FFFFFF"/>
-          </a:solidFill>
-          <a:ln w="9525">
-            <a:solidFill>
-              <a:srgbClr val="9CD7FF"/>
-            </a:solidFill>
-          </a:ln>
-        </p:spPr>
-        <p:txBody>
-          <a:bodyPr wrap="square" rtlCol="0" anchor="ctr"/>
-          <a:lstStyle/>
-          <a:p>
-            <a:pPr indent="0" marL="0">
-              <a:buNone/>
-            </a:pPr>
-            <a:endParaRPr lang="en-US" dirty="0"/>
-          </a:p>
-        </p:txBody>
-      </p:sp>
-      <p:sp>
-        <p:nvSpPr>
-          <p:cNvPr id="22" name="Text 17"/>
-          <p:cNvSpPr/>
-          <p:nvPr/>
-        </p:nvSpPr>
-        <p:spPr>
-          <a:xfrm>
-            <a:off x="6190059" y="3704779"/>
-            <a:ext cx="279350" cy="279350"/>
-          </a:xfrm>
-          <a:prstGeom prst="roundRect">
-            <a:avLst>
-              <a:gd name="adj" fmla="val 327331"/>
-            </a:avLst>
-          </a:prstGeom>
-          <a:solidFill>
-            <a:srgbClr val="0969DA"/>
-          </a:solidFill>
-          <a:ln/>
-        </p:spPr>
-        <p:txBody>
-          <a:bodyPr wrap="square" rtlCol="0" anchor="ctr"/>
-          <a:lstStyle/>
-          <a:p>
-            <a:pPr indent="0" marL="0">
-              <a:buNone/>
-            </a:pPr>
-            <a:endParaRPr lang="en-US" dirty="0"/>
-          </a:p>
-        </p:txBody>
-      </p:sp>
-      <p:sp>
-        <p:nvSpPr>
-          <p:cNvPr id="23" name="Text 18"/>
-          <p:cNvSpPr/>
-          <p:nvPr/>
-        </p:nvSpPr>
-        <p:spPr>
-          <a:xfrm>
-            <a:off x="6284724" y="3749129"/>
-            <a:ext cx="90020" cy="190500"/>
-          </a:xfrm>
-          <a:prstGeom prst="rect">
-            <a:avLst/>
-          </a:prstGeom>
-          <a:noFill/>
-          <a:ln/>
-        </p:spPr>
-        <p:txBody>
-          <a:bodyPr wrap="square" lIns="0" tIns="0" rIns="0" bIns="0" rtlCol="0" anchor="t"/>
-          <a:lstStyle/>
-          <a:p>
-            <a:pPr algn="ctr" indent="0" marL="0">
-              <a:buNone/>
-            </a:pPr>
-            <a:r>
-              <a:rPr lang="en-US" sz="1250" b="1" dirty="0">
-                <a:solidFill>
-                  <a:srgbClr val="FFFFFF"/>
-                </a:solidFill>
-                <a:latin typeface="Arial" pitchFamily="34" charset="0"/>
-                <a:ea typeface="Arial" pitchFamily="34" charset="-122"/>
-                <a:cs typeface="Arial" pitchFamily="34" charset="-120"/>
-              </a:rPr>
-              <a:t>3</a:t>
-            </a:r>
-            <a:endParaRPr lang="en-US" sz="1250" dirty="0"/>
-          </a:p>
-        </p:txBody>
-      </p:sp>
-      <p:sp>
-        <p:nvSpPr>
-          <p:cNvPr id="24" name="Text 19"/>
-          <p:cNvSpPr/>
-          <p:nvPr/>
-        </p:nvSpPr>
-        <p:spPr>
-          <a:xfrm>
-            <a:off x="6583710" y="3730079"/>
-            <a:ext cx="1009349" cy="228600"/>
-          </a:xfrm>
-          <a:prstGeom prst="rect">
-            <a:avLst/>
-          </a:prstGeom>
-          <a:noFill/>
-          <a:ln/>
-        </p:spPr>
-        <p:txBody>
-          <a:bodyPr wrap="square" lIns="0" tIns="0" rIns="0" bIns="0" rtlCol="0" anchor="t"/>
-          <a:lstStyle/>
-          <a:p>
-            <a:pPr algn="l" indent="0" marL="0">
-              <a:lnSpc>
-                <a:spcPts val="1800"/>
-              </a:lnSpc>
-              <a:buNone/>
-            </a:pPr>
-            <a:r>
-              <a:rPr lang="en-US" sz="1650" b="1" dirty="0">
-                <a:solidFill>
-                  <a:srgbClr val="1F2328"/>
-                </a:solidFill>
-                <a:latin typeface="Arial" pitchFamily="34" charset="0"/>
-                <a:ea typeface="Arial" pitchFamily="34" charset="-122"/>
-                <a:cs typeface="Arial" pitchFamily="34" charset="-120"/>
-              </a:rPr>
-              <a:t>Confirm it</a:t>
-            </a:r>
-            <a:endParaRPr lang="en-US" sz="1650" dirty="0"/>
-          </a:p>
-        </p:txBody>
-      </p:sp>
-      <p:sp>
-        <p:nvSpPr>
-          <p:cNvPr id="25" name="Text 20"/>
-          <p:cNvSpPr/>
-          <p:nvPr/>
-        </p:nvSpPr>
-        <p:spPr>
-          <a:xfrm>
-            <a:off x="6190059" y="4060329"/>
-            <a:ext cx="2329595" cy="214610"/>
-          </a:xfrm>
-          <a:prstGeom prst="rect">
-            <a:avLst/>
-          </a:prstGeom>
-          <a:noFill/>
-          <a:ln/>
-        </p:spPr>
-        <p:txBody>
-          <a:bodyPr wrap="square" lIns="0" tIns="0" rIns="0" bIns="0" rtlCol="0" anchor="t"/>
-          <a:lstStyle/>
-          <a:p>
-            <a:pPr algn="l" indent="0" marL="0">
-              <a:lnSpc>
-                <a:spcPts val="1690"/>
-              </a:lnSpc>
-              <a:buNone/>
-            </a:pPr>
-            <a:r>
-              <a:rPr lang="en-US" sz="1400" dirty="0">
-                <a:solidFill>
-                  <a:srgbClr val="59636E"/>
-                </a:solidFill>
-                <a:latin typeface="Arial" pitchFamily="34" charset="0"/>
-                <a:ea typeface="Arial" pitchFamily="34" charset="-122"/>
-                <a:cs typeface="Arial" pitchFamily="34" charset="-120"/>
-              </a:rPr>
-              <a:t>Connected icon, toggle on.</a:t>
-            </a:r>
-            <a:endParaRPr lang="en-US" sz="1400" dirty="0"/>
-          </a:p>
-        </p:txBody>
-      </p:sp>
-    </p:spTree>
-  </p:cSld>
-  <p:clrMapOvr>
-    <a:masterClrMapping/>
-  </p:clrMapOvr>
-</p:sld>
+<ns0:sld xmlns:ns0="http://schemas.openxmlformats.org/presentationml/2006/main" xmlns:ns1="http://schemas.openxmlformats.org/drawingml/2006/main" xmlns:ns2="http://schemas.microsoft.com/office/drawing/2017/decorative" xmlns:ns3="http://schemas.openxmlformats.org/officeDocument/2006/relationships">
+  <ns0:cSld name="Slide 8">
+    <ns0:bg>
+      <ns0:bgPr>
+        <ns1:solidFill>
+          <ns1:srgbClr val="FFFFFF"/>
+        </ns1:solidFill>
+      </ns0:bgPr>
+    </ns0:bg>
+    <ns0:spTree>
+      <ns0:nvGrpSpPr>
+        <ns0:cNvPr id="1" name=""/>
+        <ns0:cNvGrpSpPr/>
+        <ns0:nvPr/>
+      </ns0:nvGrpSpPr>
+      <ns0:grpSpPr>
+        <ns1:xfrm>
+          <ns1:off x="0" y="0"/>
+          <ns1:ext cx="0" cy="0"/>
+          <ns1:chOff x="0" y="0"/>
+          <ns1:chExt cx="0" cy="0"/>
+        </ns1:xfrm>
+      </ns0:grpSpPr>
+      <ns0:pic>
+        <ns0:nvPicPr>
+          <ns0:cNvPr id="2" name="Image 0" descr="">
+            <ns1:extLst>
+              <ns1:ext uri="{C183D7F6-B498-43B3-948B-1728B52AA6E4}">
+                <ns2:decorative val="1"/>
+              </ns1:ext>
+            </ns1:extLst>
+          </ns0:cNvPr>
+          <ns0:cNvPicPr>
+            <ns1:picLocks noChangeAspect="1"/>
+          </ns0:cNvPicPr>
+          <ns0:nvPr/>
+        </ns0:nvPicPr>
+        <ns0:blipFill>
+          <ns1:blip ns3:embed="rId1"/>
+          <ns1:stretch>
+            <ns1:fillRect/>
+          </ns1:stretch>
+        </ns0:blipFill>
+        <ns0:spPr>
+          <ns1:xfrm>
+            <ns1:off x="6349901" y="0"/>
+            <ns1:ext cx="2793950" cy="1308050"/>
+          </ns1:xfrm>
+          <ns1:prstGeom prst="rect">
+            <ns1:avLst/>
+          </ns1:prstGeom>
+        </ns0:spPr>
+      </ns0:pic>
+      <ns0:sp>
+        <ns0:nvSpPr>
+          <ns0:cNvPr id="3" name="Text 0"/>
+          <ns0:cNvSpPr/>
+          <ns0:nvPr/>
+        </ns0:nvSpPr>
+        <ns0:spPr>
+          <ns1:xfrm>
+            <ns1:off x="7340501" y="177701"/>
+            <ns1:ext cx="1168301" cy="279350"/>
+          </ns1:xfrm>
+          <ns1:prstGeom prst="roundRect">
+            <ns1:avLst>
+              <ns1:gd name="adj" fmla="val 22731"/>
+            </ns1:avLst>
+          </ns1:prstGeom>
+          <ns1:solidFill>
+            <ns1:srgbClr val="1A7F37"/>
+          </ns1:solidFill>
+          <ns1:ln/>
+        </ns0:spPr>
+        <ns0:txBody>
+          <ns1:bodyPr wrap="square" rtlCol="0" anchor="ctr"/>
+          <ns1:lstStyle/>
+          <ns1:p>
+            <ns1:pPr indent="0" marL="0">
+              <ns1:buNone/>
+            </ns1:pPr>
+            <ns1:endParaRPr lang="en-US" dirty="0"/>
+          </ns1:p>
+        </ns0:txBody>
+      </ns0:sp>
+      <ns0:sp>
+        <ns0:nvSpPr>
+          <ns0:cNvPr id="4" name="Text 1"/>
+          <ns0:cNvSpPr/>
+          <ns0:nvPr/>
+        </ns0:nvSpPr>
+        <ns0:spPr>
+          <ns1:xfrm>
+            <ns1:off x="7461041" y="231577"/>
+            <ns1:ext cx="927071" cy="171450"/>
+          </ns1:xfrm>
+          <ns1:prstGeom prst="rect">
+            <ns1:avLst/>
+          </ns1:prstGeom>
+          <ns1:noFill/>
+          <ns1:ln/>
+        </ns0:spPr>
+        <ns0:txBody>
+          <ns1:bodyPr wrap="square" lIns="0" tIns="0" rIns="0" bIns="0" rtlCol="0" anchor="t"/>
+          <ns1:lstStyle/>
+          <ns1:p>
+            <ns1:pPr algn="ctr" indent="0" marL="0">
+              <ns1:buNone/>
+            </ns1:pPr>
+            <ns1:r>
+              <ns1:rPr lang="en-US" sz="1150" b="1" dirty="0">
+                <ns1:solidFill>
+                  <ns1:srgbClr val="FFFFFF"/>
+                </ns1:solidFill>
+                <ns1:latin typeface="Arial" pitchFamily="34" charset="0"/>
+                <ns1:ea typeface="Arial" pitchFamily="34" charset="-122"/>
+                <ns1:cs typeface="Arial" pitchFamily="34" charset="-120"/>
+              </ns1:rPr>
+              <ns1:t>CHAPTER 05</ns1:t>
+            </ns1:r>
+            <ns1:endParaRPr lang="en-US" sz="1150" dirty="0"/>
+          </ns1:p>
+        </ns0:txBody>
+      </ns0:sp>
+      <ns0:pic>
+        <ns0:nvPicPr>
+          <ns0:cNvPr id="5" name="Image 1" descr="Open this chapter on GitHub">
+            <ns1:hlinkClick ns3:id="rId3" tooltip="https://github.com/github/copilot-app-for-beginners/tree/main/05-mcp-plugins"/>
+          </ns0:cNvPr>
+          <ns0:cNvPicPr>
+            <ns1:picLocks noChangeAspect="1"/>
+          </ns0:cNvPicPr>
+          <ns0:nvPr/>
+        </ns0:nvPicPr>
+        <ns0:blipFill>
+          <ns1:blip ns3:embed="rId2"/>
+          <ns1:stretch>
+            <ns1:fillRect/>
+          </ns1:stretch>
+        </ns0:blipFill>
+        <ns0:spPr>
+          <ns1:xfrm>
+            <ns1:off x="8610600" y="165050"/>
+            <ns1:ext cx="304800" cy="304800"/>
+          </ns1:xfrm>
+          <ns1:prstGeom prst="rect">
+            <ns1:avLst/>
+          </ns1:prstGeom>
+        </ns0:spPr>
+      </ns0:pic>
+      <ns0:sp>
+        <ns0:nvSpPr>
+          <ns0:cNvPr id="6" name="Text 2"/>
+          <ns0:cNvSpPr/>
+          <ns0:nvPr/>
+        </ns0:nvSpPr>
+        <ns0:spPr>
+          <ns1:xfrm>
+            <ns1:off x="507950" y="381000"/>
+            <ns1:ext cx="8161020" cy="190500"/>
+          </ns1:xfrm>
+          <ns1:prstGeom prst="rect">
+            <ns1:avLst/>
+          </ns1:prstGeom>
+          <ns1:noFill/>
+          <ns1:ln/>
+        </ns0:spPr>
+        <ns0:txBody>
+          <ns1:bodyPr wrap="square" lIns="0" tIns="0" rIns="0" bIns="0" rtlCol="0" anchor="t"/>
+          <ns1:lstStyle/>
+          <ns1:p>
+            <ns1:pPr algn="l" indent="0" marL="0">
+              <ns1:buNone/>
+            </ns1:pPr>
+            <ns1:r>
+              <ns1:rPr lang="en-US" sz="1250" b="1" dirty="0">
+                <ns1:solidFill>
+                  <ns1:srgbClr val="0969DA"/>
+                </ns1:solidFill>
+                <ns1:latin typeface="Arial" pitchFamily="34" charset="0"/>
+                <ns1:ea typeface="Arial" pitchFamily="34" charset="-122"/>
+                <ns1:cs typeface="Arial" pitchFamily="34" charset="-120"/>
+              </ns1:rPr>
+              <ns1:t>EXERCISE</ns1:t>
+            </ns1:r>
+            <ns1:endParaRPr lang="en-US" sz="1250" dirty="0"/>
+          </ns1:p>
+        </ns0:txBody>
+      </ns0:sp>
+      <ns0:sp>
+        <ns0:nvSpPr>
+          <ns0:cNvPr id="7" name="Text 3"/>
+          <ns0:cNvSpPr/>
+          <ns0:nvPr/>
+        </ns0:nvSpPr>
+        <ns0:spPr>
+          <ns1:xfrm>
+            <ns1:off x="507950" y="622250"/>
+            <ns1:ext cx="8161020" cy="419100"/>
+          </ns1:xfrm>
+          <ns1:prstGeom prst="rect">
+            <ns1:avLst/>
+          </ns1:prstGeom>
+          <ns1:noFill/>
+          <ns1:ln/>
+        </ns0:spPr>
+        <ns0:txBody>
+          <ns1:bodyPr wrap="square" lIns="0" tIns="0" rIns="0" bIns="0" rtlCol="0" anchor="t"/>
+          <ns1:lstStyle/>
+          <ns1:p>
+            <ns1:pPr algn="l" indent="0" marL="0">
+              <ns1:lnSpc>
+                <ns1:spcPts val="3300"/>
+              </ns1:lnSpc>
+              <ns1:spcBef>
+                <ns1:spcPts val="400"/>
+              </ns1:spcBef>
+              <ns1:buNone/>
+            </ns1:pPr>
+            <ns1:r>
+              <ns1:rPr lang="en-US" sz="2800" b="1" dirty="0">
+                <ns1:solidFill>
+                  <ns1:srgbClr val="1F2328"/>
+                </ns1:solidFill>
+                <ns1:latin typeface="Arial" pitchFamily="34" charset="0"/>
+                <ns1:ea typeface="Arial" pitchFamily="34" charset="-122"/>
+                <ns1:cs typeface="Arial" pitchFamily="34" charset="-120"/>
+              </ns1:rPr>
+              <ns1:t>Connect Context7</ns1:t>
+            </ns1:r>
+            <ns1:endParaRPr lang="en-US" sz="2800" dirty="0"/>
+          </ns1:p>
+        </ns0:txBody>
+      </ns0:sp>
+      <ns0:sp>
+        <ns0:nvSpPr>
+          <ns0:cNvPr id="8" name="Text 4"/>
+          <ns0:cNvSpPr/>
+          <ns0:nvPr/>
+        </ns0:nvSpPr>
+        <ns0:spPr>
+          <ns1:xfrm>
+            <ns1:off x="507950" y="1104751"/>
+            <ns1:ext cx="8161020" cy="254050"/>
+          </ns1:xfrm>
+          <ns1:prstGeom prst="rect">
+            <ns1:avLst/>
+          </ns1:prstGeom>
+          <ns1:noFill/>
+          <ns1:ln/>
+        </ns0:spPr>
+        <ns0:txBody>
+          <ns1:bodyPr wrap="square" lIns="0" tIns="0" rIns="0" bIns="0" rtlCol="0" anchor="t"/>
+          <ns1:lstStyle/>
+          <ns1:p>
+            <ns1:pPr algn="l" indent="0" marL="0">
+              <ns1:lnSpc>
+                <ns1:spcPts val="2000"/>
+              </ns1:lnSpc>
+              <ns1:spcBef>
+                <ns1:spcPts val="500"/>
+              </ns1:spcBef>
+              <ns1:buNone/>
+            </ns1:pPr>
+            <ns1:r>
+              <ns1:rPr lang="en-US" sz="1650" dirty="0">
+                <ns1:solidFill>
+                  <ns1:srgbClr val="59636E"/>
+                </ns1:solidFill>
+                <ns1:latin typeface="Arial" pitchFamily="34" charset="0"/>
+                <ns1:ea typeface="Arial" pitchFamily="34" charset="-122"/>
+                <ns1:cs typeface="Arial" pitchFamily="34" charset="-120"/>
+              </ns1:rPr>
+              <ns1:t>Skip this if it is already connected.</ns1:t>
+            </ns1:r>
+            <ns1:endParaRPr lang="en-US" sz="1650" dirty="0"/>
+          </ns1:p>
+        </ns0:txBody>
+      </ns0:sp>
+      <ns0:sp>
+        <ns0:nvSpPr>
+          <ns0:cNvPr id="9" name="Text 5"/>
+          <ns0:cNvSpPr/>
+          <ns0:nvPr/>
+        </ns0:nvSpPr>
+        <ns0:spPr>
+          <ns1:xfrm>
+            <ns1:off x="612725" y="1564928"/>
+            <ns1:ext cx="7918400" cy="1771650"/>
+          </ns1:xfrm>
+          <ns1:prstGeom prst="roundRect">
+            <ns1:avLst>
+              <ns1:gd name="adj" fmla="val 4301"/>
+            </ns1:avLst>
+          </ns1:prstGeom>
+          <ns1:solidFill>
+            <ns1:srgbClr val="FFFFFF"/>
+          </ns1:solidFill>
+          <ns1:ln w="9525">
+            <ns1:solidFill>
+              <ns1:srgbClr val="D1D9E0"/>
+            </ns1:solidFill>
+          </ns1:ln>
+          <ns1:effectLst>
+            <ns1:outerShdw sx="100000" sy="100000" kx="0" ky="0" algn="bl" rotWithShape="0" blurRad="38100" dist="9525" dir="5400000">
+              <ns1:srgbClr val="1f2328">
+                <ns1:alpha val="12000"/>
+              </ns1:srgbClr>
+            </ns1:outerShdw>
+          </ns1:effectLst>
+        </ns0:spPr>
+        <ns0:txBody>
+          <ns1:bodyPr wrap="square" rtlCol="0" anchor="ctr"/>
+          <ns1:lstStyle/>
+          <ns1:p>
+            <ns1:pPr indent="0" marL="0">
+              <ns1:buNone/>
+            </ns1:pPr>
+            <ns1:endParaRPr lang="en-US" dirty="0"/>
+          </ns1:p>
+        </ns0:txBody>
+      </ns0:sp>
+      <ns0:pic>
+        <ns0:nvPicPr>
+          <ns0:cNvPr id="10" name="Image 2" descr="Context7 MCP server dialog with server name context7, HTTP selected, and URL https://mcp.context7.com/mcp"/>
+          <ns0:cNvPicPr>
+            <ns1:picLocks noChangeAspect="1"/>
+          </ns0:cNvPicPr>
+          <ns0:nvPr/>
+        </ns0:nvPicPr>
+        <ns0:blipFill>
+          <ns1:blip ns3:embed="rId4"/>
+          <ns1:stretch>
+            <ns1:fillRect/>
+          </ns1:stretch>
+        </ns0:blipFill>
+        <ns0:spPr>
+          <ns1:xfrm>
+            <ns1:off x="660350" y="1612553"/>
+            <ns1:ext cx="7823150" cy="1676400"/>
+          </ns1:xfrm>
+          <ns1:prstGeom prst="rect">
+            <ns1:avLst/>
+          </ns1:prstGeom>
+        </ns0:spPr>
+      </ns0:pic>
+      <ns0:sp>
+        <ns0:nvSpPr>
+          <ns0:cNvPr id="11" name="Text 6"/>
+          <ns0:cNvSpPr/>
+          <ns0:nvPr/>
+        </ns0:nvSpPr>
+        <ns0:spPr>
+          <ns1:xfrm>
+            <ns1:off x="507950" y="3542854"/>
+            <ns1:ext cx="2607618" cy="1118146"/>
+          </ns1:xfrm>
+          <ns1:prstGeom prst="roundRect">
+            <ns1:avLst>
+              <ns1:gd name="adj" fmla="val 11358"/>
+            </ns1:avLst>
+          </ns1:prstGeom>
+          <ns1:solidFill>
+            <ns1:srgbClr val="FFFFFF"/>
+          </ns1:solidFill>
+          <ns1:ln w="9525">
+            <ns1:solidFill>
+              <ns1:srgbClr val="9CD7FF"/>
+            </ns1:solidFill>
+          </ns1:ln>
+        </ns0:spPr>
+        <ns0:txBody>
+          <ns1:bodyPr wrap="square" rtlCol="0" anchor="ctr"/>
+          <ns1:lstStyle/>
+          <ns1:p>
+            <ns1:pPr indent="0" marL="0">
+              <ns1:buNone/>
+            </ns1:pPr>
+            <ns1:endParaRPr lang="en-US" dirty="0"/>
+          </ns1:p>
+        </ns0:txBody>
+      </ns0:sp>
+      <ns0:sp>
+        <ns0:nvSpPr>
+          <ns0:cNvPr id="12" name="Text 7"/>
+          <ns0:cNvSpPr/>
+          <ns0:nvPr/>
+        </ns0:nvSpPr>
+        <ns0:spPr>
+          <ns1:xfrm>
+            <ns1:off x="669875" y="3704779"/>
+            <ns1:ext cx="279350" cy="279350"/>
+          </ns1:xfrm>
+          <ns1:prstGeom prst="roundRect">
+            <ns1:avLst>
+              <ns1:gd name="adj" fmla="val 327331"/>
+            </ns1:avLst>
+          </ns1:prstGeom>
+          <ns1:solidFill>
+            <ns1:srgbClr val="0969DA"/>
+          </ns1:solidFill>
+          <ns1:ln/>
+        </ns0:spPr>
+        <ns0:txBody>
+          <ns1:bodyPr wrap="square" rtlCol="0" anchor="ctr"/>
+          <ns1:lstStyle/>
+          <ns1:p>
+            <ns1:pPr indent="0" marL="0">
+              <ns1:buNone/>
+            </ns1:pPr>
+            <ns1:endParaRPr lang="en-US" dirty="0"/>
+          </ns1:p>
+        </ns0:txBody>
+      </ns0:sp>
+      <ns0:sp>
+        <ns0:nvSpPr>
+          <ns0:cNvPr id="13" name="Text 8"/>
+          <ns0:cNvSpPr/>
+          <ns0:nvPr/>
+        </ns0:nvSpPr>
+        <ns0:spPr>
+          <ns1:xfrm>
+            <ns1:off x="764540" y="3749129"/>
+            <ns1:ext cx="90020" cy="190500"/>
+          </ns1:xfrm>
+          <ns1:prstGeom prst="rect">
+            <ns1:avLst/>
+          </ns1:prstGeom>
+          <ns1:noFill/>
+          <ns1:ln/>
+        </ns0:spPr>
+        <ns0:txBody>
+          <ns1:bodyPr wrap="square" lIns="0" tIns="0" rIns="0" bIns="0" rtlCol="0" anchor="t"/>
+          <ns1:lstStyle/>
+          <ns1:p>
+            <ns1:pPr algn="ctr" indent="0" marL="0">
+              <ns1:buNone/>
+            </ns1:pPr>
+            <ns1:r>
+              <ns1:rPr lang="en-US" sz="1250" b="1" dirty="0">
+                <ns1:solidFill>
+                  <ns1:srgbClr val="FFFFFF"/>
+                </ns1:solidFill>
+                <ns1:latin typeface="Arial" pitchFamily="34" charset="0"/>
+                <ns1:ea typeface="Arial" pitchFamily="34" charset="-122"/>
+                <ns1:cs typeface="Arial" pitchFamily="34" charset="-120"/>
+              </ns1:rPr>
+              <ns1:t>1</ns1:t>
+            </ns1:r>
+            <ns1:endParaRPr lang="en-US" sz="1250" dirty="0"/>
+          </ns1:p>
+        </ns0:txBody>
+      </ns0:sp>
+      <ns0:sp>
+        <ns0:nvSpPr>
+          <ns0:cNvPr id="14" name="Text 9"/>
+          <ns0:cNvSpPr/>
+          <ns0:nvPr/>
+        </ns0:nvSpPr>
+        <ns0:spPr>
+          <ns1:xfrm>
+            <ns1:off x="1063526" y="3730079"/>
+            <ns1:ext cx="1799341" cy="228600"/>
+          </ns1:xfrm>
+          <ns1:prstGeom prst="rect">
+            <ns1:avLst/>
+          </ns1:prstGeom>
+          <ns1:noFill/>
+          <ns1:ln/>
+        </ns0:spPr>
+        <ns0:txBody>
+          <ns1:bodyPr wrap="square" lIns="0" tIns="0" rIns="0" bIns="0" rtlCol="0" anchor="t"/>
+          <ns1:lstStyle/>
+          <ns1:p>
+            <ns1:pPr algn="l" indent="0" marL="0">
+              <ns1:lnSpc>
+                <ns1:spcPts val="1800"/>
+              </ns1:lnSpc>
+              <ns1:buNone/>
+            </ns1:pPr>
+            <ns1:r>
+              <ns1:rPr lang="en-US" sz="1650" b="1" dirty="0">
+                <ns1:solidFill>
+                  <ns1:srgbClr val="1F2328"/>
+                </ns1:solidFill>
+                <ns1:latin typeface="Arial" pitchFamily="34" charset="0"/>
+                <ns1:ea typeface="Arial" pitchFamily="34" charset="-122"/>
+                <ns1:cs typeface="Arial" pitchFamily="34" charset="-120"/>
+              </ns1:rPr>
+              <ns1:t>Customize</ns1:t>
+            </ns1:r>
+            <ns1:endParaRPr lang="en-US" sz="1650" dirty="0"/>
+          </ns1:p>
+        </ns0:txBody>
+      </ns0:sp>
+      <ns0:sp>
+        <ns0:nvSpPr>
+          <ns0:cNvPr id="15" name="Text 10"/>
+          <ns0:cNvSpPr/>
+          <ns0:nvPr/>
+        </ns0:nvSpPr>
+        <ns0:spPr>
+          <ns1:xfrm>
+            <ns1:off x="669875" y="4060329"/>
+            <ns1:ext cx="2329443" cy="438745"/>
+          </ns1:xfrm>
+          <ns1:prstGeom prst="rect">
+            <ns1:avLst/>
+          </ns1:prstGeom>
+          <ns1:noFill/>
+          <ns1:ln/>
+        </ns0:spPr>
+        <ns0:txBody>
+          <ns1:bodyPr wrap="square" lIns="0" tIns="0" rIns="0" bIns="0" rtlCol="0" anchor="t"/>
+          <ns1:lstStyle/>
+          <ns1:p>
+            <ns1:pPr algn="l" indent="0" marL="0">
+              <ns1:lnSpc>
+                <ns1:spcPts val="1690"/>
+              </ns1:lnSpc>
+              <ns1:buNone/>
+            </ns1:pPr>
+            <ns1:r>
+              <ns1:rPr lang="en-US" sz="1400" dirty="0">
+                <ns1:solidFill>
+                  <ns1:srgbClr val="59636E"/>
+                </ns1:solidFill>
+                <ns1:latin typeface="Arial" pitchFamily="34" charset="0"/>
+                <ns1:ea typeface="Arial" pitchFamily="34" charset="-122"/>
+                <ns1:cs typeface="Arial" pitchFamily="34" charset="-120"/>
+              </ns1:rPr>
+              <ns1:t>Browse &gt; MCP; search Context7.</ns1:t>
+            </ns1:r>
+            <ns1:pPr algn="l" indent="0" marL="0">
+              <ns1:lnSpc>
+                <ns1:spcPts val="1690"/>
+              </ns1:lnSpc>
+              <ns1:buNone/>
+            </ns1:pPr>
+            <ns1:r>
+              <ns1:rPr lang="en-US" sz="1400" b="1" dirty="0">
+                <ns1:solidFill>
+                  <ns1:srgbClr val="0550AE"/>
+                </ns1:solidFill>
+                <ns1:latin typeface="Courier New" pitchFamily="34" charset="0"/>
+                <ns1:ea typeface="Courier New" pitchFamily="34" charset="-122"/>
+                <ns1:cs typeface="Courier New" pitchFamily="34" charset="-120"/>
+              </ns1:rPr>
+              <ns1:t/>
+            </ns1:r>
+            <ns1:pPr algn="l" indent="0" marL="0">
+              <ns1:lnSpc>
+                <ns1:spcPts val="1690"/>
+              </ns1:lnSpc>
+              <ns1:buNone/>
+            </ns1:pPr>
+            <ns1:r>
+              <ns1:rPr lang="en-US" sz="1400" dirty="0">
+                <ns1:solidFill>
+                  <ns1:srgbClr val="59636E"/>
+                </ns1:solidFill>
+                <ns1:latin typeface="Arial" pitchFamily="34" charset="0"/>
+                <ns1:ea typeface="Arial" pitchFamily="34" charset="-122"/>
+                <ns1:cs typeface="Arial" pitchFamily="34" charset="-120"/>
+              </ns1:rPr>
+              <ns1:t/>
+            </ns1:r>
+            <ns1:pPr algn="l" indent="0" marL="0">
+              <ns1:lnSpc>
+                <ns1:spcPts val="1690"/>
+              </ns1:lnSpc>
+              <ns1:buNone/>
+            </ns1:pPr>
+            <ns1:r>
+              <ns1:rPr lang="en-US" sz="1400" b="1" dirty="0">
+                <ns1:solidFill>
+                  <ns1:srgbClr val="59636E"/>
+                </ns1:solidFill>
+                <ns1:latin typeface="Arial" pitchFamily="34" charset="0"/>
+                <ns1:ea typeface="Arial" pitchFamily="34" charset="-122"/>
+                <ns1:cs typeface="Arial" pitchFamily="34" charset="-120"/>
+              </ns1:rPr>
+              <ns1:t/>
+            </ns1:r>
+            <ns1:pPr algn="l" indent="0" marL="0">
+              <ns1:lnSpc>
+                <ns1:spcPts val="1690"/>
+              </ns1:lnSpc>
+              <ns1:buNone/>
+            </ns1:pPr>
+            <ns1:r>
+              <ns1:rPr lang="en-US" sz="1400" dirty="0">
+                <ns1:solidFill>
+                  <ns1:srgbClr val="59636E"/>
+                </ns1:solidFill>
+                <ns1:latin typeface="Arial" pitchFamily="34" charset="0"/>
+                <ns1:ea typeface="Arial" pitchFamily="34" charset="-122"/>
+                <ns1:cs typeface="Arial" pitchFamily="34" charset="-120"/>
+              </ns1:rPr>
+              <ns1:t/>
+            </ns1:r>
+            <ns1:endParaRPr lang="en-US" sz="1400" dirty="0"/>
+          </ns1:p>
+        </ns0:txBody>
+      </ns0:sp>
+      <ns0:sp>
+        <ns0:nvSpPr>
+          <ns0:cNvPr id="16" name="Text 11"/>
+          <ns0:cNvSpPr/>
+          <ns0:nvPr/>
+        </ns0:nvSpPr>
+        <ns0:spPr>
+          <ns1:xfrm>
+            <ns1:off x="3267968" y="3542854"/>
+            <ns1:ext cx="2607766" cy="1118146"/>
+          </ns1:xfrm>
+          <ns1:prstGeom prst="roundRect">
+            <ns1:avLst>
+              <ns1:gd name="adj" fmla="val 11358"/>
+            </ns1:avLst>
+          </ns1:prstGeom>
+          <ns1:solidFill>
+            <ns1:srgbClr val="FFFFFF"/>
+          </ns1:solidFill>
+          <ns1:ln w="9525">
+            <ns1:solidFill>
+              <ns1:srgbClr val="9CD7FF"/>
+            </ns1:solidFill>
+          </ns1:ln>
+        </ns0:spPr>
+        <ns0:txBody>
+          <ns1:bodyPr wrap="square" rtlCol="0" anchor="ctr"/>
+          <ns1:lstStyle/>
+          <ns1:p>
+            <ns1:pPr indent="0" marL="0">
+              <ns1:buNone/>
+            </ns1:pPr>
+            <ns1:endParaRPr lang="en-US" dirty="0"/>
+          </ns1:p>
+        </ns0:txBody>
+      </ns0:sp>
+      <ns0:sp>
+        <ns0:nvSpPr>
+          <ns0:cNvPr id="17" name="Text 12"/>
+          <ns0:cNvSpPr/>
+          <ns0:nvPr/>
+        </ns0:nvSpPr>
+        <ns0:spPr>
+          <ns1:xfrm>
+            <ns1:off x="3429893" y="3704779"/>
+            <ns1:ext cx="279350" cy="279350"/>
+          </ns1:xfrm>
+          <ns1:prstGeom prst="roundRect">
+            <ns1:avLst>
+              <ns1:gd name="adj" fmla="val 327331"/>
+            </ns1:avLst>
+          </ns1:prstGeom>
+          <ns1:solidFill>
+            <ns1:srgbClr val="0969DA"/>
+          </ns1:solidFill>
+          <ns1:ln/>
+        </ns0:spPr>
+        <ns0:txBody>
+          <ns1:bodyPr wrap="square" rtlCol="0" anchor="ctr"/>
+          <ns1:lstStyle/>
+          <ns1:p>
+            <ns1:pPr indent="0" marL="0">
+              <ns1:buNone/>
+            </ns1:pPr>
+            <ns1:endParaRPr lang="en-US" dirty="0"/>
+          </ns1:p>
+        </ns0:txBody>
+      </ns0:sp>
+      <ns0:sp>
+        <ns0:nvSpPr>
+          <ns0:cNvPr id="18" name="Text 13"/>
+          <ns0:cNvSpPr/>
+          <ns0:nvPr/>
+        </ns0:nvSpPr>
+        <ns0:spPr>
+          <ns1:xfrm>
+            <ns1:off x="3524558" y="3749129"/>
+            <ns1:ext cx="90020" cy="190500"/>
+          </ns1:xfrm>
+          <ns1:prstGeom prst="rect">
+            <ns1:avLst/>
+          </ns1:prstGeom>
+          <ns1:noFill/>
+          <ns1:ln/>
+        </ns0:spPr>
+        <ns0:txBody>
+          <ns1:bodyPr wrap="square" lIns="0" tIns="0" rIns="0" bIns="0" rtlCol="0" anchor="t"/>
+          <ns1:lstStyle/>
+          <ns1:p>
+            <ns1:pPr algn="ctr" indent="0" marL="0">
+              <ns1:buNone/>
+            </ns1:pPr>
+            <ns1:r>
+              <ns1:rPr lang="en-US" sz="1250" b="1" dirty="0">
+                <ns1:solidFill>
+                  <ns1:srgbClr val="FFFFFF"/>
+                </ns1:solidFill>
+                <ns1:latin typeface="Arial" pitchFamily="34" charset="0"/>
+                <ns1:ea typeface="Arial" pitchFamily="34" charset="-122"/>
+                <ns1:cs typeface="Arial" pitchFamily="34" charset="-120"/>
+              </ns1:rPr>
+              <ns1:t>2</ns1:t>
+            </ns1:r>
+            <ns1:endParaRPr lang="en-US" sz="1250" dirty="0"/>
+          </ns1:p>
+        </ns0:txBody>
+      </ns0:sp>
+      <ns0:sp>
+        <ns0:nvSpPr>
+          <ns0:cNvPr id="19" name="Text 14"/>
+          <ns0:cNvSpPr/>
+          <ns0:nvPr/>
+        </ns0:nvSpPr>
+        <ns0:spPr>
+          <ns1:xfrm>
+            <ns1:off x="3823543" y="3730079"/>
+            <ns1:ext cx="1841543" cy="228600"/>
+          </ns1:xfrm>
+          <ns1:prstGeom prst="rect">
+            <ns1:avLst/>
+          </ns1:prstGeom>
+          <ns1:noFill/>
+          <ns1:ln/>
+        </ns0:spPr>
+        <ns0:txBody>
+          <ns1:bodyPr wrap="square" lIns="0" tIns="0" rIns="0" bIns="0" rtlCol="0" anchor="t"/>
+          <ns1:lstStyle/>
+          <ns1:p>
+            <ns1:pPr algn="l" indent="0" marL="0">
+              <ns1:lnSpc>
+                <ns1:spcPts val="1800"/>
+              </ns1:lnSpc>
+              <ns1:buNone/>
+            </ns1:pPr>
+            <ns1:r>
+              <ns1:rPr lang="en-US" sz="1650" b="1" dirty="0">
+                <ns1:solidFill>
+                  <ns1:srgbClr val="1F2328"/>
+                </ns1:solidFill>
+                <ns1:latin typeface="Arial" pitchFamily="34" charset="0"/>
+                <ns1:ea typeface="Arial" pitchFamily="34" charset="-122"/>
+                <ns1:cs typeface="Arial" pitchFamily="34" charset="-120"/>
+              </ns1:rPr>
+              <ns1:t>Review the values</ns1:t>
+            </ns1:r>
+            <ns1:endParaRPr lang="en-US" sz="1650" dirty="0"/>
+          </ns1:p>
+        </ns0:txBody>
+      </ns0:sp>
+      <ns0:sp>
+        <ns0:nvSpPr>
+          <ns0:cNvPr id="20" name="Text 15"/>
+          <ns0:cNvSpPr/>
+          <ns0:nvPr/>
+        </ns0:nvSpPr>
+        <ns0:spPr>
+          <ns1:xfrm>
+            <ns1:off x="3429893" y="4060329"/>
+            <ns1:ext cx="2329595" cy="438745"/>
+          </ns1:xfrm>
+          <ns1:prstGeom prst="rect">
+            <ns1:avLst/>
+          </ns1:prstGeom>
+          <ns1:noFill/>
+          <ns1:ln/>
+        </ns0:spPr>
+        <ns0:txBody>
+          <ns1:bodyPr wrap="square" lIns="0" tIns="0" rIns="0" bIns="0" rtlCol="0" anchor="t"/>
+          <ns1:lstStyle/>
+          <ns1:p>
+            <ns1:pPr algn="l" indent="0" marL="0">
+              <ns1:lnSpc>
+                <ns1:spcPts val="1690"/>
+              </ns1:lnSpc>
+              <ns1:buNone/>
+            </ns1:pPr>
+            <ns1:r>
+              <ns1:rPr lang="en-US" sz="1400" b="1" dirty="0">
+                <ns1:solidFill>
+                  <ns1:srgbClr val="0550AE"/>
+                </ns1:solidFill>
+                <ns1:latin typeface="Courier New" pitchFamily="34" charset="0"/>
+                <ns1:ea typeface="Courier New" pitchFamily="34" charset="-122"/>
+                <ns1:cs typeface="Courier New" pitchFamily="34" charset="-120"/>
+              </ns1:rPr>
+              <ns1:t>HTTP</ns1:t>
+            </ns1:r>
+            <ns1:pPr algn="l" indent="0" marL="0">
+              <ns1:lnSpc>
+                <ns1:spcPts val="1690"/>
+              </ns1:lnSpc>
+              <ns1:buNone/>
+            </ns1:pPr>
+            <ns1:r>
+              <ns1:rPr lang="en-US" sz="1400" dirty="0">
+                <ns1:solidFill>
+                  <ns1:srgbClr val="59636E"/>
+                </ns1:solidFill>
+                <ns1:latin typeface="Arial" pitchFamily="34" charset="0"/>
+                <ns1:ea typeface="Arial" pitchFamily="34" charset="-122"/>
+                <ns1:cs typeface="Arial" pitchFamily="34" charset="-120"/>
+              </ns1:rPr>
+              <ns1:t> means a hosted server.</ns1:t>
+            </ns1:r>
+            <ns1:endParaRPr lang="en-US" sz="1400" dirty="0"/>
+          </ns1:p>
+        </ns0:txBody>
+      </ns0:sp>
+      <ns0:sp>
+        <ns0:nvSpPr>
+          <ns0:cNvPr id="21" name="Text 16"/>
+          <ns0:cNvSpPr/>
+          <ns0:nvPr/>
+        </ns0:nvSpPr>
+        <ns0:spPr>
+          <ns1:xfrm>
+            <ns1:off x="6028134" y="3542854"/>
+            <ns1:ext cx="2607766" cy="1118146"/>
+          </ns1:xfrm>
+          <ns1:prstGeom prst="roundRect">
+            <ns1:avLst>
+              <ns1:gd name="adj" fmla="val 11358"/>
+            </ns1:avLst>
+          </ns1:prstGeom>
+          <ns1:solidFill>
+            <ns1:srgbClr val="FFFFFF"/>
+          </ns1:solidFill>
+          <ns1:ln w="9525">
+            <ns1:solidFill>
+              <ns1:srgbClr val="9CD7FF"/>
+            </ns1:solidFill>
+          </ns1:ln>
+        </ns0:spPr>
+        <ns0:txBody>
+          <ns1:bodyPr wrap="square" rtlCol="0" anchor="ctr"/>
+          <ns1:lstStyle/>
+          <ns1:p>
+            <ns1:pPr indent="0" marL="0">
+              <ns1:buNone/>
+            </ns1:pPr>
+            <ns1:endParaRPr lang="en-US" dirty="0"/>
+          </ns1:p>
+        </ns0:txBody>
+      </ns0:sp>
+      <ns0:sp>
+        <ns0:nvSpPr>
+          <ns0:cNvPr id="22" name="Text 17"/>
+          <ns0:cNvSpPr/>
+          <ns0:nvPr/>
+        </ns0:nvSpPr>
+        <ns0:spPr>
+          <ns1:xfrm>
+            <ns1:off x="6190059" y="3704779"/>
+            <ns1:ext cx="279350" cy="279350"/>
+          </ns1:xfrm>
+          <ns1:prstGeom prst="roundRect">
+            <ns1:avLst>
+              <ns1:gd name="adj" fmla="val 327331"/>
+            </ns1:avLst>
+          </ns1:prstGeom>
+          <ns1:solidFill>
+            <ns1:srgbClr val="0969DA"/>
+          </ns1:solidFill>
+          <ns1:ln/>
+        </ns0:spPr>
+        <ns0:txBody>
+          <ns1:bodyPr wrap="square" rtlCol="0" anchor="ctr"/>
+          <ns1:lstStyle/>
+          <ns1:p>
+            <ns1:pPr indent="0" marL="0">
+              <ns1:buNone/>
+            </ns1:pPr>
+            <ns1:endParaRPr lang="en-US" dirty="0"/>
+          </ns1:p>
+        </ns0:txBody>
+      </ns0:sp>
+      <ns0:sp>
+        <ns0:nvSpPr>
+          <ns0:cNvPr id="23" name="Text 18"/>
+          <ns0:cNvSpPr/>
+          <ns0:nvPr/>
+        </ns0:nvSpPr>
+        <ns0:spPr>
+          <ns1:xfrm>
+            <ns1:off x="6284724" y="3749129"/>
+            <ns1:ext cx="90020" cy="190500"/>
+          </ns1:xfrm>
+          <ns1:prstGeom prst="rect">
+            <ns1:avLst/>
+          </ns1:prstGeom>
+          <ns1:noFill/>
+          <ns1:ln/>
+        </ns0:spPr>
+        <ns0:txBody>
+          <ns1:bodyPr wrap="square" lIns="0" tIns="0" rIns="0" bIns="0" rtlCol="0" anchor="t"/>
+          <ns1:lstStyle/>
+          <ns1:p>
+            <ns1:pPr algn="ctr" indent="0" marL="0">
+              <ns1:buNone/>
+            </ns1:pPr>
+            <ns1:r>
+              <ns1:rPr lang="en-US" sz="1250" b="1" dirty="0">
+                <ns1:solidFill>
+                  <ns1:srgbClr val="FFFFFF"/>
+                </ns1:solidFill>
+                <ns1:latin typeface="Arial" pitchFamily="34" charset="0"/>
+                <ns1:ea typeface="Arial" pitchFamily="34" charset="-122"/>
+                <ns1:cs typeface="Arial" pitchFamily="34" charset="-120"/>
+              </ns1:rPr>
+              <ns1:t>3</ns1:t>
+            </ns1:r>
+            <ns1:endParaRPr lang="en-US" sz="1250" dirty="0"/>
+          </ns1:p>
+        </ns0:txBody>
+      </ns0:sp>
+      <ns0:sp>
+        <ns0:nvSpPr>
+          <ns0:cNvPr id="24" name="Text 19"/>
+          <ns0:cNvSpPr/>
+          <ns0:nvPr/>
+        </ns0:nvSpPr>
+        <ns0:spPr>
+          <ns1:xfrm>
+            <ns1:off x="6583710" y="3730079"/>
+            <ns1:ext cx="1009349" cy="228600"/>
+          </ns1:xfrm>
+          <ns1:prstGeom prst="rect">
+            <ns1:avLst/>
+          </ns1:prstGeom>
+          <ns1:noFill/>
+          <ns1:ln/>
+        </ns0:spPr>
+        <ns0:txBody>
+          <ns1:bodyPr wrap="square" lIns="0" tIns="0" rIns="0" bIns="0" rtlCol="0" anchor="t"/>
+          <ns1:lstStyle/>
+          <ns1:p>
+            <ns1:pPr algn="l" indent="0" marL="0">
+              <ns1:lnSpc>
+                <ns1:spcPts val="1800"/>
+              </ns1:lnSpc>
+              <ns1:buNone/>
+            </ns1:pPr>
+            <ns1:r>
+              <ns1:rPr lang="en-US" sz="1650" b="1" dirty="0">
+                <ns1:solidFill>
+                  <ns1:srgbClr val="1F2328"/>
+                </ns1:solidFill>
+                <ns1:latin typeface="Arial" pitchFamily="34" charset="0"/>
+                <ns1:ea typeface="Arial" pitchFamily="34" charset="-122"/>
+                <ns1:cs typeface="Arial" pitchFamily="34" charset="-120"/>
+              </ns1:rPr>
+              <ns1:t>Confirm it</ns1:t>
+            </ns1:r>
+            <ns1:endParaRPr lang="en-US" sz="1650" dirty="0"/>
+          </ns1:p>
+        </ns0:txBody>
+      </ns0:sp>
+      <ns0:sp>
+        <ns0:nvSpPr>
+          <ns0:cNvPr id="25" name="Text 20"/>
+          <ns0:cNvSpPr/>
+          <ns0:nvPr/>
+        </ns0:nvSpPr>
+        <ns0:spPr>
+          <ns1:xfrm>
+            <ns1:off x="6190059" y="4060329"/>
+            <ns1:ext cx="2329595" cy="214610"/>
+          </ns1:xfrm>
+          <ns1:prstGeom prst="rect">
+            <ns1:avLst/>
+          </ns1:prstGeom>
+          <ns1:noFill/>
+          <ns1:ln/>
+        </ns0:spPr>
+        <ns0:txBody>
+          <ns1:bodyPr wrap="square" lIns="0" tIns="0" rIns="0" bIns="0" rtlCol="0" anchor="t"/>
+          <ns1:lstStyle/>
+          <ns1:p>
+            <ns1:pPr algn="l" indent="0" marL="0">
+              <ns1:lnSpc>
+                <ns1:spcPts val="1690"/>
+              </ns1:lnSpc>
+              <ns1:buNone/>
+            </ns1:pPr>
+            <ns1:r>
+              <ns1:rPr lang="en-US" sz="1400" dirty="0">
+                <ns1:solidFill>
+                  <ns1:srgbClr val="59636E"/>
+                </ns1:solidFill>
+                <ns1:latin typeface="Arial" pitchFamily="34" charset="0"/>
+                <ns1:ea typeface="Arial" pitchFamily="34" charset="-122"/>
+                <ns1:cs typeface="Arial" pitchFamily="34" charset="-120"/>
+              </ns1:rPr>
+              <ns1:t>Installed, connected, and enabled.</ns1:t>
+            </ns1:r>
+            <ns1:endParaRPr lang="en-US" sz="1400" dirty="0"/>
+          </ns1:p>
+        </ns0:txBody>
+      </ns0:sp>
+    </ns0:spTree>
+  </ns0:cSld>
+  <ns0:clrMapOvr>
+    <ns1:masterClrMapping/>
+  </ns0:clrMapOvr>
+</ns0:sld>
 </file>
 
 <file path=ppt/slides/slide9.xml><?xml version="1.0" encoding="utf-8"?>

--- a/slides/05-mcp-plugins.pptx
+++ b/slides/05-mcp-plugins.pptx
@@ -1483,7 +1483,7 @@
           <ns1:p>
             <ns1:r>
               <ns1:rPr lang="en-US" dirty="0"/>
-              <ns1:t>Model Context Protocol defines how an AI application connects to tools and data. An MCP server supplies those tools. The graphic shows example connections, not required installations. The app already reads and searches local files, and you do not need another GitHub server for the Chapter 03 work. Manage servers from Customize. Use Browse to find available servers and Installed to check the ones you have added.</ns1:t>
+              <ns1:t>Model Context Protocol defines how an AI application connects to tools and data. An MCP server supplies those tools. The graphic shows example connections, not required installations. The app already reads and searches local files, and you do not need another GitHub server for the Chapter 03 work. Manage servers from Customize. Use Browse to find available servers and Installed to check the ones you have added. The MCP server is not an app dependency: the Book App code does not change.</ns1:t>
             </ns1:r>
             <ns1:endParaRPr lang="en-US" dirty="0"/>
           </ns1:p>
@@ -2591,7 +2591,7 @@
         </p:nvSpPr>
         <p:spPr>
           <a:xfrm>
-            <a:off x="711101" y="1279773"/>
+            <a:off x="711101" y="1645533"/>
             <a:ext cx="5570169" cy="209550"/>
           </a:xfrm>
           <a:prstGeom prst="rect">
@@ -2630,7 +2630,7 @@
         </p:nvSpPr>
         <p:spPr>
           <a:xfrm>
-            <a:off x="711101" y="1590824"/>
+            <a:off x="711101" y="1956584"/>
             <a:ext cx="5570169" cy="1168301"/>
           </a:xfrm>
           <a:prstGeom prst="rect">
@@ -2675,7 +2675,7 @@
         </p:nvSpPr>
         <p:spPr>
           <a:xfrm>
-            <a:off x="711101" y="2962275"/>
+            <a:off x="711101" y="3328035"/>
             <a:ext cx="609600" cy="63401"/>
           </a:xfrm>
           <a:prstGeom prst="roundRect">
@@ -2696,48 +2696,6 @@
               <a:buNone/>
             </a:pPr>
             <a:endParaRPr lang="en-US" dirty="0"/>
-          </a:p>
-        </p:txBody>
-      </p:sp>
-      <p:sp>
-        <p:nvSpPr>
-          <p:cNvPr id="12" name="Text 8"/>
-          <p:cNvSpPr/>
-          <p:nvPr/>
-        </p:nvSpPr>
-        <p:spPr>
-          <a:xfrm>
-            <a:off x="711101" y="3228826"/>
-            <a:ext cx="5570169" cy="634901"/>
-          </a:xfrm>
-          <a:prstGeom prst="rect">
-            <a:avLst/>
-          </a:prstGeom>
-          <a:noFill/>
-          <a:ln/>
-        </p:spPr>
-        <p:txBody>
-          <a:bodyPr wrap="square" lIns="0" tIns="0" rIns="0" bIns="0" rtlCol="0" anchor="t"/>
-          <a:lstStyle/>
-          <a:p>
-            <a:pPr algn="l" indent="0" marL="0">
-              <a:lnSpc>
-                <a:spcPts val="2500"/>
-              </a:lnSpc>
-              <a:buNone/>
-            </a:pPr>
-            <a:r>
-              <a:rPr lang="en-US" sz="1900" dirty="0">
-                <a:solidFill>
-                  <a:srgbClr val="59636E"/>
-                </a:solidFill>
-                <a:latin typeface="Arial" pitchFamily="34" charset="0"/>
-                <a:ea typeface="Arial" pitchFamily="34" charset="-122"/>
-                <a:cs typeface="Arial" pitchFamily="34" charset="-120"/>
-              </a:rPr>
-              <a:t>Install a package, then invoke the capability inside it. Installing is not running.</a:t>
-            </a:r>
-            <a:endParaRPr lang="en-US" sz="1900" dirty="0"/>
           </a:p>
         </p:txBody>
       </p:sp>
@@ -10889,7 +10847,7 @@
         </p:nvSpPr>
         <p:spPr>
           <a:xfrm>
-            <a:off x="711101" y="1279773"/>
+            <a:off x="711101" y="1645533"/>
             <a:ext cx="5570169" cy="209550"/>
           </a:xfrm>
           <a:prstGeom prst="rect">
@@ -10928,7 +10886,7 @@
         </p:nvSpPr>
         <p:spPr>
           <a:xfrm>
-            <a:off x="711101" y="1590824"/>
+            <a:off x="711101" y="1956584"/>
             <a:ext cx="5570169" cy="1168301"/>
           </a:xfrm>
           <a:prstGeom prst="rect">
@@ -10973,7 +10931,7 @@
         </p:nvSpPr>
         <p:spPr>
           <a:xfrm>
-            <a:off x="711101" y="2962275"/>
+            <a:off x="711101" y="3328035"/>
             <a:ext cx="609600" cy="63401"/>
           </a:xfrm>
           <a:prstGeom prst="roundRect">
@@ -10994,48 +10952,6 @@
               <a:buNone/>
             </a:pPr>
             <a:endParaRPr lang="en-US" dirty="0"/>
-          </a:p>
-        </p:txBody>
-      </p:sp>
-      <p:sp>
-        <p:nvSpPr>
-          <p:cNvPr id="12" name="Text 8"/>
-          <p:cNvSpPr/>
-          <p:nvPr/>
-        </p:nvSpPr>
-        <p:spPr>
-          <a:xfrm>
-            <a:off x="711101" y="3228826"/>
-            <a:ext cx="5570169" cy="634901"/>
-          </a:xfrm>
-          <a:prstGeom prst="rect">
-            <a:avLst/>
-          </a:prstGeom>
-          <a:noFill/>
-          <a:ln/>
-        </p:spPr>
-        <p:txBody>
-          <a:bodyPr wrap="square" lIns="0" tIns="0" rIns="0" bIns="0" rtlCol="0" anchor="t"/>
-          <a:lstStyle/>
-          <a:p>
-            <a:pPr algn="l" indent="0" marL="0">
-              <a:lnSpc>
-                <a:spcPts val="2500"/>
-              </a:lnSpc>
-              <a:buNone/>
-            </a:pPr>
-            <a:r>
-              <a:rPr lang="en-US" sz="1900" dirty="0">
-                <a:solidFill>
-                  <a:srgbClr val="59636E"/>
-                </a:solidFill>
-                <a:latin typeface="Arial" pitchFamily="34" charset="0"/>
-                <a:ea typeface="Arial" pitchFamily="34" charset="-122"/>
-                <a:cs typeface="Arial" pitchFamily="34" charset="-120"/>
-              </a:rPr>
-              <a:t>Give the agent a live connection to up-to-date documentation.</a:t>
-            </a:r>
-            <a:endParaRPr lang="en-US" sz="1900" dirty="0"/>
           </a:p>
         </p:txBody>
       </p:sp>
@@ -11335,8 +11251,8 @@
         </p:nvSpPr>
         <p:spPr>
           <a:xfrm>
-            <a:off x="511076" y="1700361"/>
-            <a:ext cx="4184600" cy="2821930"/>
+            <a:off x="2263140" y="1508760"/>
+            <a:ext cx="4617720" cy="3118104"/>
           </a:xfrm>
           <a:prstGeom prst="roundRect">
             <a:avLst>
@@ -11386,443 +11302,14 @@
         </p:blipFill>
         <p:spPr>
           <a:xfrm>
-            <a:off x="558701" y="1747986"/>
-            <a:ext cx="4089350" cy="2726680"/>
+            <a:off x="2308860" y="1554480"/>
+            <a:ext cx="4526280" cy="3017520"/>
           </a:xfrm>
           <a:prstGeom prst="rect">
             <a:avLst/>
           </a:prstGeom>
         </p:spPr>
       </p:pic>
-      <p:sp>
-        <p:nvSpPr>
-          <p:cNvPr id="11" name="Text 6"/>
-          <p:cNvSpPr/>
-          <p:nvPr/>
-        </p:nvSpPr>
-        <p:spPr>
-          <a:xfrm>
-            <a:off x="5003750" y="1986260"/>
-            <a:ext cx="381000" cy="381000"/>
-          </a:xfrm>
-          <a:prstGeom prst="roundRect">
-            <a:avLst>
-              <a:gd name="adj" fmla="val 23333"/>
-            </a:avLst>
-          </a:prstGeom>
-          <a:solidFill>
-            <a:srgbClr val="DDF4FF"/>
-          </a:solidFill>
-          <a:ln/>
-        </p:spPr>
-        <p:txBody>
-          <a:bodyPr wrap="square" rtlCol="0" anchor="ctr"/>
-          <a:lstStyle/>
-          <a:p>
-            <a:pPr indent="0" marL="0">
-              <a:buNone/>
-            </a:pPr>
-            <a:endParaRPr lang="en-US" dirty="0"/>
-          </a:p>
-        </p:txBody>
-      </p:sp>
-      <p:pic>
-        <p:nvPicPr>
-          <p:cNvPr id="12" name="Image 3" descr="">
-            <a:extLst>
-              <a:ext uri="{C183D7F6-B498-43B3-948B-1728B52AA6E4}">
-                <adec:decorative xmlns:adec="http://schemas.microsoft.com/office/drawing/2017/decorative" val="1"/>
-              </a:ext>
-            </a:extLst>
-          </p:cNvPr>
-          <p:cNvPicPr>
-            <a:picLocks noChangeAspect="1"/>
-          </p:cNvPicPr>
-          <p:nvPr/>
-        </p:nvPicPr>
-        <p:blipFill>
-          <a:blip r:embed="rId5"/>
-          <a:stretch>
-            <a:fillRect/>
-          </a:stretch>
-        </p:blipFill>
-        <p:spPr>
-          <a:xfrm>
-            <a:off x="5086350" y="2068860"/>
-            <a:ext cx="215801" cy="215801"/>
-          </a:xfrm>
-          <a:prstGeom prst="rect">
-            <a:avLst/>
-          </a:prstGeom>
-        </p:spPr>
-      </p:pic>
-      <p:sp>
-        <p:nvSpPr>
-          <p:cNvPr id="13" name="Text 7"/>
-          <p:cNvSpPr/>
-          <p:nvPr/>
-        </p:nvSpPr>
-        <p:spPr>
-          <a:xfrm>
-            <a:off x="5537150" y="1950839"/>
-            <a:ext cx="2420678" cy="228600"/>
-          </a:xfrm>
-          <a:prstGeom prst="rect">
-            <a:avLst/>
-          </a:prstGeom>
-          <a:noFill/>
-          <a:ln/>
-        </p:spPr>
-        <p:txBody>
-          <a:bodyPr wrap="square" lIns="0" tIns="0" rIns="0" bIns="0" rtlCol="0" anchor="t"/>
-          <a:lstStyle/>
-          <a:p>
-            <a:pPr algn="l" indent="0" marL="0">
-              <a:buNone/>
-            </a:pPr>
-            <a:r>
-              <a:rPr lang="en-US" sz="1550" b="1" dirty="0">
-                <a:solidFill>
-                  <a:srgbClr val="1F2328"/>
-                </a:solidFill>
-                <a:latin typeface="Arial" pitchFamily="34" charset="0"/>
-                <a:ea typeface="Arial" pitchFamily="34" charset="-122"/>
-                <a:cs typeface="Arial" pitchFamily="34" charset="-120"/>
-              </a:rPr>
-              <a:t>The server supplies tools</a:t>
-            </a:r>
-            <a:endParaRPr lang="en-US" sz="1550" dirty="0"/>
-          </a:p>
-        </p:txBody>
-      </p:sp>
-      <p:sp>
-        <p:nvSpPr>
-          <p:cNvPr id="14" name="Text 8"/>
-          <p:cNvSpPr/>
-          <p:nvPr/>
-        </p:nvSpPr>
-        <p:spPr>
-          <a:xfrm>
-            <a:off x="5537150" y="2204740"/>
-            <a:ext cx="2420678" cy="198090"/>
-          </a:xfrm>
-          <a:prstGeom prst="rect">
-            <a:avLst/>
-          </a:prstGeom>
-          <a:noFill/>
-          <a:ln/>
-        </p:spPr>
-        <p:txBody>
-          <a:bodyPr wrap="square" lIns="0" tIns="0" rIns="0" bIns="0" rtlCol="0" anchor="t"/>
-          <a:lstStyle/>
-          <a:p>
-            <a:pPr algn="l" indent="0" marL="0">
-              <a:lnSpc>
-                <a:spcPts val="1560"/>
-              </a:lnSpc>
-              <a:buNone/>
-            </a:pPr>
-            <a:r>
-              <a:rPr lang="en-US" sz="1350" dirty="0">
-                <a:solidFill>
-                  <a:srgbClr val="59636E"/>
-                </a:solidFill>
-                <a:latin typeface="Arial" pitchFamily="34" charset="0"/>
-                <a:ea typeface="Arial" pitchFamily="34" charset="-122"/>
-                <a:cs typeface="Arial" pitchFamily="34" charset="-120"/>
-              </a:rPr>
-              <a:t>Local or hosted at a service.</a:t>
-            </a:r>
-            <a:endParaRPr lang="en-US" sz="1350" dirty="0"/>
-          </a:p>
-        </p:txBody>
-      </p:sp>
-      <p:sp>
-        <p:nvSpPr>
-          <p:cNvPr id="15" name="Text 9"/>
-          <p:cNvSpPr/>
-          <p:nvPr/>
-        </p:nvSpPr>
-        <p:spPr>
-          <a:xfrm>
-            <a:off x="5003750" y="2920752"/>
-            <a:ext cx="381000" cy="381000"/>
-          </a:xfrm>
-          <a:prstGeom prst="roundRect">
-            <a:avLst>
-              <a:gd name="adj" fmla="val 23333"/>
-            </a:avLst>
-          </a:prstGeom>
-          <a:solidFill>
-            <a:srgbClr val="DDF4FF"/>
-          </a:solidFill>
-          <a:ln/>
-        </p:spPr>
-        <p:txBody>
-          <a:bodyPr wrap="square" rtlCol="0" anchor="ctr"/>
-          <a:lstStyle/>
-          <a:p>
-            <a:pPr indent="0" marL="0">
-              <a:buNone/>
-            </a:pPr>
-            <a:endParaRPr lang="en-US" dirty="0"/>
-          </a:p>
-        </p:txBody>
-      </p:sp>
-      <p:pic>
-        <p:nvPicPr>
-          <p:cNvPr id="16" name="Image 4" descr="">
-            <a:extLst>
-              <a:ext uri="{C183D7F6-B498-43B3-948B-1728B52AA6E4}">
-                <adec:decorative xmlns:adec="http://schemas.microsoft.com/office/drawing/2017/decorative" val="1"/>
-              </a:ext>
-            </a:extLst>
-          </p:cNvPr>
-          <p:cNvPicPr>
-            <a:picLocks noChangeAspect="1"/>
-          </p:cNvPicPr>
-          <p:nvPr/>
-        </p:nvPicPr>
-        <p:blipFill>
-          <a:blip r:embed="rId6"/>
-          <a:stretch>
-            <a:fillRect/>
-          </a:stretch>
-        </p:blipFill>
-        <p:spPr>
-          <a:xfrm>
-            <a:off x="5086350" y="3003352"/>
-            <a:ext cx="215801" cy="215801"/>
-          </a:xfrm>
-          <a:prstGeom prst="rect">
-            <a:avLst/>
-          </a:prstGeom>
-        </p:spPr>
-      </p:pic>
-      <p:sp>
-        <p:nvSpPr>
-          <p:cNvPr id="17" name="Text 10"/>
-          <p:cNvSpPr/>
-          <p:nvPr/>
-        </p:nvSpPr>
-        <p:spPr>
-          <a:xfrm>
-            <a:off x="5537150" y="2885331"/>
-            <a:ext cx="2333086" cy="228600"/>
-          </a:xfrm>
-          <a:prstGeom prst="rect">
-            <a:avLst/>
-          </a:prstGeom>
-          <a:noFill/>
-          <a:ln/>
-        </p:spPr>
-        <p:txBody>
-          <a:bodyPr wrap="square" lIns="0" tIns="0" rIns="0" bIns="0" rtlCol="0" anchor="t"/>
-          <a:lstStyle/>
-          <a:p>
-            <a:pPr algn="l" indent="0" marL="0">
-              <a:buNone/>
-            </a:pPr>
-            <a:r>
-              <a:rPr lang="en-US" sz="1550" b="1" dirty="0">
-                <a:solidFill>
-                  <a:srgbClr val="1F2328"/>
-                </a:solidFill>
-                <a:latin typeface="Arial" pitchFamily="34" charset="0"/>
-                <a:ea typeface="Arial" pitchFamily="34" charset="-122"/>
-                <a:cs typeface="Arial" pitchFamily="34" charset="-120"/>
-              </a:rPr>
-              <a:t>Context7 supplies docs</a:t>
-            </a:r>
-            <a:endParaRPr lang="en-US" sz="1550" dirty="0"/>
-          </a:p>
-        </p:txBody>
-      </p:sp>
-      <p:sp>
-        <p:nvSpPr>
-          <p:cNvPr id="18" name="Text 11"/>
-          <p:cNvSpPr/>
-          <p:nvPr/>
-        </p:nvSpPr>
-        <p:spPr>
-          <a:xfrm>
-            <a:off x="5537150" y="3139232"/>
-            <a:ext cx="2333086" cy="198090"/>
-          </a:xfrm>
-          <a:prstGeom prst="rect">
-            <a:avLst/>
-          </a:prstGeom>
-          <a:noFill/>
-          <a:ln/>
-        </p:spPr>
-        <p:txBody>
-          <a:bodyPr wrap="square" lIns="0" tIns="0" rIns="0" bIns="0" rtlCol="0" anchor="t"/>
-          <a:lstStyle/>
-          <a:p>
-            <a:pPr algn="l" indent="0" marL="0">
-              <a:lnSpc>
-                <a:spcPts val="1560"/>
-              </a:lnSpc>
-              <a:buNone/>
-            </a:pPr>
-            <a:r>
-              <a:rPr lang="en-US" sz="1350" dirty="0">
-                <a:solidFill>
-                  <a:srgbClr val="59636E"/>
-                </a:solidFill>
-                <a:latin typeface="Arial" pitchFamily="34" charset="0"/>
-                <a:ea typeface="Arial" pitchFamily="34" charset="-122"/>
-                <a:cs typeface="Arial" pitchFamily="34" charset="-120"/>
-              </a:rPr>
-              <a:t>Current React documentation.</a:t>
-            </a:r>
-            <a:endParaRPr lang="en-US" sz="1350" dirty="0"/>
-          </a:p>
-        </p:txBody>
-      </p:sp>
-      <p:sp>
-        <p:nvSpPr>
-          <p:cNvPr id="19" name="Text 12"/>
-          <p:cNvSpPr/>
-          <p:nvPr/>
-        </p:nvSpPr>
-        <p:spPr>
-          <a:xfrm>
-            <a:off x="5003750" y="3855244"/>
-            <a:ext cx="381000" cy="381000"/>
-          </a:xfrm>
-          <a:prstGeom prst="roundRect">
-            <a:avLst>
-              <a:gd name="adj" fmla="val 23333"/>
-            </a:avLst>
-          </a:prstGeom>
-          <a:solidFill>
-            <a:srgbClr val="DDF4FF"/>
-          </a:solidFill>
-          <a:ln/>
-        </p:spPr>
-        <p:txBody>
-          <a:bodyPr wrap="square" rtlCol="0" anchor="ctr"/>
-          <a:lstStyle/>
-          <a:p>
-            <a:pPr indent="0" marL="0">
-              <a:buNone/>
-            </a:pPr>
-            <a:endParaRPr lang="en-US" dirty="0"/>
-          </a:p>
-        </p:txBody>
-      </p:sp>
-      <p:pic>
-        <p:nvPicPr>
-          <p:cNvPr id="20" name="Image 5" descr="">
-            <a:extLst>
-              <a:ext uri="{C183D7F6-B498-43B3-948B-1728B52AA6E4}">
-                <adec:decorative xmlns:adec="http://schemas.microsoft.com/office/drawing/2017/decorative" val="1"/>
-              </a:ext>
-            </a:extLst>
-          </p:cNvPr>
-          <p:cNvPicPr>
-            <a:picLocks noChangeAspect="1"/>
-          </p:cNvPicPr>
-          <p:nvPr/>
-        </p:nvPicPr>
-        <p:blipFill>
-          <a:blip r:embed="rId7"/>
-          <a:stretch>
-            <a:fillRect/>
-          </a:stretch>
-        </p:blipFill>
-        <p:spPr>
-          <a:xfrm>
-            <a:off x="5086350" y="3937843"/>
-            <a:ext cx="215801" cy="215801"/>
-          </a:xfrm>
-          <a:prstGeom prst="rect">
-            <a:avLst/>
-          </a:prstGeom>
-        </p:spPr>
-      </p:pic>
-      <p:sp>
-        <p:nvSpPr>
-          <p:cNvPr id="21" name="Text 13"/>
-          <p:cNvSpPr/>
-          <p:nvPr/>
-        </p:nvSpPr>
-        <p:spPr>
-          <a:xfrm>
-            <a:off x="5537150" y="3819823"/>
-            <a:ext cx="2916927" cy="228600"/>
-          </a:xfrm>
-          <a:prstGeom prst="rect">
-            <a:avLst/>
-          </a:prstGeom>
-          <a:noFill/>
-          <a:ln/>
-        </p:spPr>
-        <p:txBody>
-          <a:bodyPr wrap="square" lIns="0" tIns="0" rIns="0" bIns="0" rtlCol="0" anchor="t"/>
-          <a:lstStyle/>
-          <a:p>
-            <a:pPr algn="l" indent="0" marL="0">
-              <a:buNone/>
-            </a:pPr>
-            <a:r>
-              <a:rPr lang="en-US" sz="1550" b="1" dirty="0">
-                <a:solidFill>
-                  <a:srgbClr val="1F2328"/>
-                </a:solidFill>
-                <a:latin typeface="Arial" pitchFamily="34" charset="0"/>
-                <a:ea typeface="Arial" pitchFamily="34" charset="-122"/>
-                <a:cs typeface="Arial" pitchFamily="34" charset="-120"/>
-              </a:rPr>
-              <a:t>Not an app dependency</a:t>
-            </a:r>
-            <a:endParaRPr lang="en-US" sz="1550" dirty="0"/>
-          </a:p>
-        </p:txBody>
-      </p:sp>
-      <p:sp>
-        <p:nvSpPr>
-          <p:cNvPr id="22" name="Text 14"/>
-          <p:cNvSpPr/>
-          <p:nvPr/>
-        </p:nvSpPr>
-        <p:spPr>
-          <a:xfrm>
-            <a:off x="5537150" y="4073723"/>
-            <a:ext cx="2916927" cy="198090"/>
-          </a:xfrm>
-          <a:prstGeom prst="rect">
-            <a:avLst/>
-          </a:prstGeom>
-          <a:noFill/>
-          <a:ln/>
-        </p:spPr>
-        <p:txBody>
-          <a:bodyPr wrap="square" lIns="0" tIns="0" rIns="0" bIns="0" rtlCol="0" anchor="t"/>
-          <a:lstStyle/>
-          <a:p>
-            <a:pPr algn="l" indent="0" marL="0">
-              <a:lnSpc>
-                <a:spcPts val="1560"/>
-              </a:lnSpc>
-              <a:buNone/>
-            </a:pPr>
-            <a:r>
-              <a:rPr lang="en-US" sz="1350" dirty="0">
-                <a:solidFill>
-                  <a:srgbClr val="59636E"/>
-                </a:solidFill>
-                <a:latin typeface="Arial" pitchFamily="34" charset="0"/>
-                <a:ea typeface="Arial" pitchFamily="34" charset="-122"/>
-                <a:cs typeface="Arial" pitchFamily="34" charset="-120"/>
-              </a:rPr>
-              <a:t>The Book App code does not change.</a:t>
-            </a:r>
-            <a:endParaRPr lang="en-US" sz="1350" dirty="0"/>
-          </a:p>
-        </p:txBody>
-      </p:sp>
     </p:spTree>
   </p:cSld>
   <p:clrMapOvr>
